--- a/课件/C1/C1-B-05/C1-B-05.pptx
+++ b/课件/C1/C1-B-05/C1-B-05.pptx
@@ -1,31 +1,28 @@
 
 <file path=ppt/presentation.xml><?xml version="1.0" encoding="utf-8"?>
-<p:presentation xmlns:a="http://schemas.openxmlformats.org/drawingml/2006/main" xmlns:r="http://schemas.openxmlformats.org/officeDocument/2006/relationships" xmlns:p="http://schemas.openxmlformats.org/presentationml/2006/main" saveSubsetFonts="1" autoCompressPictures="0">
+<p:presentation xmlns:a="http://schemas.openxmlformats.org/drawingml/2006/main" xmlns:r="http://schemas.openxmlformats.org/officeDocument/2006/relationships" xmlns:p="http://schemas.openxmlformats.org/presentationml/2006/main" autoCompressPictures="0">
   <p:sldMasterIdLst>
     <p:sldMasterId id="2147483648" r:id="rId1"/>
   </p:sldMasterIdLst>
+  <p:notesMasterIdLst>
+    <p:notesMasterId r:id="rId4"/>
+  </p:notesMasterIdLst>
   <p:sldIdLst>
-    <p:sldId id="256" r:id="rId2"/>
-    <p:sldId id="257" r:id="rId3"/>
-    <p:sldId id="258" r:id="rId4"/>
-    <p:sldId id="259" r:id="rId5"/>
-    <p:sldId id="260" r:id="rId6"/>
-    <p:sldId id="261" r:id="rId7"/>
-    <p:sldId id="262" r:id="rId8"/>
-    <p:sldId id="263" r:id="rId9"/>
-    <p:sldId id="264" r:id="rId10"/>
-    <p:sldId id="265" r:id="rId11"/>
-    <p:sldId id="266" r:id="rId12"/>
-    <p:sldId id="267" r:id="rId13"/>
-    <p:sldId id="268" r:id="rId14"/>
-    <p:sldId id="269" r:id="rId15"/>
-    <p:sldId id="270" r:id="rId16"/>
+    <p:sldId id="256" r:id="rId3"/>
+    <p:sldId id="257" r:id="rId5"/>
+    <p:sldId id="258" r:id="rId6"/>
+    <p:sldId id="259" r:id="rId7"/>
+    <p:sldId id="260" r:id="rId8"/>
+    <p:sldId id="261" r:id="rId9"/>
+    <p:sldId id="262" r:id="rId10"/>
+    <p:sldId id="263" r:id="rId11"/>
+    <p:sldId id="264" r:id="rId12"/>
+    <p:sldId id="265" r:id="rId13"/>
+    <p:sldId id="266" r:id="rId14"/>
+    <p:sldId id="267" r:id="rId15"/>
   </p:sldIdLst>
-  <p:notesMasterIdLst>
-    <p:notesMasterId r:id="rId17"/>
-  </p:notesMasterIdLst>
-  <p:sldSz cx="12191695" cy="6858000"/>
-  <p:notesSz cx="6858000" cy="12191695"/>
+  <p:sldSz cx="12191365" cy="6858000"/>
+  <p:notesSz cx="6858000" cy="12191365"/>
   <p:defaultTextStyle>
     <a:lvl1pPr marL="0" algn="l" defTabSz="914400" rtl="0" eaLnBrk="1" latinLnBrk="0" hangingPunct="1">
       <a:defRPr sz="1800" kern="1200">
@@ -203,7 +200,6 @@
           <a:p>
             <a:fld id="{5282F153-3F37-0F45-9E97-73ACFA13230C}" type="datetimeFigureOut">
               <a:rPr lang="en-US"/>
-              <a:t>7/23/19</a:t>
             </a:fld>
             <a:endParaRPr lang="en-US"/>
           </a:p>
@@ -270,6 +266,7 @@
               <a:rPr lang="en-US"/>
               <a:t>Click to edit Master text styles</a:t>
             </a:r>
+            <a:endParaRPr lang="en-US"/>
           </a:p>
           <a:p>
             <a:pPr lvl="1"/>
@@ -277,6 +274,7 @@
               <a:rPr lang="en-US"/>
               <a:t>Second level</a:t>
             </a:r>
+            <a:endParaRPr lang="en-US"/>
           </a:p>
           <a:p>
             <a:pPr lvl="2"/>
@@ -284,6 +282,7 @@
               <a:rPr lang="en-US"/>
               <a:t>Third level</a:t>
             </a:r>
+            <a:endParaRPr lang="en-US"/>
           </a:p>
           <a:p>
             <a:pPr lvl="3"/>
@@ -291,6 +290,7 @@
               <a:rPr lang="en-US"/>
               <a:t>Fourth level</a:t>
             </a:r>
+            <a:endParaRPr lang="en-US"/>
           </a:p>
           <a:p>
             <a:pPr lvl="4"/>
@@ -298,6 +298,7 @@
               <a:rPr lang="en-US"/>
               <a:t>Fifth level</a:t>
             </a:r>
+            <a:endParaRPr lang="en-US"/>
           </a:p>
         </p:txBody>
       </p:sp>
@@ -361,18 +362,12 @@
           <a:p>
             <a:fld id="{CE5E9CC1-C706-0F49-92D6-E571CC5EEA8F}" type="slidenum">
               <a:rPr lang="en-US"/>
-              <a:t>‹#›</a:t>
             </a:fld>
             <a:endParaRPr lang="en-US"/>
           </a:p>
         </p:txBody>
       </p:sp>
     </p:spTree>
-    <p:extLst>
-      <p:ext uri="{BB962C8B-B14F-4D97-AF65-F5344CB8AC3E}">
-        <p14:creationId xmlns:p14="http://schemas.microsoft.com/office/powerpoint/2010/main" val="1024086991"/>
-      </p:ext>
-    </p:extLst>
   </p:cSld>
   <p:clrMap bg1="lt1" tx1="dk1" bg2="lt2" tx2="dk2" accent1="accent1" accent2="accent2" accent3="accent3" accent4="accent4" accent5="accent5" accent6="accent6" hlink="hlink" folHlink="folHlink"/>
   <p:notesStyle>
@@ -514,10 +509,6 @@
           <a:bodyPr/>
           <a:lstStyle/>
           <a:p>
-            <a:r>
-              <a:rPr lang="en-US" dirty="0"/>
-              <a:t/>
-            </a:r>
             <a:endParaRPr lang="en-US" dirty="0"/>
           </a:p>
         </p:txBody>
@@ -539,18 +530,12 @@
           <a:p>
             <a:fld id="{F7021451-1387-4CA6-816F-3879F97B5CBC}" type="slidenum">
               <a:rPr lang="en-US"/>
-              <a:t>1</a:t>
             </a:fld>
             <a:endParaRPr lang="en-US"/>
           </a:p>
         </p:txBody>
       </p:sp>
     </p:spTree>
-    <p:extLst>
-      <p:ext uri="{BB962C8B-B14F-4D97-AF65-F5344CB8AC3E}">
-        <p14:creationId xmlns:p14="http://schemas.microsoft.com/office/powerpoint/2010/main" val="1024086991"/>
-      </p:ext>
-    </p:extLst>
   </p:cSld>
   <p:clrMapOvr>
     <a:masterClrMapping/>
@@ -602,10 +587,6 @@
           <a:bodyPr/>
           <a:lstStyle/>
           <a:p>
-            <a:r>
-              <a:rPr lang="en-US" dirty="0"/>
-              <a:t/>
-            </a:r>
             <a:endParaRPr lang="en-US" dirty="0"/>
           </a:p>
         </p:txBody>
@@ -627,18 +608,12 @@
           <a:p>
             <a:fld id="{F7021451-1387-4CA6-816F-3879F97B5CBC}" type="slidenum">
               <a:rPr lang="en-US"/>
-              <a:t>10</a:t>
             </a:fld>
             <a:endParaRPr lang="en-US"/>
           </a:p>
         </p:txBody>
       </p:sp>
     </p:spTree>
-    <p:extLst>
-      <p:ext uri="{BB962C8B-B14F-4D97-AF65-F5344CB8AC3E}">
-        <p14:creationId xmlns:p14="http://schemas.microsoft.com/office/powerpoint/2010/main" val="1024086991"/>
-      </p:ext>
-    </p:extLst>
   </p:cSld>
   <p:clrMapOvr>
     <a:masterClrMapping/>
@@ -690,10 +665,6 @@
           <a:bodyPr/>
           <a:lstStyle/>
           <a:p>
-            <a:r>
-              <a:rPr lang="en-US" dirty="0"/>
-              <a:t/>
-            </a:r>
             <a:endParaRPr lang="en-US" dirty="0"/>
           </a:p>
         </p:txBody>
@@ -715,18 +686,12 @@
           <a:p>
             <a:fld id="{F7021451-1387-4CA6-816F-3879F97B5CBC}" type="slidenum">
               <a:rPr lang="en-US"/>
-              <a:t>11</a:t>
             </a:fld>
             <a:endParaRPr lang="en-US"/>
           </a:p>
         </p:txBody>
       </p:sp>
     </p:spTree>
-    <p:extLst>
-      <p:ext uri="{BB962C8B-B14F-4D97-AF65-F5344CB8AC3E}">
-        <p14:creationId xmlns:p14="http://schemas.microsoft.com/office/powerpoint/2010/main" val="1024086991"/>
-      </p:ext>
-    </p:extLst>
   </p:cSld>
   <p:clrMapOvr>
     <a:masterClrMapping/>
@@ -778,10 +743,6 @@
           <a:bodyPr/>
           <a:lstStyle/>
           <a:p>
-            <a:r>
-              <a:rPr lang="en-US" dirty="0"/>
-              <a:t/>
-            </a:r>
             <a:endParaRPr lang="en-US" dirty="0"/>
           </a:p>
         </p:txBody>
@@ -803,282 +764,12 @@
           <a:p>
             <a:fld id="{F7021451-1387-4CA6-816F-3879F97B5CBC}" type="slidenum">
               <a:rPr lang="en-US"/>
-              <a:t>12</a:t>
             </a:fld>
             <a:endParaRPr lang="en-US"/>
           </a:p>
         </p:txBody>
       </p:sp>
     </p:spTree>
-    <p:extLst>
-      <p:ext uri="{BB962C8B-B14F-4D97-AF65-F5344CB8AC3E}">
-        <p14:creationId xmlns:p14="http://schemas.microsoft.com/office/powerpoint/2010/main" val="1024086991"/>
-      </p:ext>
-    </p:extLst>
-  </p:cSld>
-  <p:clrMapOvr>
-    <a:masterClrMapping/>
-  </p:clrMapOvr>
-</p:notes>
-</file>
-
-<file path=ppt/notesSlides/notesSlide13.xml><?xml version="1.0" encoding="utf-8"?>
-<p:notes xmlns:a="http://schemas.openxmlformats.org/drawingml/2006/main" xmlns:r="http://schemas.openxmlformats.org/officeDocument/2006/relationships" xmlns:p="http://schemas.openxmlformats.org/presentationml/2006/main">
-  <p:cSld>
-    <p:spTree>
-      <p:nvGrpSpPr>
-        <p:cNvPr id="1" name=""/>
-        <p:cNvGrpSpPr/>
-        <p:nvPr/>
-      </p:nvGrpSpPr>
-      <p:grpSpPr>
-        <a:xfrm>
-          <a:off x="0" y="0"/>
-          <a:ext cx="0" cy="0"/>
-          <a:chOff x="0" y="0"/>
-          <a:chExt cx="0" cy="0"/>
-        </a:xfrm>
-      </p:grpSpPr>
-      <p:sp>
-        <p:nvSpPr>
-          <p:cNvPr id="2" name="Slide Image Placeholder 1"/>
-          <p:cNvSpPr>
-            <a:spLocks noGrp="1" noRot="1" noChangeAspect="1"/>
-          </p:cNvSpPr>
-          <p:nvPr>
-            <p:ph type="sldImg"/>
-          </p:nvPr>
-        </p:nvSpPr>
-        <p:spPr/>
-      </p:sp>
-      <p:sp>
-        <p:nvSpPr>
-          <p:cNvPr id="3" name="Notes Placeholder 2"/>
-          <p:cNvSpPr>
-            <a:spLocks noGrp="1"/>
-          </p:cNvSpPr>
-          <p:nvPr>
-            <p:ph type="body" idx="1"/>
-          </p:nvPr>
-        </p:nvSpPr>
-        <p:spPr/>
-        <p:txBody>
-          <a:bodyPr/>
-          <a:lstStyle/>
-          <a:p>
-            <a:r>
-              <a:rPr lang="en-US" dirty="0"/>
-              <a:t/>
-            </a:r>
-            <a:endParaRPr lang="en-US" dirty="0"/>
-          </a:p>
-        </p:txBody>
-      </p:sp>
-      <p:sp>
-        <p:nvSpPr>
-          <p:cNvPr id="4" name="Slide Number Placeholder 3"/>
-          <p:cNvSpPr>
-            <a:spLocks noGrp="1"/>
-          </p:cNvSpPr>
-          <p:nvPr>
-            <p:ph type="sldNum" sz="quarter" idx="10"/>
-          </p:nvPr>
-        </p:nvSpPr>
-        <p:spPr/>
-        <p:txBody>
-          <a:bodyPr/>
-          <a:lstStyle/>
-          <a:p>
-            <a:fld id="{F7021451-1387-4CA6-816F-3879F97B5CBC}" type="slidenum">
-              <a:rPr lang="en-US"/>
-              <a:t>13</a:t>
-            </a:fld>
-            <a:endParaRPr lang="en-US"/>
-          </a:p>
-        </p:txBody>
-      </p:sp>
-    </p:spTree>
-    <p:extLst>
-      <p:ext uri="{BB962C8B-B14F-4D97-AF65-F5344CB8AC3E}">
-        <p14:creationId xmlns:p14="http://schemas.microsoft.com/office/powerpoint/2010/main" val="1024086991"/>
-      </p:ext>
-    </p:extLst>
-  </p:cSld>
-  <p:clrMapOvr>
-    <a:masterClrMapping/>
-  </p:clrMapOvr>
-</p:notes>
-</file>
-
-<file path=ppt/notesSlides/notesSlide14.xml><?xml version="1.0" encoding="utf-8"?>
-<p:notes xmlns:a="http://schemas.openxmlformats.org/drawingml/2006/main" xmlns:r="http://schemas.openxmlformats.org/officeDocument/2006/relationships" xmlns:p="http://schemas.openxmlformats.org/presentationml/2006/main">
-  <p:cSld>
-    <p:spTree>
-      <p:nvGrpSpPr>
-        <p:cNvPr id="1" name=""/>
-        <p:cNvGrpSpPr/>
-        <p:nvPr/>
-      </p:nvGrpSpPr>
-      <p:grpSpPr>
-        <a:xfrm>
-          <a:off x="0" y="0"/>
-          <a:ext cx="0" cy="0"/>
-          <a:chOff x="0" y="0"/>
-          <a:chExt cx="0" cy="0"/>
-        </a:xfrm>
-      </p:grpSpPr>
-      <p:sp>
-        <p:nvSpPr>
-          <p:cNvPr id="2" name="Slide Image Placeholder 1"/>
-          <p:cNvSpPr>
-            <a:spLocks noGrp="1" noRot="1" noChangeAspect="1"/>
-          </p:cNvSpPr>
-          <p:nvPr>
-            <p:ph type="sldImg"/>
-          </p:nvPr>
-        </p:nvSpPr>
-        <p:spPr/>
-      </p:sp>
-      <p:sp>
-        <p:nvSpPr>
-          <p:cNvPr id="3" name="Notes Placeholder 2"/>
-          <p:cNvSpPr>
-            <a:spLocks noGrp="1"/>
-          </p:cNvSpPr>
-          <p:nvPr>
-            <p:ph type="body" idx="1"/>
-          </p:nvPr>
-        </p:nvSpPr>
-        <p:spPr/>
-        <p:txBody>
-          <a:bodyPr/>
-          <a:lstStyle/>
-          <a:p>
-            <a:r>
-              <a:rPr lang="en-US" dirty="0"/>
-              <a:t/>
-            </a:r>
-            <a:endParaRPr lang="en-US" dirty="0"/>
-          </a:p>
-        </p:txBody>
-      </p:sp>
-      <p:sp>
-        <p:nvSpPr>
-          <p:cNvPr id="4" name="Slide Number Placeholder 3"/>
-          <p:cNvSpPr>
-            <a:spLocks noGrp="1"/>
-          </p:cNvSpPr>
-          <p:nvPr>
-            <p:ph type="sldNum" sz="quarter" idx="10"/>
-          </p:nvPr>
-        </p:nvSpPr>
-        <p:spPr/>
-        <p:txBody>
-          <a:bodyPr/>
-          <a:lstStyle/>
-          <a:p>
-            <a:fld id="{F7021451-1387-4CA6-816F-3879F97B5CBC}" type="slidenum">
-              <a:rPr lang="en-US"/>
-              <a:t>14</a:t>
-            </a:fld>
-            <a:endParaRPr lang="en-US"/>
-          </a:p>
-        </p:txBody>
-      </p:sp>
-    </p:spTree>
-    <p:extLst>
-      <p:ext uri="{BB962C8B-B14F-4D97-AF65-F5344CB8AC3E}">
-        <p14:creationId xmlns:p14="http://schemas.microsoft.com/office/powerpoint/2010/main" val="1024086991"/>
-      </p:ext>
-    </p:extLst>
-  </p:cSld>
-  <p:clrMapOvr>
-    <a:masterClrMapping/>
-  </p:clrMapOvr>
-</p:notes>
-</file>
-
-<file path=ppt/notesSlides/notesSlide15.xml><?xml version="1.0" encoding="utf-8"?>
-<p:notes xmlns:a="http://schemas.openxmlformats.org/drawingml/2006/main" xmlns:r="http://schemas.openxmlformats.org/officeDocument/2006/relationships" xmlns:p="http://schemas.openxmlformats.org/presentationml/2006/main">
-  <p:cSld>
-    <p:spTree>
-      <p:nvGrpSpPr>
-        <p:cNvPr id="1" name=""/>
-        <p:cNvGrpSpPr/>
-        <p:nvPr/>
-      </p:nvGrpSpPr>
-      <p:grpSpPr>
-        <a:xfrm>
-          <a:off x="0" y="0"/>
-          <a:ext cx="0" cy="0"/>
-          <a:chOff x="0" y="0"/>
-          <a:chExt cx="0" cy="0"/>
-        </a:xfrm>
-      </p:grpSpPr>
-      <p:sp>
-        <p:nvSpPr>
-          <p:cNvPr id="2" name="Slide Image Placeholder 1"/>
-          <p:cNvSpPr>
-            <a:spLocks noGrp="1" noRot="1" noChangeAspect="1"/>
-          </p:cNvSpPr>
-          <p:nvPr>
-            <p:ph type="sldImg"/>
-          </p:nvPr>
-        </p:nvSpPr>
-        <p:spPr/>
-      </p:sp>
-      <p:sp>
-        <p:nvSpPr>
-          <p:cNvPr id="3" name="Notes Placeholder 2"/>
-          <p:cNvSpPr>
-            <a:spLocks noGrp="1"/>
-          </p:cNvSpPr>
-          <p:nvPr>
-            <p:ph type="body" idx="1"/>
-          </p:nvPr>
-        </p:nvSpPr>
-        <p:spPr/>
-        <p:txBody>
-          <a:bodyPr/>
-          <a:lstStyle/>
-          <a:p>
-            <a:r>
-              <a:rPr lang="en-US" dirty="0"/>
-              <a:t/>
-            </a:r>
-            <a:endParaRPr lang="en-US" dirty="0"/>
-          </a:p>
-        </p:txBody>
-      </p:sp>
-      <p:sp>
-        <p:nvSpPr>
-          <p:cNvPr id="4" name="Slide Number Placeholder 3"/>
-          <p:cNvSpPr>
-            <a:spLocks noGrp="1"/>
-          </p:cNvSpPr>
-          <p:nvPr>
-            <p:ph type="sldNum" sz="quarter" idx="10"/>
-          </p:nvPr>
-        </p:nvSpPr>
-        <p:spPr/>
-        <p:txBody>
-          <a:bodyPr/>
-          <a:lstStyle/>
-          <a:p>
-            <a:fld id="{F7021451-1387-4CA6-816F-3879F97B5CBC}" type="slidenum">
-              <a:rPr lang="en-US"/>
-              <a:t>15</a:t>
-            </a:fld>
-            <a:endParaRPr lang="en-US"/>
-          </a:p>
-        </p:txBody>
-      </p:sp>
-    </p:spTree>
-    <p:extLst>
-      <p:ext uri="{BB962C8B-B14F-4D97-AF65-F5344CB8AC3E}">
-        <p14:creationId xmlns:p14="http://schemas.microsoft.com/office/powerpoint/2010/main" val="1024086991"/>
-      </p:ext>
-    </p:extLst>
   </p:cSld>
   <p:clrMapOvr>
     <a:masterClrMapping/>
@@ -1130,10 +821,6 @@
           <a:bodyPr/>
           <a:lstStyle/>
           <a:p>
-            <a:r>
-              <a:rPr lang="en-US" dirty="0"/>
-              <a:t/>
-            </a:r>
             <a:endParaRPr lang="en-US" dirty="0"/>
           </a:p>
         </p:txBody>
@@ -1155,18 +842,12 @@
           <a:p>
             <a:fld id="{F7021451-1387-4CA6-816F-3879F97B5CBC}" type="slidenum">
               <a:rPr lang="en-US"/>
-              <a:t>2</a:t>
             </a:fld>
             <a:endParaRPr lang="en-US"/>
           </a:p>
         </p:txBody>
       </p:sp>
     </p:spTree>
-    <p:extLst>
-      <p:ext uri="{BB962C8B-B14F-4D97-AF65-F5344CB8AC3E}">
-        <p14:creationId xmlns:p14="http://schemas.microsoft.com/office/powerpoint/2010/main" val="1024086991"/>
-      </p:ext>
-    </p:extLst>
   </p:cSld>
   <p:clrMapOvr>
     <a:masterClrMapping/>
@@ -1218,10 +899,6 @@
           <a:bodyPr/>
           <a:lstStyle/>
           <a:p>
-            <a:r>
-              <a:rPr lang="en-US" dirty="0"/>
-              <a:t/>
-            </a:r>
             <a:endParaRPr lang="en-US" dirty="0"/>
           </a:p>
         </p:txBody>
@@ -1243,18 +920,12 @@
           <a:p>
             <a:fld id="{F7021451-1387-4CA6-816F-3879F97B5CBC}" type="slidenum">
               <a:rPr lang="en-US"/>
-              <a:t>3</a:t>
             </a:fld>
             <a:endParaRPr lang="en-US"/>
           </a:p>
         </p:txBody>
       </p:sp>
     </p:spTree>
-    <p:extLst>
-      <p:ext uri="{BB962C8B-B14F-4D97-AF65-F5344CB8AC3E}">
-        <p14:creationId xmlns:p14="http://schemas.microsoft.com/office/powerpoint/2010/main" val="1024086991"/>
-      </p:ext>
-    </p:extLst>
   </p:cSld>
   <p:clrMapOvr>
     <a:masterClrMapping/>
@@ -1306,10 +977,6 @@
           <a:bodyPr/>
           <a:lstStyle/>
           <a:p>
-            <a:r>
-              <a:rPr lang="en-US" dirty="0"/>
-              <a:t/>
-            </a:r>
             <a:endParaRPr lang="en-US" dirty="0"/>
           </a:p>
         </p:txBody>
@@ -1331,18 +998,12 @@
           <a:p>
             <a:fld id="{F7021451-1387-4CA6-816F-3879F97B5CBC}" type="slidenum">
               <a:rPr lang="en-US"/>
-              <a:t>4</a:t>
             </a:fld>
             <a:endParaRPr lang="en-US"/>
           </a:p>
         </p:txBody>
       </p:sp>
     </p:spTree>
-    <p:extLst>
-      <p:ext uri="{BB962C8B-B14F-4D97-AF65-F5344CB8AC3E}">
-        <p14:creationId xmlns:p14="http://schemas.microsoft.com/office/powerpoint/2010/main" val="1024086991"/>
-      </p:ext>
-    </p:extLst>
   </p:cSld>
   <p:clrMapOvr>
     <a:masterClrMapping/>
@@ -1394,10 +1055,6 @@
           <a:bodyPr/>
           <a:lstStyle/>
           <a:p>
-            <a:r>
-              <a:rPr lang="en-US" dirty="0"/>
-              <a:t/>
-            </a:r>
             <a:endParaRPr lang="en-US" dirty="0"/>
           </a:p>
         </p:txBody>
@@ -1419,18 +1076,12 @@
           <a:p>
             <a:fld id="{F7021451-1387-4CA6-816F-3879F97B5CBC}" type="slidenum">
               <a:rPr lang="en-US"/>
-              <a:t>5</a:t>
             </a:fld>
             <a:endParaRPr lang="en-US"/>
           </a:p>
         </p:txBody>
       </p:sp>
     </p:spTree>
-    <p:extLst>
-      <p:ext uri="{BB962C8B-B14F-4D97-AF65-F5344CB8AC3E}">
-        <p14:creationId xmlns:p14="http://schemas.microsoft.com/office/powerpoint/2010/main" val="1024086991"/>
-      </p:ext>
-    </p:extLst>
   </p:cSld>
   <p:clrMapOvr>
     <a:masterClrMapping/>
@@ -1482,10 +1133,6 @@
           <a:bodyPr/>
           <a:lstStyle/>
           <a:p>
-            <a:r>
-              <a:rPr lang="en-US" dirty="0"/>
-              <a:t/>
-            </a:r>
             <a:endParaRPr lang="en-US" dirty="0"/>
           </a:p>
         </p:txBody>
@@ -1507,18 +1154,12 @@
           <a:p>
             <a:fld id="{F7021451-1387-4CA6-816F-3879F97B5CBC}" type="slidenum">
               <a:rPr lang="en-US"/>
-              <a:t>6</a:t>
             </a:fld>
             <a:endParaRPr lang="en-US"/>
           </a:p>
         </p:txBody>
       </p:sp>
     </p:spTree>
-    <p:extLst>
-      <p:ext uri="{BB962C8B-B14F-4D97-AF65-F5344CB8AC3E}">
-        <p14:creationId xmlns:p14="http://schemas.microsoft.com/office/powerpoint/2010/main" val="1024086991"/>
-      </p:ext>
-    </p:extLst>
   </p:cSld>
   <p:clrMapOvr>
     <a:masterClrMapping/>
@@ -1570,10 +1211,6 @@
           <a:bodyPr/>
           <a:lstStyle/>
           <a:p>
-            <a:r>
-              <a:rPr lang="en-US" dirty="0"/>
-              <a:t/>
-            </a:r>
             <a:endParaRPr lang="en-US" dirty="0"/>
           </a:p>
         </p:txBody>
@@ -1595,18 +1232,12 @@
           <a:p>
             <a:fld id="{F7021451-1387-4CA6-816F-3879F97B5CBC}" type="slidenum">
               <a:rPr lang="en-US"/>
-              <a:t>7</a:t>
             </a:fld>
             <a:endParaRPr lang="en-US"/>
           </a:p>
         </p:txBody>
       </p:sp>
     </p:spTree>
-    <p:extLst>
-      <p:ext uri="{BB962C8B-B14F-4D97-AF65-F5344CB8AC3E}">
-        <p14:creationId xmlns:p14="http://schemas.microsoft.com/office/powerpoint/2010/main" val="1024086991"/>
-      </p:ext>
-    </p:extLst>
   </p:cSld>
   <p:clrMapOvr>
     <a:masterClrMapping/>
@@ -1658,10 +1289,6 @@
           <a:bodyPr/>
           <a:lstStyle/>
           <a:p>
-            <a:r>
-              <a:rPr lang="en-US" dirty="0"/>
-              <a:t/>
-            </a:r>
             <a:endParaRPr lang="en-US" dirty="0"/>
           </a:p>
         </p:txBody>
@@ -1683,18 +1310,12 @@
           <a:p>
             <a:fld id="{F7021451-1387-4CA6-816F-3879F97B5CBC}" type="slidenum">
               <a:rPr lang="en-US"/>
-              <a:t>8</a:t>
             </a:fld>
             <a:endParaRPr lang="en-US"/>
           </a:p>
         </p:txBody>
       </p:sp>
     </p:spTree>
-    <p:extLst>
-      <p:ext uri="{BB962C8B-B14F-4D97-AF65-F5344CB8AC3E}">
-        <p14:creationId xmlns:p14="http://schemas.microsoft.com/office/powerpoint/2010/main" val="1024086991"/>
-      </p:ext>
-    </p:extLst>
   </p:cSld>
   <p:clrMapOvr>
     <a:masterClrMapping/>
@@ -1746,10 +1367,6 @@
           <a:bodyPr/>
           <a:lstStyle/>
           <a:p>
-            <a:r>
-              <a:rPr lang="en-US" dirty="0"/>
-              <a:t/>
-            </a:r>
             <a:endParaRPr lang="en-US" dirty="0"/>
           </a:p>
         </p:txBody>
@@ -1771,18 +1388,12 @@
           <a:p>
             <a:fld id="{F7021451-1387-4CA6-816F-3879F97B5CBC}" type="slidenum">
               <a:rPr lang="en-US"/>
-              <a:t>9</a:t>
             </a:fld>
             <a:endParaRPr lang="en-US"/>
           </a:p>
         </p:txBody>
       </p:sp>
     </p:spTree>
-    <p:extLst>
-      <p:ext uri="{BB962C8B-B14F-4D97-AF65-F5344CB8AC3E}">
-        <p14:creationId xmlns:p14="http://schemas.microsoft.com/office/powerpoint/2010/main" val="1024086991"/>
-      </p:ext>
-    </p:extLst>
   </p:cSld>
   <p:clrMapOvr>
     <a:masterClrMapping/>
@@ -1823,6 +1434,11 @@
 <file path=ppt/slideMasters/slideMaster1.xml><?xml version="1.0" encoding="utf-8"?>
 <p:sldMaster xmlns:a="http://schemas.openxmlformats.org/drawingml/2006/main" xmlns:r="http://schemas.openxmlformats.org/officeDocument/2006/relationships" xmlns:p="http://schemas.openxmlformats.org/presentationml/2006/main">
   <p:cSld>
+    <p:bg>
+      <p:bgRef idx="1001">
+        <a:schemeClr val="bg1"/>
+      </p:bgRef>
+    </p:bg>
     <p:spTree>
       <p:nvGrpSpPr>
         <p:cNvPr id="1" name=""/>
@@ -1866,7 +1482,7 @@
         <a:spcBef>
           <a:spcPct val="20000"/>
         </a:spcBef>
-        <a:buFont typeface="Arial" pitchFamily="34" charset="0"/>
+        <a:buFont typeface="Arial" panose="020B0604020202020204" pitchFamily="34" charset="0"/>
         <a:buChar char="•"/>
         <a:defRPr sz="3200" kern="1200">
           <a:solidFill>
@@ -1881,7 +1497,7 @@
         <a:spcBef>
           <a:spcPct val="20000"/>
         </a:spcBef>
-        <a:buFont typeface="Arial" pitchFamily="34" charset="0"/>
+        <a:buFont typeface="Arial" panose="020B0604020202020204" pitchFamily="34" charset="0"/>
         <a:buChar char="–"/>
         <a:defRPr sz="2800" kern="1200">
           <a:solidFill>
@@ -1896,7 +1512,7 @@
         <a:spcBef>
           <a:spcPct val="20000"/>
         </a:spcBef>
-        <a:buFont typeface="Arial" pitchFamily="34" charset="0"/>
+        <a:buFont typeface="Arial" panose="020B0604020202020204" pitchFamily="34" charset="0"/>
         <a:buChar char="•"/>
         <a:defRPr sz="2400" kern="1200">
           <a:solidFill>
@@ -1911,7 +1527,7 @@
         <a:spcBef>
           <a:spcPct val="20000"/>
         </a:spcBef>
-        <a:buFont typeface="Arial" pitchFamily="34" charset="0"/>
+        <a:buFont typeface="Arial" panose="020B0604020202020204" pitchFamily="34" charset="0"/>
         <a:buChar char="–"/>
         <a:defRPr sz="2000" kern="1200">
           <a:solidFill>
@@ -1926,7 +1542,7 @@
         <a:spcBef>
           <a:spcPct val="20000"/>
         </a:spcBef>
-        <a:buFont typeface="Arial" pitchFamily="34" charset="0"/>
+        <a:buFont typeface="Arial" panose="020B0604020202020204" pitchFamily="34" charset="0"/>
         <a:buChar char="»"/>
         <a:defRPr sz="2000" kern="1200">
           <a:solidFill>
@@ -1941,7 +1557,7 @@
         <a:spcBef>
           <a:spcPct val="20000"/>
         </a:spcBef>
-        <a:buFont typeface="Arial" pitchFamily="34" charset="0"/>
+        <a:buFont typeface="Arial" panose="020B0604020202020204" pitchFamily="34" charset="0"/>
         <a:buChar char="•"/>
         <a:defRPr sz="2000" kern="1200">
           <a:solidFill>
@@ -1956,7 +1572,7 @@
         <a:spcBef>
           <a:spcPct val="20000"/>
         </a:spcBef>
-        <a:buFont typeface="Arial" pitchFamily="34" charset="0"/>
+        <a:buFont typeface="Arial" panose="020B0604020202020204" pitchFamily="34" charset="0"/>
         <a:buChar char="•"/>
         <a:defRPr sz="2000" kern="1200">
           <a:solidFill>
@@ -1971,7 +1587,7 @@
         <a:spcBef>
           <a:spcPct val="20000"/>
         </a:spcBef>
-        <a:buFont typeface="Arial" pitchFamily="34" charset="0"/>
+        <a:buFont typeface="Arial" panose="020B0604020202020204" pitchFamily="34" charset="0"/>
         <a:buChar char="•"/>
         <a:defRPr sz="2000" kern="1200">
           <a:solidFill>
@@ -1986,7 +1602,7 @@
         <a:spcBef>
           <a:spcPct val="20000"/>
         </a:spcBef>
-        <a:buFont typeface="Arial" pitchFamily="34" charset="0"/>
+        <a:buFont typeface="Arial" panose="020B0604020202020204" pitchFamily="34" charset="0"/>
         <a:buChar char="•"/>
         <a:defRPr sz="2000" kern="1200">
           <a:solidFill>
@@ -2099,7 +1715,7 @@
 
 <file path=ppt/slides/slide1.xml><?xml version="1.0" encoding="utf-8"?>
 <p:sld xmlns:a="http://schemas.openxmlformats.org/drawingml/2006/main" xmlns:r="http://schemas.openxmlformats.org/officeDocument/2006/relationships" xmlns:p="http://schemas.openxmlformats.org/presentationml/2006/main">
-  <p:cSld name="Slide 1">
+  <p:cSld>
     <p:bg>
       <p:bgPr>
         <a:blipFill dpi="0" rotWithShape="1">
@@ -2143,13 +1759,12 @@
             <a:avLst/>
           </a:prstGeom>
           <a:noFill/>
-          <a:ln/>
         </p:spPr>
         <p:txBody>
           <a:bodyPr wrap="square" rtlCol="0" anchor="ctr"/>
           <a:lstStyle/>
           <a:p>
-            <a:pPr algn="r" indent="0" marL="0">
+            <a:pPr marL="0" indent="0" algn="r">
               <a:buNone/>
             </a:pPr>
             <a:r>
@@ -2157,11 +1772,11 @@
                 <a:solidFill>
                   <a:srgbClr val="8A9099"/>
                 </a:solidFill>
-                <a:latin typeface="微软雅黑" pitchFamily="34" charset="0"/>
-                <a:ea typeface="微软雅黑" pitchFamily="34" charset="-122"/>
-                <a:cs typeface="微软雅黑" pitchFamily="34" charset="-120"/>
-              </a:rPr>
-              <a:t>1 / 15</a:t>
+                <a:latin typeface="微软雅黑" panose="020B0503020204020204" pitchFamily="34" charset="-122"/>
+                <a:ea typeface="微软雅黑" panose="020B0503020204020204" pitchFamily="34" charset="-122"/>
+                <a:cs typeface="微软雅黑" panose="020B0503020204020204" pitchFamily="34" charset="-120"/>
+              </a:rPr>
+              <a:t>1 / 12</a:t>
             </a:r>
             <a:endParaRPr lang="en-US" sz="1000" dirty="0"/>
           </a:p>
@@ -2182,13 +1797,12 @@
             <a:avLst/>
           </a:prstGeom>
           <a:noFill/>
-          <a:ln/>
         </p:spPr>
         <p:txBody>
           <a:bodyPr wrap="square" rtlCol="0" anchor="ctr"/>
           <a:lstStyle/>
           <a:p>
-            <a:pPr algn="ctr" indent="0" marL="0">
+            <a:pPr marL="0" indent="0" algn="ctr">
               <a:buNone/>
             </a:pPr>
             <a:r>
@@ -2196,9 +1810,9 @@
                 <a:solidFill>
                   <a:srgbClr val="1F4E9C"/>
                 </a:solidFill>
-                <a:latin typeface="微软雅黑" pitchFamily="34" charset="0"/>
-                <a:ea typeface="微软雅黑" pitchFamily="34" charset="-122"/>
-                <a:cs typeface="微软雅黑" pitchFamily="34" charset="-120"/>
+                <a:latin typeface="微软雅黑" panose="020B0503020204020204" pitchFamily="34" charset="-122"/>
+                <a:ea typeface="微软雅黑" panose="020B0503020204020204" pitchFamily="34" charset="-122"/>
+                <a:cs typeface="微软雅黑" panose="020B0503020204020204" pitchFamily="34" charset="-120"/>
               </a:rPr>
               <a:t>重邮802 数据结构代码课程</a:t>
             </a:r>
@@ -2221,13 +1835,12 @@
             <a:avLst/>
           </a:prstGeom>
           <a:noFill/>
-          <a:ln/>
         </p:spPr>
         <p:txBody>
           <a:bodyPr wrap="square" rtlCol="0" anchor="ctr"/>
           <a:lstStyle/>
           <a:p>
-            <a:pPr algn="ctr" indent="0" marL="0">
+            <a:pPr marL="0" indent="0" algn="ctr">
               <a:buNone/>
             </a:pPr>
             <a:r>
@@ -2235,9 +1848,9 @@
                 <a:solidFill>
                   <a:srgbClr val="1F2329"/>
                 </a:solidFill>
-                <a:latin typeface="微软雅黑" pitchFamily="34" charset="0"/>
-                <a:ea typeface="微软雅黑" pitchFamily="34" charset="-122"/>
-                <a:cs typeface="微软雅黑" pitchFamily="34" charset="-120"/>
+                <a:latin typeface="微软雅黑" panose="020B0503020204020204" pitchFamily="34" charset="-122"/>
+                <a:ea typeface="微软雅黑" panose="020B0503020204020204" pitchFamily="34" charset="-122"/>
+                <a:cs typeface="微软雅黑" panose="020B0503020204020204" pitchFamily="34" charset="-120"/>
               </a:rPr>
               <a:t>C语言强化阶段</a:t>
             </a:r>
@@ -2260,13 +1873,12 @@
             <a:avLst/>
           </a:prstGeom>
           <a:noFill/>
-          <a:ln/>
         </p:spPr>
         <p:txBody>
           <a:bodyPr wrap="square" rtlCol="0" anchor="ctr"/>
           <a:lstStyle/>
           <a:p>
-            <a:pPr algn="ctr" indent="0" marL="0">
+            <a:pPr marL="0" indent="0" algn="ctr">
               <a:buNone/>
             </a:pPr>
             <a:r>
@@ -2274,9 +1886,9 @@
                 <a:solidFill>
                   <a:srgbClr val="1F2329"/>
                 </a:solidFill>
-                <a:latin typeface="微软雅黑" pitchFamily="34" charset="0"/>
-                <a:ea typeface="微软雅黑" pitchFamily="34" charset="-122"/>
-                <a:cs typeface="微软雅黑" pitchFamily="34" charset="-120"/>
+                <a:latin typeface="微软雅黑" panose="020B0503020204020204" pitchFamily="34" charset="-122"/>
+                <a:ea typeface="微软雅黑" panose="020B0503020204020204" pitchFamily="34" charset="-122"/>
+                <a:cs typeface="微软雅黑" panose="020B0503020204020204" pitchFamily="34" charset="-120"/>
               </a:rPr>
               <a:t>第5节 引用与参数传递</a:t>
             </a:r>
@@ -2299,13 +1911,12 @@
             <a:avLst/>
           </a:prstGeom>
           <a:noFill/>
-          <a:ln/>
         </p:spPr>
         <p:txBody>
           <a:bodyPr wrap="square" rtlCol="0" anchor="ctr"/>
           <a:lstStyle/>
           <a:p>
-            <a:pPr algn="ctr" indent="0" marL="0">
+            <a:pPr marL="0" indent="0" algn="ctr">
               <a:buNone/>
             </a:pPr>
             <a:r>
@@ -2313,11 +1924,11 @@
                 <a:solidFill>
                   <a:srgbClr val="8A9099"/>
                 </a:solidFill>
-                <a:latin typeface="微软雅黑" pitchFamily="34" charset="0"/>
-                <a:ea typeface="微软雅黑" pitchFamily="34" charset="-122"/>
-                <a:cs typeface="微软雅黑" pitchFamily="34" charset="-120"/>
-              </a:rPr>
-              <a:t>阶段：强化 ｜ 主讲：牙膏学长 ｜ 预计40分钟 ｜ 资料答疑：伴梦研途QQ群</a:t>
+                <a:latin typeface="微软雅黑" panose="020B0503020204020204" pitchFamily="34" charset="-122"/>
+                <a:ea typeface="微软雅黑" panose="020B0503020204020204" pitchFamily="34" charset="-122"/>
+                <a:cs typeface="微软雅黑" panose="020B0503020204020204" pitchFamily="34" charset="-120"/>
+              </a:rPr>
+              <a:t>阶段：强化 ｜ 主讲：牙膏学长 ｜ 预计28分钟 ｜ 资料答疑：伴梦研途QQ群</a:t>
             </a:r>
             <a:endParaRPr lang="en-US" sz="1400" dirty="0"/>
           </a:p>
@@ -2333,7 +1944,7 @@
 
 <file path=ppt/slides/slide10.xml><?xml version="1.0" encoding="utf-8"?>
 <p:sld xmlns:a="http://schemas.openxmlformats.org/drawingml/2006/main" xmlns:r="http://schemas.openxmlformats.org/officeDocument/2006/relationships" xmlns:p="http://schemas.openxmlformats.org/presentationml/2006/main">
-  <p:cSld name="Slide 10">
+  <p:cSld>
     <p:bg>
       <p:bgPr>
         <a:blipFill dpi="0" rotWithShape="1">
@@ -2377,13 +1988,12 @@
             <a:avLst/>
           </a:prstGeom>
           <a:noFill/>
-          <a:ln/>
         </p:spPr>
         <p:txBody>
           <a:bodyPr wrap="square" rtlCol="0" anchor="ctr"/>
           <a:lstStyle/>
           <a:p>
-            <a:pPr algn="r" indent="0" marL="0">
+            <a:pPr marL="0" indent="0" algn="r">
               <a:buNone/>
             </a:pPr>
             <a:r>
@@ -2391,11 +2001,11 @@
                 <a:solidFill>
                   <a:srgbClr val="8A9099"/>
                 </a:solidFill>
-                <a:latin typeface="微软雅黑" pitchFamily="34" charset="0"/>
-                <a:ea typeface="微软雅黑" pitchFamily="34" charset="-122"/>
-                <a:cs typeface="微软雅黑" pitchFamily="34" charset="-120"/>
-              </a:rPr>
-              <a:t>10 / 15</a:t>
+                <a:latin typeface="微软雅黑" panose="020B0503020204020204" pitchFamily="34" charset="-122"/>
+                <a:ea typeface="微软雅黑" panose="020B0503020204020204" pitchFamily="34" charset="-122"/>
+                <a:cs typeface="微软雅黑" panose="020B0503020204020204" pitchFamily="34" charset="-120"/>
+              </a:rPr>
+              <a:t>10 / 12</a:t>
             </a:r>
             <a:endParaRPr lang="en-US" sz="1000" dirty="0"/>
           </a:p>
@@ -2416,13 +2026,12 @@
             <a:avLst/>
           </a:prstGeom>
           <a:noFill/>
-          <a:ln/>
         </p:spPr>
         <p:txBody>
           <a:bodyPr wrap="square" rtlCol="0" anchor="ctr"/>
           <a:lstStyle/>
           <a:p>
-            <a:pPr algn="l" indent="0" marL="0">
+            <a:pPr marL="0" indent="0" algn="l">
               <a:buNone/>
             </a:pPr>
             <a:r>
@@ -2430,11 +2039,11 @@
                 <a:solidFill>
                   <a:srgbClr val="1F4E9C"/>
                 </a:solidFill>
-                <a:latin typeface="微软雅黑" pitchFamily="34" charset="0"/>
-                <a:ea typeface="微软雅黑" pitchFamily="34" charset="-122"/>
-                <a:cs typeface="微软雅黑" pitchFamily="34" charset="-120"/>
-              </a:rPr>
-              <a:t>选型</a:t>
+                <a:latin typeface="微软雅黑" panose="020B0503020204020204" pitchFamily="34" charset="-122"/>
+                <a:ea typeface="微软雅黑" panose="020B0503020204020204" pitchFamily="34" charset="-122"/>
+                <a:cs typeface="微软雅黑" panose="020B0503020204020204" pitchFamily="34" charset="-120"/>
+              </a:rPr>
+              <a:t>课后任务</a:t>
             </a:r>
             <a:endParaRPr lang="en-US" sz="1400" dirty="0"/>
           </a:p>
@@ -2455,13 +2064,12 @@
             <a:avLst/>
           </a:prstGeom>
           <a:noFill/>
-          <a:ln/>
         </p:spPr>
         <p:txBody>
           <a:bodyPr wrap="square" rtlCol="0" anchor="ctr"/>
           <a:lstStyle/>
           <a:p>
-            <a:pPr algn="l" indent="0" marL="0">
+            <a:pPr marL="0" indent="0" algn="l">
               <a:buNone/>
             </a:pPr>
             <a:r>
@@ -2469,11 +2077,11 @@
                 <a:solidFill>
                   <a:srgbClr val="1F2329"/>
                 </a:solidFill>
-                <a:latin typeface="微软雅黑" pitchFamily="34" charset="0"/>
-                <a:ea typeface="微软雅黑" pitchFamily="34" charset="-122"/>
-                <a:cs typeface="微软雅黑" pitchFamily="34" charset="-120"/>
-              </a:rPr>
-              <a:t>什么时候用哪种</a:t>
+                <a:latin typeface="微软雅黑" panose="020B0503020204020204" pitchFamily="34" charset="-122"/>
+                <a:ea typeface="微软雅黑" panose="020B0503020204020204" pitchFamily="34" charset="-122"/>
+                <a:cs typeface="微软雅黑" panose="020B0503020204020204" pitchFamily="34" charset="-120"/>
+              </a:rPr>
+              <a:t>1道跟练 ＋ 1道模仿</a:t>
             </a:r>
             <a:endParaRPr lang="en-US" sz="2800" dirty="0"/>
           </a:p>
@@ -2494,13 +2102,12 @@
             <a:avLst/>
           </a:prstGeom>
           <a:noFill/>
-          <a:ln/>
         </p:spPr>
         <p:txBody>
           <a:bodyPr wrap="square" rtlCol="0" anchor="t"/>
           <a:lstStyle/>
           <a:p>
-            <a:pPr algn="l" indent="0" marL="0">
+            <a:pPr marL="0" indent="0" algn="l">
               <a:lnSpc>
                 <a:spcPct val="115000"/>
               </a:lnSpc>
@@ -2511,25 +2118,84 @@
                 <a:solidFill>
                   <a:srgbClr val="1F4E9C"/>
                 </a:solidFill>
-                <a:latin typeface="微软雅黑" pitchFamily="34" charset="0"/>
-                <a:ea typeface="微软雅黑" pitchFamily="34" charset="-122"/>
-                <a:cs typeface="微软雅黑" pitchFamily="34" charset="-120"/>
+                <a:latin typeface="微软雅黑" panose="020B0503020204020204" pitchFamily="34" charset="-122"/>
+                <a:ea typeface="微软雅黑" panose="020B0503020204020204" pitchFamily="34" charset="-122"/>
+                <a:cs typeface="微软雅黑" panose="020B0503020204020204" pitchFamily="34" charset="-120"/>
               </a:rPr>
               <a:t>•  </a:t>
             </a:r>
-            <a:pPr algn="l" indent="0" marL="0">
+            <a:r>
+              <a:rPr lang="en-US" sz="1800" b="1" dirty="0">
+                <a:solidFill>
+                  <a:srgbClr val="000000"/>
+                </a:solidFill>
+              </a:rPr>
+              <a:t>跟练题</a:t>
+            </a:r>
+            <a:r>
+              <a:rPr lang="en-US" sz="1800" dirty="0">
+                <a:solidFill>
+                  <a:srgbClr val="000000"/>
+                </a:solidFill>
+              </a:rPr>
+              <a:t>：分别用指针版和引用版写swap，上机验证a、b真的换了</a:t>
+            </a:r>
+            <a:endParaRPr lang="en-US" sz="1800" dirty="0"/>
+          </a:p>
+        </p:txBody>
+      </p:sp>
+      <p:sp>
+        <p:nvSpPr>
+          <p:cNvPr id="6" name="Text 4"/>
+          <p:cNvSpPr/>
+          <p:nvPr/>
+        </p:nvSpPr>
+        <p:spPr>
+          <a:xfrm>
+            <a:off x="896112" y="2866644"/>
+            <a:ext cx="10454335" cy="740664"/>
+          </a:xfrm>
+          <a:prstGeom prst="rect">
+            <a:avLst/>
+          </a:prstGeom>
+          <a:noFill/>
+        </p:spPr>
+        <p:txBody>
+          <a:bodyPr wrap="square" rtlCol="0" anchor="t"/>
+          <a:lstStyle/>
+          <a:p>
+            <a:pPr marL="0" indent="0" algn="l">
               <a:lnSpc>
                 <a:spcPct val="115000"/>
               </a:lnSpc>
               <a:buNone/>
             </a:pPr>
             <a:r>
+              <a:rPr lang="en-US" sz="1800" b="1" dirty="0">
+                <a:solidFill>
+                  <a:srgbClr val="1F4E9C"/>
+                </a:solidFill>
+                <a:latin typeface="微软雅黑" panose="020B0503020204020204" pitchFamily="34" charset="-122"/>
+                <a:ea typeface="微软雅黑" panose="020B0503020204020204" pitchFamily="34" charset="-122"/>
+                <a:cs typeface="微软雅黑" panose="020B0503020204020204" pitchFamily="34" charset="-120"/>
+              </a:rPr>
+              <a:t>•  </a:t>
+            </a:r>
+            <a:r>
+              <a:rPr lang="en-US" sz="1800" b="1" dirty="0">
+                <a:solidFill>
+                  <a:srgbClr val="000000"/>
+                </a:solidFill>
+              </a:rPr>
+              <a:t>模仿题</a:t>
+            </a:r>
+            <a:r>
               <a:rPr lang="en-US" sz="1800" dirty="0">
                 <a:solidFill>
                   <a:srgbClr val="000000"/>
                 </a:solidFill>
               </a:rPr>
-              <a:t>函数只读数据：值传递，简单直接</a:t>
+              <a:t>：写increment(int &amp;n)把外面的数加1，再把参数改成int n对照跑一次</a:t>
             </a:r>
             <a:endParaRPr lang="en-US" sz="1800" dirty="0"/>
           </a:p>
@@ -2537,26 +2203,25 @@
       </p:sp>
       <p:sp>
         <p:nvSpPr>
-          <p:cNvPr id="6" name="Text 4"/>
-          <p:cNvSpPr/>
-          <p:nvPr/>
-        </p:nvSpPr>
-        <p:spPr>
-          <a:xfrm>
-            <a:off x="896112" y="2866644"/>
+          <p:cNvPr id="7" name="Text 5"/>
+          <p:cNvSpPr/>
+          <p:nvPr/>
+        </p:nvSpPr>
+        <p:spPr>
+          <a:xfrm>
+            <a:off x="896112" y="3680460"/>
             <a:ext cx="10454335" cy="397764"/>
           </a:xfrm>
           <a:prstGeom prst="rect">
             <a:avLst/>
           </a:prstGeom>
           <a:noFill/>
-          <a:ln/>
         </p:spPr>
         <p:txBody>
           <a:bodyPr wrap="square" rtlCol="0" anchor="t"/>
           <a:lstStyle/>
           <a:p>
-            <a:pPr algn="l" indent="0" marL="0">
+            <a:pPr marL="0" indent="0" algn="l">
               <a:lnSpc>
                 <a:spcPct val="115000"/>
               </a:lnSpc>
@@ -2567,25 +2232,19 @@
                 <a:solidFill>
                   <a:srgbClr val="1F4E9C"/>
                 </a:solidFill>
-                <a:latin typeface="微软雅黑" pitchFamily="34" charset="0"/>
-                <a:ea typeface="微软雅黑" pitchFamily="34" charset="-122"/>
-                <a:cs typeface="微软雅黑" pitchFamily="34" charset="-120"/>
+                <a:latin typeface="微软雅黑" panose="020B0503020204020204" pitchFamily="34" charset="-122"/>
+                <a:ea typeface="微软雅黑" panose="020B0503020204020204" pitchFamily="34" charset="-122"/>
+                <a:cs typeface="微软雅黑" panose="020B0503020204020204" pitchFamily="34" charset="-120"/>
               </a:rPr>
               <a:t>•  </a:t>
             </a:r>
-            <a:pPr algn="l" indent="0" marL="0">
-              <a:lnSpc>
-                <a:spcPct val="115000"/>
-              </a:lnSpc>
-              <a:buNone/>
-            </a:pPr>
             <a:r>
               <a:rPr lang="en-US" sz="1800" dirty="0">
                 <a:solidFill>
                   <a:srgbClr val="000000"/>
                 </a:solidFill>
               </a:rPr>
-              <a:t>函数要改外面的变量：引用传参，写法干净</a:t>
+              <a:t>要求：合上资料能默写三种传参的函数头；先纸上预测再上机对照</a:t>
             </a:r>
             <a:endParaRPr lang="en-US" sz="1800" dirty="0"/>
           </a:p>
@@ -2593,113 +2252,39 @@
       </p:sp>
       <p:sp>
         <p:nvSpPr>
-          <p:cNvPr id="7" name="Text 5"/>
-          <p:cNvSpPr/>
-          <p:nvPr/>
-        </p:nvSpPr>
-        <p:spPr>
-          <a:xfrm>
-            <a:off x="896112" y="3337560"/>
-            <a:ext cx="10454335" cy="397764"/>
-          </a:xfrm>
-          <a:prstGeom prst="rect">
-            <a:avLst/>
-          </a:prstGeom>
-          <a:noFill/>
-          <a:ln/>
+          <p:cNvPr id="8" name="Text 6"/>
+          <p:cNvSpPr/>
+          <p:nvPr/>
+        </p:nvSpPr>
+        <p:spPr>
+          <a:xfrm>
+            <a:off x="822960" y="4242816"/>
+            <a:ext cx="10545775" cy="358902"/>
+          </a:xfrm>
+          <a:prstGeom prst="rect">
+            <a:avLst/>
+          </a:prstGeom>
+          <a:noFill/>
         </p:spPr>
         <p:txBody>
           <a:bodyPr wrap="square" rtlCol="0" anchor="t"/>
           <a:lstStyle/>
           <a:p>
-            <a:pPr algn="l" indent="0" marL="0">
-              <a:lnSpc>
-                <a:spcPct val="115000"/>
-              </a:lnSpc>
-              <a:buNone/>
-            </a:pPr>
-            <a:r>
-              <a:rPr lang="en-US" sz="1800" b="1" dirty="0">
-                <a:solidFill>
-                  <a:srgbClr val="1F4E9C"/>
-                </a:solidFill>
-                <a:latin typeface="微软雅黑" pitchFamily="34" charset="0"/>
-                <a:ea typeface="微软雅黑" pitchFamily="34" charset="-122"/>
-                <a:cs typeface="微软雅黑" pitchFamily="34" charset="-120"/>
-              </a:rPr>
-              <a:t>•  </a:t>
-            </a:r>
-            <a:pPr algn="l" indent="0" marL="0">
-              <a:lnSpc>
-                <a:spcPct val="115000"/>
-              </a:lnSpc>
-              <a:buNone/>
-            </a:pPr>
-            <a:r>
-              <a:rPr lang="en-US" sz="1800" dirty="0">
-                <a:solidFill>
-                  <a:srgbClr val="000000"/>
-                </a:solidFill>
-              </a:rPr>
-              <a:t>兼容纯C环境：指针传参，能力一样，调用处多写&amp;</a:t>
-            </a:r>
-            <a:endParaRPr lang="en-US" sz="1800" dirty="0"/>
-          </a:p>
-        </p:txBody>
-      </p:sp>
-      <p:sp>
-        <p:nvSpPr>
-          <p:cNvPr id="8" name="Text 6"/>
-          <p:cNvSpPr/>
-          <p:nvPr/>
-        </p:nvSpPr>
-        <p:spPr>
-          <a:xfrm>
-            <a:off x="896112" y="3808476"/>
-            <a:ext cx="10454335" cy="397764"/>
-          </a:xfrm>
-          <a:prstGeom prst="rect">
-            <a:avLst/>
-          </a:prstGeom>
-          <a:noFill/>
-          <a:ln/>
-        </p:spPr>
-        <p:txBody>
-          <a:bodyPr wrap="square" rtlCol="0" anchor="t"/>
-          <a:lstStyle/>
-          <a:p>
-            <a:pPr algn="l" indent="0" marL="0">
-              <a:lnSpc>
-                <a:spcPct val="115000"/>
-              </a:lnSpc>
-              <a:buNone/>
-            </a:pPr>
-            <a:r>
-              <a:rPr lang="en-US" sz="1800" b="1" dirty="0">
-                <a:solidFill>
-                  <a:srgbClr val="1F4E9C"/>
-                </a:solidFill>
-                <a:latin typeface="微软雅黑" pitchFamily="34" charset="0"/>
-                <a:ea typeface="微软雅黑" pitchFamily="34" charset="-122"/>
-                <a:cs typeface="微软雅黑" pitchFamily="34" charset="-120"/>
-              </a:rPr>
-              <a:t>•  </a:t>
-            </a:r>
-            <a:pPr algn="l" indent="0" marL="0">
-              <a:lnSpc>
-                <a:spcPct val="115000"/>
-              </a:lnSpc>
-              <a:buNone/>
-            </a:pPr>
-            <a:r>
-              <a:rPr lang="en-US" sz="1800" dirty="0">
-                <a:solidFill>
-                  <a:srgbClr val="000000"/>
-                </a:solidFill>
-              </a:rPr>
-              <a:t>传大块数据（如结构体）：传地址或引用，避免整块复印</a:t>
-            </a:r>
-            <a:endParaRPr lang="en-US" sz="1800" dirty="0"/>
+            <a:pPr marL="0" indent="0" algn="l">
+              <a:buNone/>
+            </a:pPr>
+            <a:r>
+              <a:rPr lang="en-US" sz="1500" dirty="0">
+                <a:solidFill>
+                  <a:srgbClr val="8A9099"/>
+                </a:solidFill>
+                <a:latin typeface="微软雅黑" panose="020B0503020204020204" pitchFamily="34" charset="-122"/>
+                <a:ea typeface="微软雅黑" panose="020B0503020204020204" pitchFamily="34" charset="-122"/>
+                <a:cs typeface="微软雅黑" panose="020B0503020204020204" pitchFamily="34" charset="-120"/>
+              </a:rPr>
+              <a:t>参考答案在本PPT最后两页，课后自行对照</a:t>
+            </a:r>
+            <a:endParaRPr lang="en-US" sz="1500" dirty="0"/>
           </a:p>
         </p:txBody>
       </p:sp>
@@ -2713,7 +2298,7 @@
 
 <file path=ppt/slides/slide11.xml><?xml version="1.0" encoding="utf-8"?>
 <p:sld xmlns:a="http://schemas.openxmlformats.org/drawingml/2006/main" xmlns:r="http://schemas.openxmlformats.org/officeDocument/2006/relationships" xmlns:p="http://schemas.openxmlformats.org/presentationml/2006/main">
-  <p:cSld name="Slide 11">
+  <p:cSld>
     <p:bg>
       <p:bgPr>
         <a:blipFill dpi="0" rotWithShape="1">
@@ -2757,13 +2342,12 @@
             <a:avLst/>
           </a:prstGeom>
           <a:noFill/>
-          <a:ln/>
         </p:spPr>
         <p:txBody>
           <a:bodyPr wrap="square" rtlCol="0" anchor="ctr"/>
           <a:lstStyle/>
           <a:p>
-            <a:pPr algn="r" indent="0" marL="0">
+            <a:pPr marL="0" indent="0" algn="r">
               <a:buNone/>
             </a:pPr>
             <a:r>
@@ -2771,11 +2355,11 @@
                 <a:solidFill>
                   <a:srgbClr val="8A9099"/>
                 </a:solidFill>
-                <a:latin typeface="微软雅黑" pitchFamily="34" charset="0"/>
-                <a:ea typeface="微软雅黑" pitchFamily="34" charset="-122"/>
-                <a:cs typeface="微软雅黑" pitchFamily="34" charset="-120"/>
-              </a:rPr>
-              <a:t>11 / 15</a:t>
+                <a:latin typeface="微软雅黑" panose="020B0503020204020204" pitchFamily="34" charset="-122"/>
+                <a:ea typeface="微软雅黑" panose="020B0503020204020204" pitchFamily="34" charset="-122"/>
+                <a:cs typeface="微软雅黑" panose="020B0503020204020204" pitchFamily="34" charset="-120"/>
+              </a:rPr>
+              <a:t>11 / 12</a:t>
             </a:r>
             <a:endParaRPr lang="en-US" sz="1000" dirty="0"/>
           </a:p>
@@ -2796,13 +2380,12 @@
             <a:avLst/>
           </a:prstGeom>
           <a:noFill/>
-          <a:ln/>
         </p:spPr>
         <p:txBody>
           <a:bodyPr wrap="square" rtlCol="0" anchor="ctr"/>
           <a:lstStyle/>
           <a:p>
-            <a:pPr algn="l" indent="0" marL="0">
+            <a:pPr marL="0" indent="0" algn="l">
               <a:buNone/>
             </a:pPr>
             <a:r>
@@ -2810,11 +2393,11 @@
                 <a:solidFill>
                   <a:srgbClr val="1F4E9C"/>
                 </a:solidFill>
-                <a:latin typeface="微软雅黑" pitchFamily="34" charset="0"/>
-                <a:ea typeface="微软雅黑" pitchFamily="34" charset="-122"/>
-                <a:cs typeface="微软雅黑" pitchFamily="34" charset="-120"/>
-              </a:rPr>
-              <a:t>伪代码语境</a:t>
+                <a:latin typeface="微软雅黑" panose="020B0503020204020204" pitchFamily="34" charset="-122"/>
+                <a:ea typeface="微软雅黑" panose="020B0503020204020204" pitchFamily="34" charset="-122"/>
+                <a:cs typeface="微软雅黑" panose="020B0503020204020204" pitchFamily="34" charset="-120"/>
+              </a:rPr>
+              <a:t>参考答案 · 跟练题</a:t>
             </a:r>
             <a:endParaRPr lang="en-US" sz="1400" dirty="0"/>
           </a:p>
@@ -2835,13 +2418,12 @@
             <a:avLst/>
           </a:prstGeom>
           <a:noFill/>
-          <a:ln/>
         </p:spPr>
         <p:txBody>
           <a:bodyPr wrap="square" rtlCol="0" anchor="ctr"/>
           <a:lstStyle/>
           <a:p>
-            <a:pPr algn="l" indent="0" marL="0">
+            <a:pPr marL="0" indent="0" algn="l">
               <a:buNone/>
             </a:pPr>
             <a:r>
@@ -2849,11 +2431,11 @@
                 <a:solidFill>
                   <a:srgbClr val="1F2329"/>
                 </a:solidFill>
-                <a:latin typeface="微软雅黑" pitchFamily="34" charset="0"/>
-                <a:ea typeface="微软雅黑" pitchFamily="34" charset="-122"/>
-                <a:cs typeface="微软雅黑" pitchFamily="34" charset="-120"/>
-              </a:rPr>
-              <a:t>为什么伪代码的参数上常写&amp;</a:t>
+                <a:latin typeface="微软雅黑" panose="020B0503020204020204" pitchFamily="34" charset="-122"/>
+                <a:ea typeface="微软雅黑" panose="020B0503020204020204" pitchFamily="34" charset="-122"/>
+                <a:cs typeface="微软雅黑" panose="020B0503020204020204" pitchFamily="34" charset="-120"/>
+              </a:rPr>
+              <a:t>跟练题参考答案（自行对照）</a:t>
             </a:r>
             <a:endParaRPr lang="en-US" sz="2800" dirty="0"/>
           </a:p>
@@ -2861,169 +2443,237 @@
       </p:sp>
       <p:sp>
         <p:nvSpPr>
-          <p:cNvPr id="5" name="Text 3"/>
-          <p:cNvSpPr/>
-          <p:nvPr/>
-        </p:nvSpPr>
-        <p:spPr>
-          <a:xfrm>
-            <a:off x="896112" y="2395728"/>
-            <a:ext cx="10454335" cy="397764"/>
-          </a:xfrm>
-          <a:prstGeom prst="rect">
-            <a:avLst/>
-          </a:prstGeom>
-          <a:noFill/>
-          <a:ln/>
+          <p:cNvPr id="5" name="Shape 3"/>
+          <p:cNvSpPr/>
+          <p:nvPr/>
+        </p:nvSpPr>
+        <p:spPr>
+          <a:xfrm>
+            <a:off x="822960" y="2395728"/>
+            <a:ext cx="10545775" cy="2423257"/>
+          </a:xfrm>
+          <a:prstGeom prst="rect">
+            <a:avLst/>
+          </a:prstGeom>
+          <a:solidFill>
+            <a:srgbClr val="F7F9FC"/>
+          </a:solidFill>
+        </p:spPr>
+      </p:sp>
+      <p:sp>
+        <p:nvSpPr>
+          <p:cNvPr id="6" name="Shape 4"/>
+          <p:cNvSpPr/>
+          <p:nvPr/>
+        </p:nvSpPr>
+        <p:spPr>
+          <a:xfrm>
+            <a:off x="822960" y="2395728"/>
+            <a:ext cx="50292" cy="2423257"/>
+          </a:xfrm>
+          <a:prstGeom prst="rect">
+            <a:avLst/>
+          </a:prstGeom>
+          <a:solidFill>
+            <a:srgbClr val="1F4E9C"/>
+          </a:solidFill>
+        </p:spPr>
+      </p:sp>
+      <p:sp>
+        <p:nvSpPr>
+          <p:cNvPr id="7" name="Text 5"/>
+          <p:cNvSpPr/>
+          <p:nvPr/>
+        </p:nvSpPr>
+        <p:spPr>
+          <a:xfrm>
+            <a:off x="1078992" y="2505456"/>
+            <a:ext cx="10033711" cy="2203801"/>
+          </a:xfrm>
+          <a:prstGeom prst="rect">
+            <a:avLst/>
+          </a:prstGeom>
+          <a:noFill/>
         </p:spPr>
         <p:txBody>
           <a:bodyPr wrap="square" rtlCol="0" anchor="t"/>
           <a:lstStyle/>
           <a:p>
-            <a:pPr algn="l" indent="0" marL="0">
+            <a:pPr marL="0" indent="0" algn="l">
+              <a:lnSpc>
+                <a:spcPct val="125000"/>
+              </a:lnSpc>
+              <a:buNone/>
+            </a:pPr>
+            <a:r>
+              <a:rPr lang="en-US" sz="1100" dirty="0">
+                <a:solidFill>
+                  <a:srgbClr val="1F2329"/>
+                </a:solidFill>
+                <a:latin typeface="Consolas" panose="020B0609020204030204" pitchFamily="34" charset="0"/>
+                <a:ea typeface="Consolas" panose="020B0609020204030204" pitchFamily="34" charset="-122"/>
+                <a:cs typeface="Consolas" panose="020B0609020204030204" pitchFamily="34" charset="-120"/>
+              </a:rPr>
+              <a:t>// 指针版与引用版swap
+void swapPtr(int *px, int *py){
+    int t = *px; *px = *py; *py = t;
+}
+void swapRef(int &amp;x, int &amp;y){
+    int t = x; x = y; y = t;
+}
+int a = 3, b = 5;
+swapPtr(&amp;a, &amp;b);    // a=5 b=3
+swapRef(a, b);      // a=3 b=5
+</a:t>
+            </a:r>
+            <a:endParaRPr lang="en-US" sz="1100" dirty="0"/>
+          </a:p>
+        </p:txBody>
+      </p:sp>
+      <p:sp>
+        <p:nvSpPr>
+          <p:cNvPr id="8" name="Text 6"/>
+          <p:cNvSpPr/>
+          <p:nvPr/>
+        </p:nvSpPr>
+        <p:spPr>
+          <a:xfrm>
+            <a:off x="896112" y="5020153"/>
+            <a:ext cx="10454335" cy="321564"/>
+          </a:xfrm>
+          <a:prstGeom prst="rect">
+            <a:avLst/>
+          </a:prstGeom>
+          <a:noFill/>
+        </p:spPr>
+        <p:txBody>
+          <a:bodyPr wrap="square" rtlCol="0" anchor="t"/>
+          <a:lstStyle/>
+          <a:p>
+            <a:pPr marL="0" indent="0" algn="l">
               <a:lnSpc>
                 <a:spcPct val="115000"/>
               </a:lnSpc>
               <a:buNone/>
             </a:pPr>
             <a:r>
-              <a:rPr lang="en-US" sz="1800" b="1" dirty="0">
+              <a:rPr lang="en-US" sz="1400" b="1" dirty="0">
                 <a:solidFill>
                   <a:srgbClr val="1F4E9C"/>
                 </a:solidFill>
-                <a:latin typeface="微软雅黑" pitchFamily="34" charset="0"/>
-                <a:ea typeface="微软雅黑" pitchFamily="34" charset="-122"/>
-                <a:cs typeface="微软雅黑" pitchFamily="34" charset="-120"/>
+                <a:latin typeface="微软雅黑" panose="020B0503020204020204" pitchFamily="34" charset="-122"/>
+                <a:ea typeface="微软雅黑" panose="020B0503020204020204" pitchFamily="34" charset="-122"/>
+                <a:cs typeface="微软雅黑" panose="020B0503020204020204" pitchFamily="34" charset="-120"/>
               </a:rPr>
               <a:t>•  </a:t>
             </a:r>
-            <a:pPr algn="l" indent="0" marL="0">
+            <a:r>
+              <a:rPr lang="en-US" sz="1400" dirty="0">
+                <a:solidFill>
+                  <a:srgbClr val="000000"/>
+                </a:solidFill>
+              </a:rPr>
+              <a:t>指针版图：px、py的箭头跨出函数框指向a、b，*px改的就是a的格子</a:t>
+            </a:r>
+            <a:endParaRPr lang="en-US" sz="1400" dirty="0"/>
+          </a:p>
+        </p:txBody>
+      </p:sp>
+      <p:sp>
+        <p:nvSpPr>
+          <p:cNvPr id="9" name="Text 7"/>
+          <p:cNvSpPr/>
+          <p:nvPr/>
+        </p:nvSpPr>
+        <p:spPr>
+          <a:xfrm>
+            <a:off x="896112" y="5414869"/>
+            <a:ext cx="10454335" cy="321564"/>
+          </a:xfrm>
+          <a:prstGeom prst="rect">
+            <a:avLst/>
+          </a:prstGeom>
+          <a:noFill/>
+        </p:spPr>
+        <p:txBody>
+          <a:bodyPr wrap="square" rtlCol="0" anchor="t"/>
+          <a:lstStyle/>
+          <a:p>
+            <a:pPr marL="0" indent="0" algn="l">
               <a:lnSpc>
                 <a:spcPct val="115000"/>
               </a:lnSpc>
               <a:buNone/>
             </a:pPr>
             <a:r>
-              <a:rPr lang="en-US" sz="1800" dirty="0">
+              <a:rPr lang="en-US" sz="1400" b="1" dirty="0">
+                <a:solidFill>
+                  <a:srgbClr val="1F4E9C"/>
+                </a:solidFill>
+                <a:latin typeface="微软雅黑" panose="020B0503020204020204" pitchFamily="34" charset="-122"/>
+                <a:ea typeface="微软雅黑" panose="020B0503020204020204" pitchFamily="34" charset="-122"/>
+                <a:cs typeface="微软雅黑" panose="020B0503020204020204" pitchFamily="34" charset="-120"/>
+              </a:rPr>
+              <a:t>•  </a:t>
+            </a:r>
+            <a:r>
+              <a:rPr lang="en-US" sz="1400" dirty="0">
                 <a:solidFill>
                   <a:srgbClr val="000000"/>
                 </a:solidFill>
               </a:rPr>
-              <a:t>数据结构的初始化、插入这类函数，都要直接修改传进来的结构</a:t>
-            </a:r>
-            <a:endParaRPr lang="en-US" sz="1800" dirty="0"/>
-          </a:p>
-        </p:txBody>
-      </p:sp>
-      <p:sp>
-        <p:nvSpPr>
-          <p:cNvPr id="6" name="Text 4"/>
-          <p:cNvSpPr/>
-          <p:nvPr/>
-        </p:nvSpPr>
-        <p:spPr>
-          <a:xfrm>
-            <a:off x="896112" y="2866644"/>
-            <a:ext cx="10454335" cy="397764"/>
-          </a:xfrm>
-          <a:prstGeom prst="rect">
-            <a:avLst/>
-          </a:prstGeom>
-          <a:noFill/>
-          <a:ln/>
+              <a:t>引用版图：x直接标成a的别名，不画新格子</a:t>
+            </a:r>
+            <a:endParaRPr lang="en-US" sz="1400" dirty="0"/>
+          </a:p>
+        </p:txBody>
+      </p:sp>
+      <p:sp>
+        <p:nvSpPr>
+          <p:cNvPr id="10" name="Text 8"/>
+          <p:cNvSpPr/>
+          <p:nvPr/>
+        </p:nvSpPr>
+        <p:spPr>
+          <a:xfrm>
+            <a:off x="896112" y="5809585"/>
+            <a:ext cx="10454335" cy="321564"/>
+          </a:xfrm>
+          <a:prstGeom prst="rect">
+            <a:avLst/>
+          </a:prstGeom>
+          <a:noFill/>
         </p:spPr>
         <p:txBody>
           <a:bodyPr wrap="square" rtlCol="0" anchor="t"/>
           <a:lstStyle/>
           <a:p>
-            <a:pPr algn="l" indent="0" marL="0">
+            <a:pPr marL="0" indent="0" algn="l">
               <a:lnSpc>
                 <a:spcPct val="115000"/>
               </a:lnSpc>
               <a:buNone/>
             </a:pPr>
             <a:r>
-              <a:rPr lang="en-US" sz="1800" b="1" dirty="0">
+              <a:rPr lang="en-US" sz="1400" b="1" dirty="0">
                 <a:solidFill>
                   <a:srgbClr val="1F4E9C"/>
                 </a:solidFill>
-                <a:latin typeface="微软雅黑" pitchFamily="34" charset="0"/>
-                <a:ea typeface="微软雅黑" pitchFamily="34" charset="-122"/>
-                <a:cs typeface="微软雅黑" pitchFamily="34" charset="-120"/>
+                <a:latin typeface="微软雅黑" panose="020B0503020204020204" pitchFamily="34" charset="-122"/>
+                <a:ea typeface="微软雅黑" panose="020B0503020204020204" pitchFamily="34" charset="-122"/>
+                <a:cs typeface="微软雅黑" panose="020B0503020204020204" pitchFamily="34" charset="-120"/>
               </a:rPr>
               <a:t>•  </a:t>
             </a:r>
-            <a:pPr algn="l" indent="0" marL="0">
-              <a:lnSpc>
-                <a:spcPct val="115000"/>
-              </a:lnSpc>
-              <a:buNone/>
-            </a:pPr>
-            <a:r>
-              <a:rPr lang="en-US" sz="1800" dirty="0">
+            <a:r>
+              <a:rPr lang="en-US" sz="1400" dirty="0">
                 <a:solidFill>
                   <a:srgbClr val="000000"/>
                 </a:solidFill>
               </a:rPr>
-              <a:t>参数写&amp;，意思就是"这个参数允许改外面的东西"</a:t>
-            </a:r>
-            <a:endParaRPr lang="en-US" sz="1800" dirty="0"/>
-          </a:p>
-        </p:txBody>
-      </p:sp>
-      <p:sp>
-        <p:nvSpPr>
-          <p:cNvPr id="7" name="Text 5"/>
-          <p:cNvSpPr/>
-          <p:nvPr/>
-        </p:nvSpPr>
-        <p:spPr>
-          <a:xfrm>
-            <a:off x="896112" y="3337560"/>
-            <a:ext cx="10454335" cy="397764"/>
-          </a:xfrm>
-          <a:prstGeom prst="rect">
-            <a:avLst/>
-          </a:prstGeom>
-          <a:noFill/>
-          <a:ln/>
-        </p:spPr>
-        <p:txBody>
-          <a:bodyPr wrap="square" rtlCol="0" anchor="t"/>
-          <a:lstStyle/>
-          <a:p>
-            <a:pPr algn="l" indent="0" marL="0">
-              <a:lnSpc>
-                <a:spcPct val="115000"/>
-              </a:lnSpc>
-              <a:buNone/>
-            </a:pPr>
-            <a:r>
-              <a:rPr lang="en-US" sz="1800" b="1" dirty="0">
-                <a:solidFill>
-                  <a:srgbClr val="1F4E9C"/>
-                </a:solidFill>
-                <a:latin typeface="微软雅黑" pitchFamily="34" charset="0"/>
-                <a:ea typeface="微软雅黑" pitchFamily="34" charset="-122"/>
-                <a:cs typeface="微软雅黑" pitchFamily="34" charset="-120"/>
-              </a:rPr>
-              <a:t>•  </a:t>
-            </a:r>
-            <a:pPr algn="l" indent="0" marL="0">
-              <a:lnSpc>
-                <a:spcPct val="115000"/>
-              </a:lnSpc>
-              <a:buNone/>
-            </a:pPr>
-            <a:r>
-              <a:rPr lang="en-US" sz="1800" dirty="0">
-                <a:solidFill>
-                  <a:srgbClr val="000000"/>
-                </a:solidFill>
-              </a:rPr>
-              <a:t>以后读伪代码，看到参数上的&amp;，就知道这函数会动调用者的数据</a:t>
-            </a:r>
-            <a:endParaRPr lang="en-US" sz="1800" dirty="0"/>
+              <a:t>两个版本都跑通，再把失败版也跑一次，三种行为对比着看</a:t>
+            </a:r>
+            <a:endParaRPr lang="en-US" sz="1400" dirty="0"/>
           </a:p>
         </p:txBody>
       </p:sp>
@@ -3037,7 +2687,7 @@
 
 <file path=ppt/slides/slide12.xml><?xml version="1.0" encoding="utf-8"?>
 <p:sld xmlns:a="http://schemas.openxmlformats.org/drawingml/2006/main" xmlns:r="http://schemas.openxmlformats.org/officeDocument/2006/relationships" xmlns:p="http://schemas.openxmlformats.org/presentationml/2006/main">
-  <p:cSld name="Slide 12">
+  <p:cSld>
     <p:bg>
       <p:bgPr>
         <a:blipFill dpi="0" rotWithShape="1">
@@ -3081,13 +2731,12 @@
             <a:avLst/>
           </a:prstGeom>
           <a:noFill/>
-          <a:ln/>
         </p:spPr>
         <p:txBody>
           <a:bodyPr wrap="square" rtlCol="0" anchor="ctr"/>
           <a:lstStyle/>
           <a:p>
-            <a:pPr algn="r" indent="0" marL="0">
+            <a:pPr marL="0" indent="0" algn="r">
               <a:buNone/>
             </a:pPr>
             <a:r>
@@ -3095,11 +2744,11 @@
                 <a:solidFill>
                   <a:srgbClr val="8A9099"/>
                 </a:solidFill>
-                <a:latin typeface="微软雅黑" pitchFamily="34" charset="0"/>
-                <a:ea typeface="微软雅黑" pitchFamily="34" charset="-122"/>
-                <a:cs typeface="微软雅黑" pitchFamily="34" charset="-120"/>
-              </a:rPr>
-              <a:t>12 / 15</a:t>
+                <a:latin typeface="微软雅黑" panose="020B0503020204020204" pitchFamily="34" charset="-122"/>
+                <a:ea typeface="微软雅黑" panose="020B0503020204020204" pitchFamily="34" charset="-122"/>
+                <a:cs typeface="微软雅黑" panose="020B0503020204020204" pitchFamily="34" charset="-120"/>
+              </a:rPr>
+              <a:t>12 / 12</a:t>
             </a:r>
             <a:endParaRPr lang="en-US" sz="1000" dirty="0"/>
           </a:p>
@@ -3120,13 +2769,12 @@
             <a:avLst/>
           </a:prstGeom>
           <a:noFill/>
-          <a:ln/>
         </p:spPr>
         <p:txBody>
           <a:bodyPr wrap="square" rtlCol="0" anchor="ctr"/>
           <a:lstStyle/>
           <a:p>
-            <a:pPr algn="l" indent="0" marL="0">
+            <a:pPr marL="0" indent="0" algn="l">
               <a:buNone/>
             </a:pPr>
             <a:r>
@@ -3134,11 +2782,11 @@
                 <a:solidFill>
                   <a:srgbClr val="1F4E9C"/>
                 </a:solidFill>
-                <a:latin typeface="微软雅黑" pitchFamily="34" charset="0"/>
-                <a:ea typeface="微软雅黑" pitchFamily="34" charset="-122"/>
-                <a:cs typeface="微软雅黑" pitchFamily="34" charset="-120"/>
-              </a:rPr>
-              <a:t>本节小结</a:t>
+                <a:latin typeface="微软雅黑" panose="020B0503020204020204" pitchFamily="34" charset="-122"/>
+                <a:ea typeface="微软雅黑" panose="020B0503020204020204" pitchFamily="34" charset="-122"/>
+                <a:cs typeface="微软雅黑" panose="020B0503020204020204" pitchFamily="34" charset="-120"/>
+              </a:rPr>
+              <a:t>参考答案 · 模仿题</a:t>
             </a:r>
             <a:endParaRPr lang="en-US" sz="1400" dirty="0"/>
           </a:p>
@@ -3159,13 +2807,12 @@
             <a:avLst/>
           </a:prstGeom>
           <a:noFill/>
-          <a:ln/>
         </p:spPr>
         <p:txBody>
           <a:bodyPr wrap="square" rtlCol="0" anchor="ctr"/>
           <a:lstStyle/>
           <a:p>
-            <a:pPr algn="l" indent="0" marL="0">
+            <a:pPr marL="0" indent="0" algn="l">
               <a:buNone/>
             </a:pPr>
             <a:r>
@@ -3173,11 +2820,11 @@
                 <a:solidFill>
                   <a:srgbClr val="1F2329"/>
                 </a:solidFill>
-                <a:latin typeface="微软雅黑" pitchFamily="34" charset="0"/>
-                <a:ea typeface="微软雅黑" pitchFamily="34" charset="-122"/>
-                <a:cs typeface="微软雅黑" pitchFamily="34" charset="-120"/>
-              </a:rPr>
-              <a:t>今天就三件事</a:t>
+                <a:latin typeface="微软雅黑" panose="020B0503020204020204" pitchFamily="34" charset="-122"/>
+                <a:ea typeface="微软雅黑" panose="020B0503020204020204" pitchFamily="34" charset="-122"/>
+                <a:cs typeface="微软雅黑" panose="020B0503020204020204" pitchFamily="34" charset="-120"/>
+              </a:rPr>
+              <a:t>模仿题参考答案（自行对照）</a:t>
             </a:r>
             <a:endParaRPr lang="en-US" sz="2800" dirty="0"/>
           </a:p>
@@ -3185,26 +2832,109 @@
       </p:sp>
       <p:sp>
         <p:nvSpPr>
-          <p:cNvPr id="5" name="Text 3"/>
-          <p:cNvSpPr/>
-          <p:nvPr/>
-        </p:nvSpPr>
-        <p:spPr>
-          <a:xfrm>
-            <a:off x="896112" y="2395728"/>
+          <p:cNvPr id="5" name="Shape 3"/>
+          <p:cNvSpPr/>
+          <p:nvPr/>
+        </p:nvSpPr>
+        <p:spPr>
+          <a:xfrm>
+            <a:off x="822960" y="2395728"/>
+            <a:ext cx="10545775" cy="1746504"/>
+          </a:xfrm>
+          <a:prstGeom prst="rect">
+            <a:avLst/>
+          </a:prstGeom>
+          <a:solidFill>
+            <a:srgbClr val="F7F9FC"/>
+          </a:solidFill>
+        </p:spPr>
+      </p:sp>
+      <p:sp>
+        <p:nvSpPr>
+          <p:cNvPr id="6" name="Shape 4"/>
+          <p:cNvSpPr/>
+          <p:nvPr/>
+        </p:nvSpPr>
+        <p:spPr>
+          <a:xfrm>
+            <a:off x="822960" y="2395728"/>
+            <a:ext cx="50292" cy="1746504"/>
+          </a:xfrm>
+          <a:prstGeom prst="rect">
+            <a:avLst/>
+          </a:prstGeom>
+          <a:solidFill>
+            <a:srgbClr val="1F4E9C"/>
+          </a:solidFill>
+        </p:spPr>
+      </p:sp>
+      <p:sp>
+        <p:nvSpPr>
+          <p:cNvPr id="7" name="Text 5"/>
+          <p:cNvSpPr/>
+          <p:nvPr/>
+        </p:nvSpPr>
+        <p:spPr>
+          <a:xfrm>
+            <a:off x="1078992" y="2505456"/>
+            <a:ext cx="10033711" cy="1527048"/>
+          </a:xfrm>
+          <a:prstGeom prst="rect">
+            <a:avLst/>
+          </a:prstGeom>
+          <a:noFill/>
+        </p:spPr>
+        <p:txBody>
+          <a:bodyPr wrap="square" rtlCol="0" anchor="t"/>
+          <a:lstStyle/>
+          <a:p>
+            <a:pPr marL="0" indent="0" algn="l">
+              <a:lnSpc>
+                <a:spcPct val="125000"/>
+              </a:lnSpc>
+              <a:buNone/>
+            </a:pPr>
+            <a:r>
+              <a:rPr lang="en-US" sz="1400" dirty="0">
+                <a:solidFill>
+                  <a:srgbClr val="1F2329"/>
+                </a:solidFill>
+                <a:latin typeface="Consolas" panose="020B0609020204030204" pitchFamily="34" charset="0"/>
+                <a:ea typeface="Consolas" panose="020B0609020204030204" pitchFamily="34" charset="-122"/>
+                <a:cs typeface="Consolas" panose="020B0609020204030204" pitchFamily="34" charset="-120"/>
+              </a:rPr>
+              <a:t>// 引用传参与值传递对照
+void increment(int &amp;n){ n = n + 1; }
+int n = 10;
+increment(n);
+printf("%d\n", n);   // 11
+</a:t>
+            </a:r>
+            <a:endParaRPr lang="en-US" sz="1400" dirty="0"/>
+          </a:p>
+        </p:txBody>
+      </p:sp>
+      <p:sp>
+        <p:nvSpPr>
+          <p:cNvPr id="8" name="Text 6"/>
+          <p:cNvSpPr/>
+          <p:nvPr/>
+        </p:nvSpPr>
+        <p:spPr>
+          <a:xfrm>
+            <a:off x="896112" y="4343400"/>
             <a:ext cx="10454335" cy="397764"/>
           </a:xfrm>
           <a:prstGeom prst="rect">
             <a:avLst/>
           </a:prstGeom>
           <a:noFill/>
-          <a:ln/>
         </p:spPr>
         <p:txBody>
           <a:bodyPr wrap="square" rtlCol="0" anchor="t"/>
           <a:lstStyle/>
           <a:p>
-            <a:pPr algn="l" indent="0" marL="0">
+            <a:pPr marL="0" indent="0" algn="l">
               <a:lnSpc>
                 <a:spcPct val="115000"/>
               </a:lnSpc>
@@ -3215,25 +2945,68 @@
                 <a:solidFill>
                   <a:srgbClr val="1F4E9C"/>
                 </a:solidFill>
-                <a:latin typeface="微软雅黑" pitchFamily="34" charset="0"/>
-                <a:ea typeface="微软雅黑" pitchFamily="34" charset="-122"/>
-                <a:cs typeface="微软雅黑" pitchFamily="34" charset="-120"/>
+                <a:latin typeface="微软雅黑" panose="020B0503020204020204" pitchFamily="34" charset="-122"/>
+                <a:ea typeface="微软雅黑" panose="020B0503020204020204" pitchFamily="34" charset="-122"/>
+                <a:cs typeface="微软雅黑" panose="020B0503020204020204" pitchFamily="34" charset="-120"/>
               </a:rPr>
               <a:t>•  </a:t>
             </a:r>
-            <a:pPr algn="l" indent="0" marL="0">
+            <a:r>
+              <a:rPr lang="en-US" sz="1800" dirty="0">
+                <a:solidFill>
+                  <a:srgbClr val="000000"/>
+                </a:solidFill>
+              </a:rPr>
+              <a:t>参数写int &amp;n，调用处不写&amp;，函数里改n就是改外面的n</a:t>
+            </a:r>
+            <a:endParaRPr lang="en-US" sz="1800" dirty="0"/>
+          </a:p>
+        </p:txBody>
+      </p:sp>
+      <p:sp>
+        <p:nvSpPr>
+          <p:cNvPr id="9" name="Text 7"/>
+          <p:cNvSpPr/>
+          <p:nvPr/>
+        </p:nvSpPr>
+        <p:spPr>
+          <a:xfrm>
+            <a:off x="896112" y="4814316"/>
+            <a:ext cx="10454335" cy="397764"/>
+          </a:xfrm>
+          <a:prstGeom prst="rect">
+            <a:avLst/>
+          </a:prstGeom>
+          <a:noFill/>
+        </p:spPr>
+        <p:txBody>
+          <a:bodyPr wrap="square" rtlCol="0" anchor="t"/>
+          <a:lstStyle/>
+          <a:p>
+            <a:pPr marL="0" indent="0" algn="l">
               <a:lnSpc>
                 <a:spcPct val="115000"/>
               </a:lnSpc>
               <a:buNone/>
             </a:pPr>
             <a:r>
+              <a:rPr lang="en-US" sz="1800" b="1" dirty="0">
+                <a:solidFill>
+                  <a:srgbClr val="1F4E9C"/>
+                </a:solidFill>
+                <a:latin typeface="微软雅黑" panose="020B0503020204020204" pitchFamily="34" charset="-122"/>
+                <a:ea typeface="微软雅黑" panose="020B0503020204020204" pitchFamily="34" charset="-122"/>
+                <a:cs typeface="微软雅黑" panose="020B0503020204020204" pitchFamily="34" charset="-120"/>
+              </a:rPr>
+              <a:t>•  </a:t>
+            </a:r>
+            <a:r>
               <a:rPr lang="en-US" sz="1800" dirty="0">
                 <a:solidFill>
                   <a:srgbClr val="000000"/>
                 </a:solidFill>
               </a:rPr>
-              <a:t>值传递交的是副本，函数改不动外面的变量——基础阶段的为什么解开了</a:t>
+              <a:t>对照实验：参数改成int n（值传递），调用后n仍是10</a:t>
             </a:r>
             <a:endParaRPr lang="en-US" sz="1800" dirty="0"/>
           </a:p>
@@ -3241,26 +3014,25 @@
       </p:sp>
       <p:sp>
         <p:nvSpPr>
-          <p:cNvPr id="6" name="Text 4"/>
-          <p:cNvSpPr/>
-          <p:nvPr/>
-        </p:nvSpPr>
-        <p:spPr>
-          <a:xfrm>
-            <a:off x="896112" y="2866644"/>
+          <p:cNvPr id="10" name="Text 8"/>
+          <p:cNvSpPr/>
+          <p:nvPr/>
+        </p:nvSpPr>
+        <p:spPr>
+          <a:xfrm>
+            <a:off x="896112" y="5285232"/>
             <a:ext cx="10454335" cy="397764"/>
           </a:xfrm>
           <a:prstGeom prst="rect">
             <a:avLst/>
           </a:prstGeom>
           <a:noFill/>
-          <a:ln/>
         </p:spPr>
         <p:txBody>
           <a:bodyPr wrap="square" rtlCol="0" anchor="t"/>
           <a:lstStyle/>
           <a:p>
-            <a:pPr algn="l" indent="0" marL="0">
+            <a:pPr marL="0" indent="0" algn="l">
               <a:lnSpc>
                 <a:spcPct val="115000"/>
               </a:lnSpc>
@@ -3271,122 +3043,21 @@
                 <a:solidFill>
                   <a:srgbClr val="1F4E9C"/>
                 </a:solidFill>
-                <a:latin typeface="微软雅黑" pitchFamily="34" charset="0"/>
-                <a:ea typeface="微软雅黑" pitchFamily="34" charset="-122"/>
-                <a:cs typeface="微软雅黑" pitchFamily="34" charset="-120"/>
+                <a:latin typeface="微软雅黑" panose="020B0503020204020204" pitchFamily="34" charset="-122"/>
+                <a:ea typeface="微软雅黑" panose="020B0503020204020204" pitchFamily="34" charset="-122"/>
+                <a:cs typeface="微软雅黑" panose="020B0503020204020204" pitchFamily="34" charset="-120"/>
               </a:rPr>
               <a:t>•  </a:t>
             </a:r>
-            <a:pPr algn="l" indent="0" marL="0">
-              <a:lnSpc>
-                <a:spcPct val="115000"/>
-              </a:lnSpc>
-              <a:buNone/>
-            </a:pPr>
             <a:r>
               <a:rPr lang="en-US" sz="1800" dirty="0">
                 <a:solidFill>
                   <a:srgbClr val="000000"/>
                 </a:solidFill>
               </a:rPr>
-              <a:t>想改得动，交地址：指针传参顺着*改，引用传参用别名改</a:t>
+              <a:t>代码省略#include &lt;stdio.h&gt;与main骨架</a:t>
             </a:r>
             <a:endParaRPr lang="en-US" sz="1800" dirty="0"/>
-          </a:p>
-        </p:txBody>
-      </p:sp>
-      <p:sp>
-        <p:nvSpPr>
-          <p:cNvPr id="7" name="Text 5"/>
-          <p:cNvSpPr/>
-          <p:nvPr/>
-        </p:nvSpPr>
-        <p:spPr>
-          <a:xfrm>
-            <a:off x="896112" y="3337560"/>
-            <a:ext cx="10454335" cy="397764"/>
-          </a:xfrm>
-          <a:prstGeom prst="rect">
-            <a:avLst/>
-          </a:prstGeom>
-          <a:noFill/>
-          <a:ln/>
-        </p:spPr>
-        <p:txBody>
-          <a:bodyPr wrap="square" rtlCol="0" anchor="t"/>
-          <a:lstStyle/>
-          <a:p>
-            <a:pPr algn="l" indent="0" marL="0">
-              <a:lnSpc>
-                <a:spcPct val="115000"/>
-              </a:lnSpc>
-              <a:buNone/>
-            </a:pPr>
-            <a:r>
-              <a:rPr lang="en-US" sz="1800" b="1" dirty="0">
-                <a:solidFill>
-                  <a:srgbClr val="1F4E9C"/>
-                </a:solidFill>
-                <a:latin typeface="微软雅黑" pitchFamily="34" charset="0"/>
-                <a:ea typeface="微软雅黑" pitchFamily="34" charset="-122"/>
-                <a:cs typeface="微软雅黑" pitchFamily="34" charset="-120"/>
-              </a:rPr>
-              <a:t>•  </a:t>
-            </a:r>
-            <a:pPr algn="l" indent="0" marL="0">
-              <a:lnSpc>
-                <a:spcPct val="115000"/>
-              </a:lnSpc>
-              <a:buNone/>
-            </a:pPr>
-            <a:r>
-              <a:rPr lang="en-US" sz="1800" dirty="0">
-                <a:solidFill>
-                  <a:srgbClr val="000000"/>
-                </a:solidFill>
-              </a:rPr>
-              <a:t>引用两条规矩：出生即绑定，从一而终</a:t>
-            </a:r>
-            <a:endParaRPr lang="en-US" sz="1800" dirty="0"/>
-          </a:p>
-        </p:txBody>
-      </p:sp>
-      <p:sp>
-        <p:nvSpPr>
-          <p:cNvPr id="8" name="Text 6"/>
-          <p:cNvSpPr/>
-          <p:nvPr/>
-        </p:nvSpPr>
-        <p:spPr>
-          <a:xfrm>
-            <a:off x="822960" y="3899916"/>
-            <a:ext cx="10545775" cy="358902"/>
-          </a:xfrm>
-          <a:prstGeom prst="rect">
-            <a:avLst/>
-          </a:prstGeom>
-          <a:noFill/>
-          <a:ln/>
-        </p:spPr>
-        <p:txBody>
-          <a:bodyPr wrap="square" rtlCol="0" anchor="t"/>
-          <a:lstStyle/>
-          <a:p>
-            <a:pPr algn="l" indent="0" marL="0">
-              <a:buNone/>
-            </a:pPr>
-            <a:r>
-              <a:rPr lang="en-US" sz="1500" dirty="0">
-                <a:solidFill>
-                  <a:srgbClr val="8A9099"/>
-                </a:solidFill>
-                <a:latin typeface="微软雅黑" pitchFamily="34" charset="0"/>
-                <a:ea typeface="微软雅黑" pitchFamily="34" charset="-122"/>
-                <a:cs typeface="微软雅黑" pitchFamily="34" charset="-120"/>
-              </a:rPr>
-              <a:t>下一节：递归与综合实战，把整个阶段的工具一次用上</a:t>
-            </a:r>
-            <a:endParaRPr lang="en-US" sz="1500" dirty="0"/>
           </a:p>
         </p:txBody>
       </p:sp>
@@ -3398,9 +3069,9 @@
 </p:sld>
 </file>
 
-<file path=ppt/slides/slide13.xml><?xml version="1.0" encoding="utf-8"?>
+<file path=ppt/slides/slide2.xml><?xml version="1.0" encoding="utf-8"?>
 <p:sld xmlns:a="http://schemas.openxmlformats.org/drawingml/2006/main" xmlns:r="http://schemas.openxmlformats.org/officeDocument/2006/relationships" xmlns:p="http://schemas.openxmlformats.org/presentationml/2006/main">
-  <p:cSld name="Slide 13">
+  <p:cSld>
     <p:bg>
       <p:bgPr>
         <a:blipFill dpi="0" rotWithShape="1">
@@ -3444,13 +3115,12 @@
             <a:avLst/>
           </a:prstGeom>
           <a:noFill/>
-          <a:ln/>
         </p:spPr>
         <p:txBody>
           <a:bodyPr wrap="square" rtlCol="0" anchor="ctr"/>
           <a:lstStyle/>
           <a:p>
-            <a:pPr algn="r" indent="0" marL="0">
+            <a:pPr marL="0" indent="0" algn="r">
               <a:buNone/>
             </a:pPr>
             <a:r>
@@ -3458,11 +3128,11 @@
                 <a:solidFill>
                   <a:srgbClr val="8A9099"/>
                 </a:solidFill>
-                <a:latin typeface="微软雅黑" pitchFamily="34" charset="0"/>
-                <a:ea typeface="微软雅黑" pitchFamily="34" charset="-122"/>
-                <a:cs typeface="微软雅黑" pitchFamily="34" charset="-120"/>
-              </a:rPr>
-              <a:t>13 / 15</a:t>
+                <a:latin typeface="微软雅黑" panose="020B0503020204020204" pitchFamily="34" charset="-122"/>
+                <a:ea typeface="微软雅黑" panose="020B0503020204020204" pitchFamily="34" charset="-122"/>
+                <a:cs typeface="微软雅黑" panose="020B0503020204020204" pitchFamily="34" charset="-120"/>
+              </a:rPr>
+              <a:t>2 / 12</a:t>
             </a:r>
             <a:endParaRPr lang="en-US" sz="1000" dirty="0"/>
           </a:p>
@@ -3483,13 +3153,12 @@
             <a:avLst/>
           </a:prstGeom>
           <a:noFill/>
-          <a:ln/>
         </p:spPr>
         <p:txBody>
           <a:bodyPr wrap="square" rtlCol="0" anchor="ctr"/>
           <a:lstStyle/>
           <a:p>
-            <a:pPr algn="l" indent="0" marL="0">
+            <a:pPr marL="0" indent="0" algn="l">
               <a:buNone/>
             </a:pPr>
             <a:r>
@@ -3497,11 +3166,11 @@
                 <a:solidFill>
                   <a:srgbClr val="1F4E9C"/>
                 </a:solidFill>
-                <a:latin typeface="微软雅黑" pitchFamily="34" charset="0"/>
-                <a:ea typeface="微软雅黑" pitchFamily="34" charset="-122"/>
-                <a:cs typeface="微软雅黑" pitchFamily="34" charset="-120"/>
-              </a:rPr>
-              <a:t>课后任务</a:t>
+                <a:latin typeface="微软雅黑" panose="020B0503020204020204" pitchFamily="34" charset="-122"/>
+                <a:ea typeface="微软雅黑" panose="020B0503020204020204" pitchFamily="34" charset="-122"/>
+                <a:cs typeface="微软雅黑" panose="020B0503020204020204" pitchFamily="34" charset="-120"/>
+              </a:rPr>
+              <a:t>引题</a:t>
             </a:r>
             <a:endParaRPr lang="en-US" sz="1400" dirty="0"/>
           </a:p>
@@ -3522,13 +3191,12 @@
             <a:avLst/>
           </a:prstGeom>
           <a:noFill/>
-          <a:ln/>
         </p:spPr>
         <p:txBody>
           <a:bodyPr wrap="square" rtlCol="0" anchor="ctr"/>
           <a:lstStyle/>
           <a:p>
-            <a:pPr algn="l" indent="0" marL="0">
+            <a:pPr marL="0" indent="0" algn="l">
               <a:buNone/>
             </a:pPr>
             <a:r>
@@ -3536,11 +3204,11 @@
                 <a:solidFill>
                   <a:srgbClr val="1F2329"/>
                 </a:solidFill>
-                <a:latin typeface="微软雅黑" pitchFamily="34" charset="0"/>
-                <a:ea typeface="微软雅黑" pitchFamily="34" charset="-122"/>
-                <a:cs typeface="微软雅黑" pitchFamily="34" charset="-120"/>
-              </a:rPr>
-              <a:t>1道跟练 ＋ 1道模仿</a:t>
+                <a:latin typeface="微软雅黑" panose="020B0503020204020204" pitchFamily="34" charset="-122"/>
+                <a:ea typeface="微软雅黑" panose="020B0503020204020204" pitchFamily="34" charset="-122"/>
+                <a:cs typeface="微软雅黑" panose="020B0503020204020204" pitchFamily="34" charset="-120"/>
+              </a:rPr>
+              <a:t>函数里明明改了，外面的变量为什么没变</a:t>
             </a:r>
             <a:endParaRPr lang="en-US" sz="2800" dirty="0"/>
           </a:p>
@@ -3548,26 +3216,110 @@
       </p:sp>
       <p:sp>
         <p:nvSpPr>
-          <p:cNvPr id="5" name="Text 3"/>
-          <p:cNvSpPr/>
-          <p:nvPr/>
-        </p:nvSpPr>
-        <p:spPr>
-          <a:xfrm>
-            <a:off x="896112" y="2395728"/>
+          <p:cNvPr id="5" name="Shape 3"/>
+          <p:cNvSpPr/>
+          <p:nvPr/>
+        </p:nvSpPr>
+        <p:spPr>
+          <a:xfrm>
+            <a:off x="822960" y="2395728"/>
+            <a:ext cx="10545775" cy="1984248"/>
+          </a:xfrm>
+          <a:prstGeom prst="rect">
+            <a:avLst/>
+          </a:prstGeom>
+          <a:solidFill>
+            <a:srgbClr val="F7F9FC"/>
+          </a:solidFill>
+        </p:spPr>
+      </p:sp>
+      <p:sp>
+        <p:nvSpPr>
+          <p:cNvPr id="6" name="Shape 4"/>
+          <p:cNvSpPr/>
+          <p:nvPr/>
+        </p:nvSpPr>
+        <p:spPr>
+          <a:xfrm>
+            <a:off x="822960" y="2395728"/>
+            <a:ext cx="50292" cy="1984248"/>
+          </a:xfrm>
+          <a:prstGeom prst="rect">
+            <a:avLst/>
+          </a:prstGeom>
+          <a:solidFill>
+            <a:srgbClr val="1F4E9C"/>
+          </a:solidFill>
+        </p:spPr>
+      </p:sp>
+      <p:sp>
+        <p:nvSpPr>
+          <p:cNvPr id="7" name="Text 5"/>
+          <p:cNvSpPr/>
+          <p:nvPr/>
+        </p:nvSpPr>
+        <p:spPr>
+          <a:xfrm>
+            <a:off x="1078992" y="2505456"/>
+            <a:ext cx="10033711" cy="1764792"/>
+          </a:xfrm>
+          <a:prstGeom prst="rect">
+            <a:avLst/>
+          </a:prstGeom>
+          <a:noFill/>
+        </p:spPr>
+        <p:txBody>
+          <a:bodyPr wrap="square" rtlCol="0" anchor="t"/>
+          <a:lstStyle/>
+          <a:p>
+            <a:pPr marL="0" indent="0" algn="l">
+              <a:lnSpc>
+                <a:spcPct val="125000"/>
+              </a:lnSpc>
+              <a:buNone/>
+            </a:pPr>
+            <a:r>
+              <a:rPr lang="en-US" sz="1400" dirty="0">
+                <a:solidFill>
+                  <a:srgbClr val="1F2329"/>
+                </a:solidFill>
+                <a:latin typeface="Consolas" panose="020B0609020204030204" pitchFamily="34" charset="0"/>
+                <a:ea typeface="Consolas" panose="020B0609020204030204" pitchFamily="34" charset="-122"/>
+                <a:cs typeface="Consolas" panose="020B0609020204030204" pitchFamily="34" charset="-120"/>
+              </a:rPr>
+              <a:t>void swap(int x, int y){
+    int t = x; x = y; y = t;   // 三行交换写得没错
+}
+int a = 3, b = 5;
+swap(a, b);
+printf("%d %d", a, b);          // 还是3和5
+</a:t>
+            </a:r>
+            <a:endParaRPr lang="en-US" sz="1400" dirty="0"/>
+          </a:p>
+        </p:txBody>
+      </p:sp>
+      <p:sp>
+        <p:nvSpPr>
+          <p:cNvPr id="8" name="Text 6"/>
+          <p:cNvSpPr/>
+          <p:nvPr/>
+        </p:nvSpPr>
+        <p:spPr>
+          <a:xfrm>
+            <a:off x="896112" y="4581144"/>
             <a:ext cx="10454335" cy="397764"/>
           </a:xfrm>
           <a:prstGeom prst="rect">
             <a:avLst/>
           </a:prstGeom>
           <a:noFill/>
-          <a:ln/>
         </p:spPr>
         <p:txBody>
           <a:bodyPr wrap="square" rtlCol="0" anchor="t"/>
           <a:lstStyle/>
           <a:p>
-            <a:pPr algn="l" indent="0" marL="0">
+            <a:pPr marL="0" indent="0" algn="l">
               <a:lnSpc>
                 <a:spcPct val="115000"/>
               </a:lnSpc>
@@ -3578,13 +3330,45 @@
                 <a:solidFill>
                   <a:srgbClr val="1F4E9C"/>
                 </a:solidFill>
-                <a:latin typeface="微软雅黑" pitchFamily="34" charset="0"/>
-                <a:ea typeface="微软雅黑" pitchFamily="34" charset="-122"/>
-                <a:cs typeface="微软雅黑" pitchFamily="34" charset="-120"/>
+                <a:latin typeface="微软雅黑" panose="020B0503020204020204" pitchFamily="34" charset="-122"/>
+                <a:ea typeface="微软雅黑" panose="020B0503020204020204" pitchFamily="34" charset="-122"/>
+                <a:cs typeface="微软雅黑" panose="020B0503020204020204" pitchFamily="34" charset="-120"/>
               </a:rPr>
               <a:t>•  </a:t>
             </a:r>
-            <a:pPr algn="l" indent="0" marL="0">
+            <a:r>
+              <a:rPr lang="en-US" sz="1800" dirty="0">
+                <a:solidFill>
+                  <a:srgbClr val="000000"/>
+                </a:solidFill>
+              </a:rPr>
+              <a:t>函数里x和y确实换了，函数结束格子被栈收回，a和b全程没人碰</a:t>
+            </a:r>
+            <a:endParaRPr lang="en-US" sz="1800" dirty="0"/>
+          </a:p>
+        </p:txBody>
+      </p:sp>
+      <p:sp>
+        <p:nvSpPr>
+          <p:cNvPr id="9" name="Text 7"/>
+          <p:cNvSpPr/>
+          <p:nvPr/>
+        </p:nvSpPr>
+        <p:spPr>
+          <a:xfrm>
+            <a:off x="896112" y="5052060"/>
+            <a:ext cx="10454335" cy="397764"/>
+          </a:xfrm>
+          <a:prstGeom prst="rect">
+            <a:avLst/>
+          </a:prstGeom>
+          <a:noFill/>
+        </p:spPr>
+        <p:txBody>
+          <a:bodyPr wrap="square" rtlCol="0" anchor="t"/>
+          <a:lstStyle/>
+          <a:p>
+            <a:pPr marL="0" indent="0" algn="l">
               <a:lnSpc>
                 <a:spcPct val="115000"/>
               </a:lnSpc>
@@ -3593,191 +3377,72 @@
             <a:r>
               <a:rPr lang="en-US" sz="1800" b="1" dirty="0">
                 <a:solidFill>
+                  <a:srgbClr val="1F4E9C"/>
+                </a:solidFill>
+                <a:latin typeface="微软雅黑" panose="020B0503020204020204" pitchFamily="34" charset="-122"/>
+                <a:ea typeface="微软雅黑" panose="020B0503020204020204" pitchFamily="34" charset="-122"/>
+                <a:cs typeface="微软雅黑" panose="020B0503020204020204" pitchFamily="34" charset="-120"/>
+              </a:rPr>
+              <a:t>•  </a:t>
+            </a:r>
+            <a:r>
+              <a:rPr lang="en-US" sz="1800" dirty="0">
+                <a:solidFill>
                   <a:srgbClr val="000000"/>
                 </a:solidFill>
               </a:rPr>
-              <a:t>跟练题</a:t>
-            </a:r>
-            <a:pPr algn="l" indent="0" marL="0">
+              <a:t>基础阶段留过这个为什么，今天用上节课的栈把它讲清</a:t>
+            </a:r>
+            <a:endParaRPr lang="en-US" sz="1800" dirty="0"/>
+          </a:p>
+        </p:txBody>
+      </p:sp>
+      <p:sp>
+        <p:nvSpPr>
+          <p:cNvPr id="10" name="Text 8"/>
+          <p:cNvSpPr/>
+          <p:nvPr/>
+        </p:nvSpPr>
+        <p:spPr>
+          <a:xfrm>
+            <a:off x="896112" y="5522976"/>
+            <a:ext cx="10454335" cy="397764"/>
+          </a:xfrm>
+          <a:prstGeom prst="rect">
+            <a:avLst/>
+          </a:prstGeom>
+          <a:noFill/>
+        </p:spPr>
+        <p:txBody>
+          <a:bodyPr wrap="square" rtlCol="0" anchor="t"/>
+          <a:lstStyle/>
+          <a:p>
+            <a:pPr marL="0" indent="0" algn="l">
               <a:lnSpc>
                 <a:spcPct val="115000"/>
               </a:lnSpc>
               <a:buNone/>
             </a:pPr>
             <a:r>
+              <a:rPr lang="en-US" sz="1800" b="1" dirty="0">
+                <a:solidFill>
+                  <a:srgbClr val="1F4E9C"/>
+                </a:solidFill>
+                <a:latin typeface="微软雅黑" panose="020B0503020204020204" pitchFamily="34" charset="-122"/>
+                <a:ea typeface="微软雅黑" panose="020B0503020204020204" pitchFamily="34" charset="-122"/>
+                <a:cs typeface="微软雅黑" panose="020B0503020204020204" pitchFamily="34" charset="-120"/>
+              </a:rPr>
+              <a:t>•  </a:t>
+            </a:r>
+            <a:r>
               <a:rPr lang="en-US" sz="1800" dirty="0">
                 <a:solidFill>
                   <a:srgbClr val="000000"/>
                 </a:solidFill>
               </a:rPr>
-              <a:t>：分别用指针版和引用版写swap，各自画内存图，验证a、b真的换了</a:t>
+              <a:t>讲清之后给两种真正改得动的写法：指针传参、引用传参</a:t>
             </a:r>
             <a:endParaRPr lang="en-US" sz="1800" dirty="0"/>
-          </a:p>
-        </p:txBody>
-      </p:sp>
-      <p:sp>
-        <p:nvSpPr>
-          <p:cNvPr id="6" name="Text 4"/>
-          <p:cNvSpPr/>
-          <p:nvPr/>
-        </p:nvSpPr>
-        <p:spPr>
-          <a:xfrm>
-            <a:off x="896112" y="2866644"/>
-            <a:ext cx="10454335" cy="397764"/>
-          </a:xfrm>
-          <a:prstGeom prst="rect">
-            <a:avLst/>
-          </a:prstGeom>
-          <a:noFill/>
-          <a:ln/>
-        </p:spPr>
-        <p:txBody>
-          <a:bodyPr wrap="square" rtlCol="0" anchor="t"/>
-          <a:lstStyle/>
-          <a:p>
-            <a:pPr algn="l" indent="0" marL="0">
-              <a:lnSpc>
-                <a:spcPct val="115000"/>
-              </a:lnSpc>
-              <a:buNone/>
-            </a:pPr>
-            <a:r>
-              <a:rPr lang="en-US" sz="1800" b="1" dirty="0">
-                <a:solidFill>
-                  <a:srgbClr val="1F4E9C"/>
-                </a:solidFill>
-                <a:latin typeface="微软雅黑" pitchFamily="34" charset="0"/>
-                <a:ea typeface="微软雅黑" pitchFamily="34" charset="-122"/>
-                <a:cs typeface="微软雅黑" pitchFamily="34" charset="-120"/>
-              </a:rPr>
-              <a:t>•  </a:t>
-            </a:r>
-            <a:pPr algn="l" indent="0" marL="0">
-              <a:lnSpc>
-                <a:spcPct val="115000"/>
-              </a:lnSpc>
-              <a:buNone/>
-            </a:pPr>
-            <a:r>
-              <a:rPr lang="en-US" sz="1800" b="1" dirty="0">
-                <a:solidFill>
-                  <a:srgbClr val="000000"/>
-                </a:solidFill>
-              </a:rPr>
-              <a:t>模仿题</a:t>
-            </a:r>
-            <a:pPr algn="l" indent="0" marL="0">
-              <a:lnSpc>
-                <a:spcPct val="115000"/>
-              </a:lnSpc>
-              <a:buNone/>
-            </a:pPr>
-            <a:r>
-              <a:rPr lang="en-US" sz="1800" dirty="0">
-                <a:solidFill>
-                  <a:srgbClr val="000000"/>
-                </a:solidFill>
-              </a:rPr>
-              <a:t>：写一个increment函数，用引用传参把外面的数加1，调用后打印验证</a:t>
-            </a:r>
-            <a:endParaRPr lang="en-US" sz="1800" dirty="0"/>
-          </a:p>
-        </p:txBody>
-      </p:sp>
-      <p:sp>
-        <p:nvSpPr>
-          <p:cNvPr id="7" name="Text 5"/>
-          <p:cNvSpPr/>
-          <p:nvPr/>
-        </p:nvSpPr>
-        <p:spPr>
-          <a:xfrm>
-            <a:off x="896112" y="3337560"/>
-            <a:ext cx="10454335" cy="397764"/>
-          </a:xfrm>
-          <a:prstGeom prst="rect">
-            <a:avLst/>
-          </a:prstGeom>
-          <a:noFill/>
-          <a:ln/>
-        </p:spPr>
-        <p:txBody>
-          <a:bodyPr wrap="square" rtlCol="0" anchor="t"/>
-          <a:lstStyle/>
-          <a:p>
-            <a:pPr algn="l" indent="0" marL="0">
-              <a:lnSpc>
-                <a:spcPct val="115000"/>
-              </a:lnSpc>
-              <a:buNone/>
-            </a:pPr>
-            <a:r>
-              <a:rPr lang="en-US" sz="1800" b="1" dirty="0">
-                <a:solidFill>
-                  <a:srgbClr val="1F4E9C"/>
-                </a:solidFill>
-                <a:latin typeface="微软雅黑" pitchFamily="34" charset="0"/>
-                <a:ea typeface="微软雅黑" pitchFamily="34" charset="-122"/>
-                <a:cs typeface="微软雅黑" pitchFamily="34" charset="-120"/>
-              </a:rPr>
-              <a:t>•  </a:t>
-            </a:r>
-            <a:pPr algn="l" indent="0" marL="0">
-              <a:lnSpc>
-                <a:spcPct val="115000"/>
-              </a:lnSpc>
-              <a:buNone/>
-            </a:pPr>
-            <a:r>
-              <a:rPr lang="en-US" sz="1800" dirty="0">
-                <a:solidFill>
-                  <a:srgbClr val="000000"/>
-                </a:solidFill>
-              </a:rPr>
-              <a:t>要求：合上资料默写三种传参的函数头；纸上画图后再上机</a:t>
-            </a:r>
-            <a:endParaRPr lang="en-US" sz="1800" dirty="0"/>
-          </a:p>
-        </p:txBody>
-      </p:sp>
-      <p:sp>
-        <p:nvSpPr>
-          <p:cNvPr id="8" name="Text 6"/>
-          <p:cNvSpPr/>
-          <p:nvPr/>
-        </p:nvSpPr>
-        <p:spPr>
-          <a:xfrm>
-            <a:off x="822960" y="3899916"/>
-            <a:ext cx="10545775" cy="358902"/>
-          </a:xfrm>
-          <a:prstGeom prst="rect">
-            <a:avLst/>
-          </a:prstGeom>
-          <a:noFill/>
-          <a:ln/>
-        </p:spPr>
-        <p:txBody>
-          <a:bodyPr wrap="square" rtlCol="0" anchor="t"/>
-          <a:lstStyle/>
-          <a:p>
-            <a:pPr algn="l" indent="0" marL="0">
-              <a:buNone/>
-            </a:pPr>
-            <a:r>
-              <a:rPr lang="en-US" sz="1500" dirty="0">
-                <a:solidFill>
-                  <a:srgbClr val="8A9099"/>
-                </a:solidFill>
-                <a:latin typeface="微软雅黑" pitchFamily="34" charset="0"/>
-                <a:ea typeface="微软雅黑" pitchFamily="34" charset="-122"/>
-                <a:cs typeface="微软雅黑" pitchFamily="34" charset="-120"/>
-              </a:rPr>
-              <a:t>参考答案在本PPT最后两页，课后自行对照</a:t>
-            </a:r>
-            <a:endParaRPr lang="en-US" sz="1500" dirty="0"/>
           </a:p>
         </p:txBody>
       </p:sp>
@@ -3789,9 +3454,9 @@
 </p:sld>
 </file>
 
-<file path=ppt/slides/slide14.xml><?xml version="1.0" encoding="utf-8"?>
+<file path=ppt/slides/slide3.xml><?xml version="1.0" encoding="utf-8"?>
 <p:sld xmlns:a="http://schemas.openxmlformats.org/drawingml/2006/main" xmlns:r="http://schemas.openxmlformats.org/officeDocument/2006/relationships" xmlns:p="http://schemas.openxmlformats.org/presentationml/2006/main">
-  <p:cSld name="Slide 14">
+  <p:cSld>
     <p:bg>
       <p:bgPr>
         <a:blipFill dpi="0" rotWithShape="1">
@@ -3835,13 +3500,12 @@
             <a:avLst/>
           </a:prstGeom>
           <a:noFill/>
-          <a:ln/>
         </p:spPr>
         <p:txBody>
           <a:bodyPr wrap="square" rtlCol="0" anchor="ctr"/>
           <a:lstStyle/>
           <a:p>
-            <a:pPr algn="r" indent="0" marL="0">
+            <a:pPr marL="0" indent="0" algn="r">
               <a:buNone/>
             </a:pPr>
             <a:r>
@@ -3849,11 +3513,11 @@
                 <a:solidFill>
                   <a:srgbClr val="8A9099"/>
                 </a:solidFill>
-                <a:latin typeface="微软雅黑" pitchFamily="34" charset="0"/>
-                <a:ea typeface="微软雅黑" pitchFamily="34" charset="-122"/>
-                <a:cs typeface="微软雅黑" pitchFamily="34" charset="-120"/>
-              </a:rPr>
-              <a:t>14 / 15</a:t>
+                <a:latin typeface="微软雅黑" panose="020B0503020204020204" pitchFamily="34" charset="-122"/>
+                <a:ea typeface="微软雅黑" panose="020B0503020204020204" pitchFamily="34" charset="-122"/>
+                <a:cs typeface="微软雅黑" panose="020B0503020204020204" pitchFamily="34" charset="-120"/>
+              </a:rPr>
+              <a:t>3 / 12</a:t>
             </a:r>
             <a:endParaRPr lang="en-US" sz="1000" dirty="0"/>
           </a:p>
@@ -3874,13 +3538,12 @@
             <a:avLst/>
           </a:prstGeom>
           <a:noFill/>
-          <a:ln/>
         </p:spPr>
         <p:txBody>
           <a:bodyPr wrap="square" rtlCol="0" anchor="ctr"/>
           <a:lstStyle/>
           <a:p>
-            <a:pPr algn="l" indent="0" marL="0">
+            <a:pPr marL="0" indent="0" algn="l">
               <a:buNone/>
             </a:pPr>
             <a:r>
@@ -3888,11 +3551,11 @@
                 <a:solidFill>
                   <a:srgbClr val="1F4E9C"/>
                 </a:solidFill>
-                <a:latin typeface="微软雅黑" pitchFamily="34" charset="0"/>
-                <a:ea typeface="微软雅黑" pitchFamily="34" charset="-122"/>
-                <a:cs typeface="微软雅黑" pitchFamily="34" charset="-120"/>
-              </a:rPr>
-              <a:t>参考答案 · 跟练题</a:t>
+                <a:latin typeface="微软雅黑" panose="020B0503020204020204" pitchFamily="34" charset="-122"/>
+                <a:ea typeface="微软雅黑" panose="020B0503020204020204" pitchFamily="34" charset="-122"/>
+                <a:cs typeface="微软雅黑" panose="020B0503020204020204" pitchFamily="34" charset="-120"/>
+              </a:rPr>
+              <a:t>值传递</a:t>
             </a:r>
             <a:endParaRPr lang="en-US" sz="1400" dirty="0"/>
           </a:p>
@@ -3913,13 +3576,12 @@
             <a:avLst/>
           </a:prstGeom>
           <a:noFill/>
-          <a:ln/>
         </p:spPr>
         <p:txBody>
           <a:bodyPr wrap="square" rtlCol="0" anchor="ctr"/>
           <a:lstStyle/>
           <a:p>
-            <a:pPr algn="l" indent="0" marL="0">
+            <a:pPr marL="0" indent="0" algn="l">
               <a:buNone/>
             </a:pPr>
             <a:r>
@@ -3927,11 +3589,11 @@
                 <a:solidFill>
                   <a:srgbClr val="1F2329"/>
                 </a:solidFill>
-                <a:latin typeface="微软雅黑" pitchFamily="34" charset="0"/>
-                <a:ea typeface="微软雅黑" pitchFamily="34" charset="-122"/>
-                <a:cs typeface="微软雅黑" pitchFamily="34" charset="-120"/>
-              </a:rPr>
-              <a:t>跟练题参考答案（自行对照）</a:t>
+                <a:latin typeface="微软雅黑" panose="020B0503020204020204" pitchFamily="34" charset="-122"/>
+                <a:ea typeface="微软雅黑" panose="020B0503020204020204" pitchFamily="34" charset="-122"/>
+                <a:cs typeface="微软雅黑" panose="020B0503020204020204" pitchFamily="34" charset="-120"/>
+              </a:rPr>
+              <a:t>参数收到的是值的副本，不是变量本身</a:t>
             </a:r>
             <a:endParaRPr lang="en-US" sz="2800" dirty="0"/>
           </a:p>
@@ -3939,205 +3601,284 @@
       </p:sp>
       <p:sp>
         <p:nvSpPr>
-          <p:cNvPr id="5" name="Shape 3"/>
-          <p:cNvSpPr/>
-          <p:nvPr/>
-        </p:nvSpPr>
-        <p:spPr>
-          <a:xfrm>
-            <a:off x="822960" y="2395728"/>
-            <a:ext cx="10545775" cy="2647370"/>
-          </a:xfrm>
-          <a:prstGeom prst="rect">
-            <a:avLst/>
-          </a:prstGeom>
-          <a:solidFill>
-            <a:srgbClr val="F7F9FC"/>
-          </a:solidFill>
-          <a:ln/>
-        </p:spPr>
-      </p:sp>
-      <p:sp>
-        <p:nvSpPr>
-          <p:cNvPr id="6" name="Shape 4"/>
-          <p:cNvSpPr/>
-          <p:nvPr/>
-        </p:nvSpPr>
-        <p:spPr>
-          <a:xfrm>
-            <a:off x="822960" y="2395728"/>
-            <a:ext cx="50292" cy="2647370"/>
-          </a:xfrm>
-          <a:prstGeom prst="rect">
-            <a:avLst/>
-          </a:prstGeom>
-          <a:solidFill>
-            <a:srgbClr val="1F4E9C"/>
-          </a:solidFill>
-          <a:ln/>
-        </p:spPr>
-      </p:sp>
-      <p:sp>
-        <p:nvSpPr>
-          <p:cNvPr id="7" name="Text 5"/>
-          <p:cNvSpPr/>
-          <p:nvPr/>
-        </p:nvSpPr>
-        <p:spPr>
-          <a:xfrm>
-            <a:off x="1078992" y="2505456"/>
-            <a:ext cx="10033711" cy="2427914"/>
-          </a:xfrm>
-          <a:prstGeom prst="rect">
-            <a:avLst/>
-          </a:prstGeom>
-          <a:noFill/>
-          <a:ln/>
+          <p:cNvPr id="5" name="Text 3"/>
+          <p:cNvSpPr/>
+          <p:nvPr/>
+        </p:nvSpPr>
+        <p:spPr>
+          <a:xfrm>
+            <a:off x="896112" y="2395728"/>
+            <a:ext cx="10454335" cy="397764"/>
+          </a:xfrm>
+          <a:prstGeom prst="rect">
+            <a:avLst/>
+          </a:prstGeom>
+          <a:noFill/>
         </p:spPr>
         <p:txBody>
           <a:bodyPr wrap="square" rtlCol="0" anchor="t"/>
           <a:lstStyle/>
           <a:p>
-            <a:pPr algn="l" indent="0" marL="0">
-              <a:lnSpc>
-                <a:spcPct val="125000"/>
-              </a:lnSpc>
-              <a:buNone/>
-            </a:pPr>
-            <a:r>
-              <a:rPr lang="en-US" sz="1200" dirty="0">
-                <a:solidFill>
-                  <a:srgbClr val="1F2329"/>
-                </a:solidFill>
-                <a:latin typeface="Consolas" pitchFamily="34" charset="0"/>
-                <a:ea typeface="Consolas" pitchFamily="34" charset="-122"/>
-                <a:cs typeface="Consolas" pitchFamily="34" charset="-120"/>
-              </a:rPr>
-              <a:t>// 指针版与引用版swap
-void swapPtr(int *px, int *py){
-    int t = *px; *px = *py; *py = t;
-}
-void swapRef(int &amp;x, int &amp;y){
-    int t = x; x = y; y = t;
-}
-int a = 3, b = 5;
-swapPtr(&amp;a, &amp;b);    // a=5 b=3
-swapRef(a, b);      // a=3 b=5
-</a:t>
-            </a:r>
-            <a:endParaRPr lang="en-US" sz="1200" dirty="0"/>
-          </a:p>
-        </p:txBody>
-      </p:sp>
-      <p:sp>
-        <p:nvSpPr>
-          <p:cNvPr id="8" name="Text 6"/>
-          <p:cNvSpPr/>
-          <p:nvPr/>
-        </p:nvSpPr>
-        <p:spPr>
-          <a:xfrm>
-            <a:off x="896112" y="5244266"/>
-            <a:ext cx="10454335" cy="359664"/>
-          </a:xfrm>
-          <a:prstGeom prst="rect">
-            <a:avLst/>
-          </a:prstGeom>
-          <a:noFill/>
-          <a:ln/>
-        </p:spPr>
-        <p:txBody>
-          <a:bodyPr wrap="square" rtlCol="0" anchor="t"/>
-          <a:lstStyle/>
-          <a:p>
-            <a:pPr algn="l" indent="0" marL="0">
+            <a:pPr marL="0" indent="0" algn="l">
               <a:lnSpc>
                 <a:spcPct val="115000"/>
               </a:lnSpc>
               <a:buNone/>
             </a:pPr>
             <a:r>
-              <a:rPr lang="en-US" sz="1600" b="1" dirty="0">
+              <a:rPr lang="en-US" sz="1800" b="1" dirty="0">
                 <a:solidFill>
                   <a:srgbClr val="1F4E9C"/>
                 </a:solidFill>
-                <a:latin typeface="微软雅黑" pitchFamily="34" charset="0"/>
-                <a:ea typeface="微软雅黑" pitchFamily="34" charset="-122"/>
-                <a:cs typeface="微软雅黑" pitchFamily="34" charset="-120"/>
+                <a:latin typeface="微软雅黑" panose="020B0503020204020204" pitchFamily="34" charset="-122"/>
+                <a:ea typeface="微软雅黑" panose="020B0503020204020204" pitchFamily="34" charset="-122"/>
+                <a:cs typeface="微软雅黑" panose="020B0503020204020204" pitchFamily="34" charset="-120"/>
               </a:rPr>
               <a:t>•  </a:t>
             </a:r>
-            <a:pPr algn="l" indent="0" marL="0">
+            <a:r>
+              <a:rPr lang="en-US" sz="1800" dirty="0">
+                <a:solidFill>
+                  <a:srgbClr val="000000"/>
+                </a:solidFill>
+              </a:rPr>
+              <a:t>调用那一瞬间，a把值3复印一份交给x，b把值5复印一份交给y</a:t>
+            </a:r>
+            <a:endParaRPr lang="en-US" sz="1800" dirty="0"/>
+          </a:p>
+        </p:txBody>
+      </p:sp>
+      <p:sp>
+        <p:nvSpPr>
+          <p:cNvPr id="6" name="Text 4"/>
+          <p:cNvSpPr/>
+          <p:nvPr/>
+        </p:nvSpPr>
+        <p:spPr>
+          <a:xfrm>
+            <a:off x="896112" y="2866644"/>
+            <a:ext cx="10454335" cy="397764"/>
+          </a:xfrm>
+          <a:prstGeom prst="rect">
+            <a:avLst/>
+          </a:prstGeom>
+          <a:noFill/>
+        </p:spPr>
+        <p:txBody>
+          <a:bodyPr wrap="square" rtlCol="0" anchor="t"/>
+          <a:lstStyle/>
+          <a:p>
+            <a:pPr marL="0" indent="0" algn="l">
               <a:lnSpc>
                 <a:spcPct val="115000"/>
               </a:lnSpc>
               <a:buNone/>
             </a:pPr>
             <a:r>
-              <a:rPr lang="en-US" sz="1600" dirty="0">
+              <a:rPr lang="en-US" sz="1800" b="1" dirty="0">
+                <a:solidFill>
+                  <a:srgbClr val="1F4E9C"/>
+                </a:solidFill>
+                <a:latin typeface="微软雅黑" panose="020B0503020204020204" pitchFamily="34" charset="-122"/>
+                <a:ea typeface="微软雅黑" panose="020B0503020204020204" pitchFamily="34" charset="-122"/>
+                <a:cs typeface="微软雅黑" panose="020B0503020204020204" pitchFamily="34" charset="-120"/>
+              </a:rPr>
+              <a:t>•  </a:t>
+            </a:r>
+            <a:r>
+              <a:rPr lang="en-US" sz="1800" dirty="0">
                 <a:solidFill>
                   <a:srgbClr val="000000"/>
                 </a:solidFill>
               </a:rPr>
-              <a:t>指针版图：px、py的箭头跨出函数框指向a、b，*px改的就是a的格子</a:t>
-            </a:r>
-            <a:endParaRPr lang="en-US" sz="1600" dirty="0"/>
-          </a:p>
-        </p:txBody>
-      </p:sp>
-      <p:sp>
-        <p:nvSpPr>
-          <p:cNvPr id="9" name="Text 7"/>
-          <p:cNvSpPr/>
-          <p:nvPr/>
-        </p:nvSpPr>
-        <p:spPr>
-          <a:xfrm>
-            <a:off x="896112" y="5677082"/>
-            <a:ext cx="10454335" cy="359664"/>
-          </a:xfrm>
-          <a:prstGeom prst="rect">
-            <a:avLst/>
-          </a:prstGeom>
-          <a:noFill/>
-          <a:ln/>
+              <a:t>x、y是swap自己的局部变量，住栈上的新格子，和a、b的格子是四个</a:t>
+            </a:r>
+            <a:endParaRPr lang="en-US" sz="1800" dirty="0"/>
+          </a:p>
+        </p:txBody>
+      </p:sp>
+      <p:sp>
+        <p:nvSpPr>
+          <p:cNvPr id="7" name="Text 5"/>
+          <p:cNvSpPr/>
+          <p:nvPr/>
+        </p:nvSpPr>
+        <p:spPr>
+          <a:xfrm>
+            <a:off x="896112" y="3337560"/>
+            <a:ext cx="10454335" cy="397764"/>
+          </a:xfrm>
+          <a:prstGeom prst="rect">
+            <a:avLst/>
+          </a:prstGeom>
+          <a:noFill/>
         </p:spPr>
         <p:txBody>
           <a:bodyPr wrap="square" rtlCol="0" anchor="t"/>
           <a:lstStyle/>
           <a:p>
-            <a:pPr algn="l" indent="0" marL="0">
+            <a:pPr marL="0" indent="0" algn="l">
               <a:lnSpc>
                 <a:spcPct val="115000"/>
               </a:lnSpc>
               <a:buNone/>
             </a:pPr>
             <a:r>
-              <a:rPr lang="en-US" sz="1600" b="1" dirty="0">
+              <a:rPr lang="en-US" sz="1800" b="1" dirty="0">
                 <a:solidFill>
                   <a:srgbClr val="1F4E9C"/>
                 </a:solidFill>
-                <a:latin typeface="微软雅黑" pitchFamily="34" charset="0"/>
-                <a:ea typeface="微软雅黑" pitchFamily="34" charset="-122"/>
-                <a:cs typeface="微软雅黑" pitchFamily="34" charset="-120"/>
+                <a:latin typeface="微软雅黑" panose="020B0503020204020204" pitchFamily="34" charset="-122"/>
+                <a:ea typeface="微软雅黑" panose="020B0503020204020204" pitchFamily="34" charset="-122"/>
+                <a:cs typeface="微软雅黑" panose="020B0503020204020204" pitchFamily="34" charset="-120"/>
               </a:rPr>
               <a:t>•  </a:t>
             </a:r>
-            <a:pPr algn="l" indent="0" marL="0">
+            <a:r>
+              <a:rPr lang="en-US" sz="1800" dirty="0">
+                <a:solidFill>
+                  <a:srgbClr val="000000"/>
+                </a:solidFill>
+              </a:rPr>
+              <a:t>这个机制叫值传递，是C语言传参的默认行为</a:t>
+            </a:r>
+            <a:endParaRPr lang="en-US" sz="1800" dirty="0"/>
+          </a:p>
+        </p:txBody>
+      </p:sp>
+      <p:sp>
+        <p:nvSpPr>
+          <p:cNvPr id="8" name="Text 6"/>
+          <p:cNvSpPr/>
+          <p:nvPr/>
+        </p:nvSpPr>
+        <p:spPr>
+          <a:xfrm>
+            <a:off x="896112" y="3808476"/>
+            <a:ext cx="10454335" cy="397764"/>
+          </a:xfrm>
+          <a:prstGeom prst="rect">
+            <a:avLst/>
+          </a:prstGeom>
+          <a:noFill/>
+        </p:spPr>
+        <p:txBody>
+          <a:bodyPr wrap="square" rtlCol="0" anchor="t"/>
+          <a:lstStyle/>
+          <a:p>
+            <a:pPr marL="0" indent="0" algn="l">
               <a:lnSpc>
                 <a:spcPct val="115000"/>
               </a:lnSpc>
               <a:buNone/>
             </a:pPr>
             <a:r>
-              <a:rPr lang="en-US" sz="1600" dirty="0">
+              <a:rPr lang="en-US" sz="1800" b="1" dirty="0">
+                <a:solidFill>
+                  <a:srgbClr val="1F4E9C"/>
+                </a:solidFill>
+                <a:latin typeface="微软雅黑" panose="020B0503020204020204" pitchFamily="34" charset="-122"/>
+                <a:ea typeface="微软雅黑" panose="020B0503020204020204" pitchFamily="34" charset="-122"/>
+                <a:cs typeface="微软雅黑" panose="020B0503020204020204" pitchFamily="34" charset="-120"/>
+              </a:rPr>
+              <a:t>•  </a:t>
+            </a:r>
+            <a:r>
+              <a:rPr lang="en-US" sz="1800" dirty="0">
                 <a:solidFill>
                   <a:srgbClr val="000000"/>
                 </a:solidFill>
               </a:rPr>
-              <a:t>引用版图：x直接标成a的别名，没有新格子</a:t>
-            </a:r>
-            <a:endParaRPr lang="en-US" sz="1600" dirty="0"/>
+              <a:t>术语：交出去的a、b叫实参，函数头上接收的x、y叫形参</a:t>
+            </a:r>
+            <a:endParaRPr lang="en-US" sz="1800" dirty="0"/>
+          </a:p>
+        </p:txBody>
+      </p:sp>
+      <p:sp>
+        <p:nvSpPr>
+          <p:cNvPr id="9" name="Text 7"/>
+          <p:cNvSpPr/>
+          <p:nvPr/>
+        </p:nvSpPr>
+        <p:spPr>
+          <a:xfrm>
+            <a:off x="896112" y="4279392"/>
+            <a:ext cx="10454335" cy="397764"/>
+          </a:xfrm>
+          <a:prstGeom prst="rect">
+            <a:avLst/>
+          </a:prstGeom>
+          <a:noFill/>
+        </p:spPr>
+        <p:txBody>
+          <a:bodyPr wrap="square" rtlCol="0" anchor="t"/>
+          <a:lstStyle/>
+          <a:p>
+            <a:pPr marL="0" indent="0" algn="l">
+              <a:lnSpc>
+                <a:spcPct val="115000"/>
+              </a:lnSpc>
+              <a:buNone/>
+            </a:pPr>
+            <a:r>
+              <a:rPr lang="en-US" sz="1800" b="1" dirty="0">
+                <a:solidFill>
+                  <a:srgbClr val="1F4E9C"/>
+                </a:solidFill>
+                <a:latin typeface="微软雅黑" panose="020B0503020204020204" pitchFamily="34" charset="-122"/>
+                <a:ea typeface="微软雅黑" panose="020B0503020204020204" pitchFamily="34" charset="-122"/>
+                <a:cs typeface="微软雅黑" panose="020B0503020204020204" pitchFamily="34" charset="-120"/>
+              </a:rPr>
+              <a:t>•  </a:t>
+            </a:r>
+            <a:r>
+              <a:rPr lang="en-US" sz="1800" dirty="0">
+                <a:solidFill>
+                  <a:srgbClr val="000000"/>
+                </a:solidFill>
+              </a:rPr>
+              <a:t>值传递有正当用途：只读不改的函数用它最简单，结果用return递出来</a:t>
+            </a:r>
+            <a:endParaRPr lang="en-US" sz="1800" dirty="0"/>
+          </a:p>
+        </p:txBody>
+      </p:sp>
+      <p:sp>
+        <p:nvSpPr>
+          <p:cNvPr id="10" name="Text 8"/>
+          <p:cNvSpPr/>
+          <p:nvPr/>
+        </p:nvSpPr>
+        <p:spPr>
+          <a:xfrm>
+            <a:off x="822960" y="4841748"/>
+            <a:ext cx="10545775" cy="358902"/>
+          </a:xfrm>
+          <a:prstGeom prst="rect">
+            <a:avLst/>
+          </a:prstGeom>
+          <a:noFill/>
+        </p:spPr>
+        <p:txBody>
+          <a:bodyPr wrap="square" rtlCol="0" anchor="t"/>
+          <a:lstStyle/>
+          <a:p>
+            <a:pPr marL="0" indent="0" algn="l">
+              <a:buNone/>
+            </a:pPr>
+            <a:r>
+              <a:rPr lang="en-US" sz="1500" dirty="0">
+                <a:solidFill>
+                  <a:srgbClr val="8A9099"/>
+                </a:solidFill>
+                <a:latin typeface="微软雅黑" panose="020B0503020204020204" pitchFamily="34" charset="-122"/>
+                <a:ea typeface="微软雅黑" panose="020B0503020204020204" pitchFamily="34" charset="-122"/>
+                <a:cs typeface="微软雅黑" panose="020B0503020204020204" pitchFamily="34" charset="-120"/>
+              </a:rPr>
+              <a:t>副作用要显式地传地址或引用才会发生，不会默认出现</a:t>
+            </a:r>
+            <a:endParaRPr lang="en-US" sz="1500" dirty="0"/>
           </a:p>
         </p:txBody>
       </p:sp>
@@ -4149,9 +3890,9 @@
 </p:sld>
 </file>
 
-<file path=ppt/slides/slide15.xml><?xml version="1.0" encoding="utf-8"?>
+<file path=ppt/slides/slide4.xml><?xml version="1.0" encoding="utf-8"?>
 <p:sld xmlns:a="http://schemas.openxmlformats.org/drawingml/2006/main" xmlns:r="http://schemas.openxmlformats.org/officeDocument/2006/relationships" xmlns:p="http://schemas.openxmlformats.org/presentationml/2006/main">
-  <p:cSld name="Slide 15">
+  <p:cSld>
     <p:bg>
       <p:bgPr>
         <a:blipFill dpi="0" rotWithShape="1">
@@ -4195,13 +3936,12 @@
             <a:avLst/>
           </a:prstGeom>
           <a:noFill/>
-          <a:ln/>
         </p:spPr>
         <p:txBody>
           <a:bodyPr wrap="square" rtlCol="0" anchor="ctr"/>
           <a:lstStyle/>
           <a:p>
-            <a:pPr algn="r" indent="0" marL="0">
+            <a:pPr marL="0" indent="0" algn="r">
               <a:buNone/>
             </a:pPr>
             <a:r>
@@ -4209,11 +3949,11 @@
                 <a:solidFill>
                   <a:srgbClr val="8A9099"/>
                 </a:solidFill>
-                <a:latin typeface="微软雅黑" pitchFamily="34" charset="0"/>
-                <a:ea typeface="微软雅黑" pitchFamily="34" charset="-122"/>
-                <a:cs typeface="微软雅黑" pitchFamily="34" charset="-120"/>
-              </a:rPr>
-              <a:t>15 / 15</a:t>
+                <a:latin typeface="微软雅黑" panose="020B0503020204020204" pitchFamily="34" charset="-122"/>
+                <a:ea typeface="微软雅黑" panose="020B0503020204020204" pitchFamily="34" charset="-122"/>
+                <a:cs typeface="微软雅黑" panose="020B0503020204020204" pitchFamily="34" charset="-120"/>
+              </a:rPr>
+              <a:t>4 / 12</a:t>
             </a:r>
             <a:endParaRPr lang="en-US" sz="1000" dirty="0"/>
           </a:p>
@@ -4234,13 +3974,12 @@
             <a:avLst/>
           </a:prstGeom>
           <a:noFill/>
-          <a:ln/>
         </p:spPr>
         <p:txBody>
           <a:bodyPr wrap="square" rtlCol="0" anchor="ctr"/>
           <a:lstStyle/>
           <a:p>
-            <a:pPr algn="l" indent="0" marL="0">
+            <a:pPr marL="0" indent="0" algn="l">
               <a:buNone/>
             </a:pPr>
             <a:r>
@@ -4248,11 +3987,11 @@
                 <a:solidFill>
                   <a:srgbClr val="1F4E9C"/>
                 </a:solidFill>
-                <a:latin typeface="微软雅黑" pitchFamily="34" charset="0"/>
-                <a:ea typeface="微软雅黑" pitchFamily="34" charset="-122"/>
-                <a:cs typeface="微软雅黑" pitchFamily="34" charset="-120"/>
-              </a:rPr>
-              <a:t>参考答案 · 模仿题</a:t>
+                <a:latin typeface="微软雅黑" panose="020B0503020204020204" pitchFamily="34" charset="-122"/>
+                <a:ea typeface="微软雅黑" panose="020B0503020204020204" pitchFamily="34" charset="-122"/>
+                <a:cs typeface="微软雅黑" panose="020B0503020204020204" pitchFamily="34" charset="-120"/>
+              </a:rPr>
+              <a:t>解法一</a:t>
             </a:r>
             <a:endParaRPr lang="en-US" sz="1400" dirty="0"/>
           </a:p>
@@ -4273,13 +4012,12 @@
             <a:avLst/>
           </a:prstGeom>
           <a:noFill/>
-          <a:ln/>
         </p:spPr>
         <p:txBody>
           <a:bodyPr wrap="square" rtlCol="0" anchor="ctr"/>
           <a:lstStyle/>
           <a:p>
-            <a:pPr algn="l" indent="0" marL="0">
+            <a:pPr marL="0" indent="0" algn="l">
               <a:buNone/>
             </a:pPr>
             <a:r>
@@ -4287,11 +4025,11 @@
                 <a:solidFill>
                   <a:srgbClr val="1F2329"/>
                 </a:solidFill>
-                <a:latin typeface="微软雅黑" pitchFamily="34" charset="0"/>
-                <a:ea typeface="微软雅黑" pitchFamily="34" charset="-122"/>
-                <a:cs typeface="微软雅黑" pitchFamily="34" charset="-120"/>
-              </a:rPr>
-              <a:t>模仿题参考答案（自行对照）</a:t>
+                <a:latin typeface="微软雅黑" panose="020B0503020204020204" pitchFamily="34" charset="-122"/>
+                <a:ea typeface="微软雅黑" panose="020B0503020204020204" pitchFamily="34" charset="-122"/>
+                <a:cs typeface="微软雅黑" panose="020B0503020204020204" pitchFamily="34" charset="-120"/>
+              </a:rPr>
+              <a:t>指针传参：把地址交进去，顺着地址改</a:t>
             </a:r>
             <a:endParaRPr lang="en-US" sz="2800" dirty="0"/>
           </a:p>
@@ -4306,7 +4044,7 @@
         <p:spPr>
           <a:xfrm>
             <a:off x="822960" y="2395728"/>
-            <a:ext cx="10545775" cy="1746504"/>
+            <a:ext cx="10545775" cy="1984248"/>
           </a:xfrm>
           <a:prstGeom prst="rect">
             <a:avLst/>
@@ -4314,7 +4052,6 @@
           <a:solidFill>
             <a:srgbClr val="F7F9FC"/>
           </a:solidFill>
-          <a:ln/>
         </p:spPr>
       </p:sp>
       <p:sp>
@@ -4326,7 +4063,7 @@
         <p:spPr>
           <a:xfrm>
             <a:off x="822960" y="2395728"/>
-            <a:ext cx="50292" cy="1746504"/>
+            <a:ext cx="50292" cy="1984248"/>
           </a:xfrm>
           <a:prstGeom prst="rect">
             <a:avLst/>
@@ -4334,7 +4071,6 @@
           <a:solidFill>
             <a:srgbClr val="1F4E9C"/>
           </a:solidFill>
-          <a:ln/>
         </p:spPr>
       </p:sp>
       <p:sp>
@@ -4346,19 +4082,18 @@
         <p:spPr>
           <a:xfrm>
             <a:off x="1078992" y="2505456"/>
-            <a:ext cx="10033711" cy="1527048"/>
-          </a:xfrm>
-          <a:prstGeom prst="rect">
-            <a:avLst/>
-          </a:prstGeom>
-          <a:noFill/>
-          <a:ln/>
+            <a:ext cx="10033711" cy="1764792"/>
+          </a:xfrm>
+          <a:prstGeom prst="rect">
+            <a:avLst/>
+          </a:prstGeom>
+          <a:noFill/>
         </p:spPr>
         <p:txBody>
           <a:bodyPr wrap="square" rtlCol="0" anchor="t"/>
           <a:lstStyle/>
           <a:p>
-            <a:pPr algn="l" indent="0" marL="0">
+            <a:pPr marL="0" indent="0" algn="l">
               <a:lnSpc>
                 <a:spcPct val="125000"/>
               </a:lnSpc>
@@ -4369,15 +4104,16 @@
                 <a:solidFill>
                   <a:srgbClr val="1F2329"/>
                 </a:solidFill>
-                <a:latin typeface="Consolas" pitchFamily="34" charset="0"/>
-                <a:ea typeface="Consolas" pitchFamily="34" charset="-122"/>
-                <a:cs typeface="Consolas" pitchFamily="34" charset="-120"/>
-              </a:rPr>
-              <a:t>// 引用传参
-void increment(int &amp;n){ n = n + 1; }
-int n = 10;
-increment(n);
-printf("%d\n", n);   // 11
+                <a:latin typeface="Consolas" panose="020B0609020204030204" pitchFamily="34" charset="0"/>
+                <a:ea typeface="Consolas" panose="020B0609020204030204" pitchFamily="34" charset="-122"/>
+                <a:cs typeface="Consolas" panose="020B0609020204030204" pitchFamily="34" charset="-120"/>
+              </a:rPr>
+              <a:t>void swap(int *px, int *py){
+    int t = *px;
+    *px = *py;
+    *py = t;
+}
+swap(&amp;a, &amp;b);        // 交出去的是a和b的地址
 </a:t>
             </a:r>
             <a:endParaRPr lang="en-US" sz="1400" dirty="0"/>
@@ -4392,20 +4128,19 @@
         </p:nvSpPr>
         <p:spPr>
           <a:xfrm>
-            <a:off x="896112" y="4343400"/>
+            <a:off x="896112" y="4581144"/>
             <a:ext cx="10454335" cy="397764"/>
           </a:xfrm>
           <a:prstGeom prst="rect">
             <a:avLst/>
           </a:prstGeom>
           <a:noFill/>
-          <a:ln/>
         </p:spPr>
         <p:txBody>
           <a:bodyPr wrap="square" rtlCol="0" anchor="t"/>
           <a:lstStyle/>
           <a:p>
-            <a:pPr algn="l" indent="0" marL="0">
+            <a:pPr marL="0" indent="0" algn="l">
               <a:lnSpc>
                 <a:spcPct val="115000"/>
               </a:lnSpc>
@@ -4416,25 +4151,68 @@
                 <a:solidFill>
                   <a:srgbClr val="1F4E9C"/>
                 </a:solidFill>
-                <a:latin typeface="微软雅黑" pitchFamily="34" charset="0"/>
-                <a:ea typeface="微软雅黑" pitchFamily="34" charset="-122"/>
-                <a:cs typeface="微软雅黑" pitchFamily="34" charset="-120"/>
+                <a:latin typeface="微软雅黑" panose="020B0503020204020204" pitchFamily="34" charset="-122"/>
+                <a:ea typeface="微软雅黑" panose="020B0503020204020204" pitchFamily="34" charset="-122"/>
+                <a:cs typeface="微软雅黑" panose="020B0503020204020204" pitchFamily="34" charset="-120"/>
               </a:rPr>
               <a:t>•  </a:t>
             </a:r>
-            <a:pPr algn="l" indent="0" marL="0">
+            <a:r>
+              <a:rPr lang="en-US" sz="1800" dirty="0">
+                <a:solidFill>
+                  <a:srgbClr val="000000"/>
+                </a:solidFill>
+              </a:rPr>
+              <a:t>px、py仍是栈上的新格子，装的是地址，箭头跨出函数框指到a、b</a:t>
+            </a:r>
+            <a:endParaRPr lang="en-US" sz="1800" dirty="0"/>
+          </a:p>
+        </p:txBody>
+      </p:sp>
+      <p:sp>
+        <p:nvSpPr>
+          <p:cNvPr id="9" name="Text 7"/>
+          <p:cNvSpPr/>
+          <p:nvPr/>
+        </p:nvSpPr>
+        <p:spPr>
+          <a:xfrm>
+            <a:off x="896112" y="5052060"/>
+            <a:ext cx="10454335" cy="397764"/>
+          </a:xfrm>
+          <a:prstGeom prst="rect">
+            <a:avLst/>
+          </a:prstGeom>
+          <a:noFill/>
+        </p:spPr>
+        <p:txBody>
+          <a:bodyPr wrap="square" rtlCol="0" anchor="t"/>
+          <a:lstStyle/>
+          <a:p>
+            <a:pPr marL="0" indent="0" algn="l">
               <a:lnSpc>
                 <a:spcPct val="115000"/>
               </a:lnSpc>
               <a:buNone/>
             </a:pPr>
             <a:r>
+              <a:rPr lang="en-US" sz="1800" b="1" dirty="0">
+                <a:solidFill>
+                  <a:srgbClr val="1F4E9C"/>
+                </a:solidFill>
+                <a:latin typeface="微软雅黑" panose="020B0503020204020204" pitchFamily="34" charset="-122"/>
+                <a:ea typeface="微软雅黑" panose="020B0503020204020204" pitchFamily="34" charset="-122"/>
+                <a:cs typeface="微软雅黑" panose="020B0503020204020204" pitchFamily="34" charset="-120"/>
+              </a:rPr>
+              <a:t>•  </a:t>
+            </a:r>
+            <a:r>
               <a:rPr lang="en-US" sz="1800" dirty="0">
                 <a:solidFill>
                   <a:srgbClr val="000000"/>
                 </a:solidFill>
               </a:rPr>
-              <a:t>参数写int &amp;n，调用处不写&amp;，函数里改n就是改外面的n</a:t>
+              <a:t>临时变量t不能省：*px = *py之后a的原值已被覆盖，找不回来</a:t>
             </a:r>
             <a:endParaRPr lang="en-US" sz="1800" dirty="0"/>
           </a:p>
@@ -4442,26 +4220,25 @@
       </p:sp>
       <p:sp>
         <p:nvSpPr>
-          <p:cNvPr id="9" name="Text 7"/>
-          <p:cNvSpPr/>
-          <p:nvPr/>
-        </p:nvSpPr>
-        <p:spPr>
-          <a:xfrm>
-            <a:off x="896112" y="4814316"/>
+          <p:cNvPr id="10" name="Text 8"/>
+          <p:cNvSpPr/>
+          <p:nvPr/>
+        </p:nvSpPr>
+        <p:spPr>
+          <a:xfrm>
+            <a:off x="896112" y="5522976"/>
             <a:ext cx="10454335" cy="397764"/>
           </a:xfrm>
           <a:prstGeom prst="rect">
             <a:avLst/>
           </a:prstGeom>
           <a:noFill/>
-          <a:ln/>
         </p:spPr>
         <p:txBody>
           <a:bodyPr wrap="square" rtlCol="0" anchor="t"/>
           <a:lstStyle/>
           <a:p>
-            <a:pPr algn="l" indent="0" marL="0">
+            <a:pPr marL="0" indent="0" algn="l">
               <a:lnSpc>
                 <a:spcPct val="115000"/>
               </a:lnSpc>
@@ -4472,81 +4249,19 @@
                 <a:solidFill>
                   <a:srgbClr val="1F4E9C"/>
                 </a:solidFill>
-                <a:latin typeface="微软雅黑" pitchFamily="34" charset="0"/>
-                <a:ea typeface="微软雅黑" pitchFamily="34" charset="-122"/>
-                <a:cs typeface="微软雅黑" pitchFamily="34" charset="-120"/>
+                <a:latin typeface="微软雅黑" panose="020B0503020204020204" pitchFamily="34" charset="-122"/>
+                <a:ea typeface="微软雅黑" panose="020B0503020204020204" pitchFamily="34" charset="-122"/>
+                <a:cs typeface="微软雅黑" panose="020B0503020204020204" pitchFamily="34" charset="-120"/>
               </a:rPr>
               <a:t>•  </a:t>
             </a:r>
-            <a:pPr algn="l" indent="0" marL="0">
-              <a:lnSpc>
-                <a:spcPct val="115000"/>
-              </a:lnSpc>
-              <a:buNone/>
-            </a:pPr>
             <a:r>
               <a:rPr lang="en-US" sz="1800" dirty="0">
                 <a:solidFill>
                   <a:srgbClr val="000000"/>
                 </a:solidFill>
               </a:rPr>
-              <a:t>对照实验：参数若写成int n（值传递），调用后n仍是10</a:t>
-            </a:r>
-            <a:endParaRPr lang="en-US" sz="1800" dirty="0"/>
-          </a:p>
-        </p:txBody>
-      </p:sp>
-      <p:sp>
-        <p:nvSpPr>
-          <p:cNvPr id="10" name="Text 8"/>
-          <p:cNvSpPr/>
-          <p:nvPr/>
-        </p:nvSpPr>
-        <p:spPr>
-          <a:xfrm>
-            <a:off x="896112" y="5285232"/>
-            <a:ext cx="10454335" cy="397764"/>
-          </a:xfrm>
-          <a:prstGeom prst="rect">
-            <a:avLst/>
-          </a:prstGeom>
-          <a:noFill/>
-          <a:ln/>
-        </p:spPr>
-        <p:txBody>
-          <a:bodyPr wrap="square" rtlCol="0" anchor="t"/>
-          <a:lstStyle/>
-          <a:p>
-            <a:pPr algn="l" indent="0" marL="0">
-              <a:lnSpc>
-                <a:spcPct val="115000"/>
-              </a:lnSpc>
-              <a:buNone/>
-            </a:pPr>
-            <a:r>
-              <a:rPr lang="en-US" sz="1800" b="1" dirty="0">
-                <a:solidFill>
-                  <a:srgbClr val="1F4E9C"/>
-                </a:solidFill>
-                <a:latin typeface="微软雅黑" pitchFamily="34" charset="0"/>
-                <a:ea typeface="微软雅黑" pitchFamily="34" charset="-122"/>
-                <a:cs typeface="微软雅黑" pitchFamily="34" charset="-120"/>
-              </a:rPr>
-              <a:t>•  </a:t>
-            </a:r>
-            <a:pPr algn="l" indent="0" marL="0">
-              <a:lnSpc>
-                <a:spcPct val="115000"/>
-              </a:lnSpc>
-              <a:buNone/>
-            </a:pPr>
-            <a:r>
-              <a:rPr lang="en-US" sz="1800" dirty="0">
-                <a:solidFill>
-                  <a:srgbClr val="000000"/>
-                </a:solidFill>
-              </a:rPr>
-              <a:t>代码省略#include &lt;stdio.h&gt;与main骨架</a:t>
+              <a:t>调用处漏写&amp;能编译过，但把a的值当地址用，多半当场崩溃</a:t>
             </a:r>
             <a:endParaRPr lang="en-US" sz="1800" dirty="0"/>
           </a:p>
@@ -4560,9 +4275,9 @@
 </p:sld>
 </file>
 
-<file path=ppt/slides/slide2.xml><?xml version="1.0" encoding="utf-8"?>
+<file path=ppt/slides/slide5.xml><?xml version="1.0" encoding="utf-8"?>
 <p:sld xmlns:a="http://schemas.openxmlformats.org/drawingml/2006/main" xmlns:r="http://schemas.openxmlformats.org/officeDocument/2006/relationships" xmlns:p="http://schemas.openxmlformats.org/presentationml/2006/main">
-  <p:cSld name="Slide 2">
+  <p:cSld>
     <p:bg>
       <p:bgPr>
         <a:blipFill dpi="0" rotWithShape="1">
@@ -4606,13 +4321,12 @@
             <a:avLst/>
           </a:prstGeom>
           <a:noFill/>
-          <a:ln/>
         </p:spPr>
         <p:txBody>
           <a:bodyPr wrap="square" rtlCol="0" anchor="ctr"/>
           <a:lstStyle/>
           <a:p>
-            <a:pPr algn="r" indent="0" marL="0">
+            <a:pPr marL="0" indent="0" algn="r">
               <a:buNone/>
             </a:pPr>
             <a:r>
@@ -4620,11 +4334,11 @@
                 <a:solidFill>
                   <a:srgbClr val="8A9099"/>
                 </a:solidFill>
-                <a:latin typeface="微软雅黑" pitchFamily="34" charset="0"/>
-                <a:ea typeface="微软雅黑" pitchFamily="34" charset="-122"/>
-                <a:cs typeface="微软雅黑" pitchFamily="34" charset="-120"/>
-              </a:rPr>
-              <a:t>2 / 15</a:t>
+                <a:latin typeface="微软雅黑" panose="020B0503020204020204" pitchFamily="34" charset="-122"/>
+                <a:ea typeface="微软雅黑" panose="020B0503020204020204" pitchFamily="34" charset="-122"/>
+                <a:cs typeface="微软雅黑" panose="020B0503020204020204" pitchFamily="34" charset="-120"/>
+              </a:rPr>
+              <a:t>5 / 12</a:t>
             </a:r>
             <a:endParaRPr lang="en-US" sz="1000" dirty="0"/>
           </a:p>
@@ -4645,13 +4359,12 @@
             <a:avLst/>
           </a:prstGeom>
           <a:noFill/>
-          <a:ln/>
         </p:spPr>
         <p:txBody>
           <a:bodyPr wrap="square" rtlCol="0" anchor="ctr"/>
           <a:lstStyle/>
           <a:p>
-            <a:pPr algn="l" indent="0" marL="0">
+            <a:pPr marL="0" indent="0" algn="l">
               <a:buNone/>
             </a:pPr>
             <a:r>
@@ -4659,11 +4372,11 @@
                 <a:solidFill>
                   <a:srgbClr val="1F4E9C"/>
                 </a:solidFill>
-                <a:latin typeface="微软雅黑" pitchFamily="34" charset="0"/>
-                <a:ea typeface="微软雅黑" pitchFamily="34" charset="-122"/>
-                <a:cs typeface="微软雅黑" pitchFamily="34" charset="-120"/>
-              </a:rPr>
-              <a:t>引题</a:t>
+                <a:latin typeface="微软雅黑" panose="020B0503020204020204" pitchFamily="34" charset="-122"/>
+                <a:ea typeface="微软雅黑" panose="020B0503020204020204" pitchFamily="34" charset="-122"/>
+                <a:cs typeface="微软雅黑" panose="020B0503020204020204" pitchFamily="34" charset="-120"/>
+              </a:rPr>
+              <a:t>解法二</a:t>
             </a:r>
             <a:endParaRPr lang="en-US" sz="1400" dirty="0"/>
           </a:p>
@@ -4684,13 +4397,12 @@
             <a:avLst/>
           </a:prstGeom>
           <a:noFill/>
-          <a:ln/>
         </p:spPr>
         <p:txBody>
           <a:bodyPr wrap="square" rtlCol="0" anchor="ctr"/>
           <a:lstStyle/>
           <a:p>
-            <a:pPr algn="l" indent="0" marL="0">
+            <a:pPr marL="0" indent="0" algn="l">
               <a:buNone/>
             </a:pPr>
             <a:r>
@@ -4698,11 +4410,11 @@
                 <a:solidFill>
                   <a:srgbClr val="1F2329"/>
                 </a:solidFill>
-                <a:latin typeface="微软雅黑" pitchFamily="34" charset="0"/>
-                <a:ea typeface="微软雅黑" pitchFamily="34" charset="-122"/>
-                <a:cs typeface="微软雅黑" pitchFamily="34" charset="-120"/>
-              </a:rPr>
-              <a:t>基础阶段留下的为什么：函数为什么改不动外面的变量</a:t>
+                <a:latin typeface="微软雅黑" panose="020B0503020204020204" pitchFamily="34" charset="-122"/>
+                <a:ea typeface="微软雅黑" panose="020B0503020204020204" pitchFamily="34" charset="-122"/>
+                <a:cs typeface="微软雅黑" panose="020B0503020204020204" pitchFamily="34" charset="-120"/>
+              </a:rPr>
+              <a:t>引用：给变量起第二个名字</a:t>
             </a:r>
             <a:endParaRPr lang="en-US" sz="2800" dirty="0"/>
           </a:p>
@@ -4725,7 +4437,6 @@
           <a:solidFill>
             <a:srgbClr val="F7F9FC"/>
           </a:solidFill>
-          <a:ln/>
         </p:spPr>
       </p:sp>
       <p:sp>
@@ -4745,7 +4456,6 @@
           <a:solidFill>
             <a:srgbClr val="1F4E9C"/>
           </a:solidFill>
-          <a:ln/>
         </p:spPr>
       </p:sp>
       <p:sp>
@@ -4763,13 +4473,12 @@
             <a:avLst/>
           </a:prstGeom>
           <a:noFill/>
-          <a:ln/>
         </p:spPr>
         <p:txBody>
           <a:bodyPr wrap="square" rtlCol="0" anchor="t"/>
           <a:lstStyle/>
           <a:p>
-            <a:pPr algn="l" indent="0" marL="0">
+            <a:pPr marL="0" indent="0" algn="l">
               <a:lnSpc>
                 <a:spcPct val="125000"/>
               </a:lnSpc>
@@ -4780,13 +4489,13 @@
                 <a:solidFill>
                   <a:srgbClr val="1F2329"/>
                 </a:solidFill>
-                <a:latin typeface="Consolas" pitchFamily="34" charset="0"/>
-                <a:ea typeface="Consolas" pitchFamily="34" charset="-122"/>
-                <a:cs typeface="Consolas" pitchFamily="34" charset="-120"/>
-              </a:rPr>
-              <a:t>int a = 3, b = 5;
-swap(a, b);        // 想让函数把a和b换过来
-// 结果：a还是3，b还是5，纹丝不动
+                <a:latin typeface="Consolas" panose="020B0609020204030204" pitchFamily="34" charset="0"/>
+                <a:ea typeface="Consolas" panose="020B0609020204030204" pitchFamily="34" charset="-122"/>
+                <a:cs typeface="Consolas" panose="020B0609020204030204" pitchFamily="34" charset="-120"/>
+              </a:rPr>
+              <a:t>int x = 10;
+int &amp;r = x;      // r是x的引用，即x的别名
+r = 20;          // x也变成20：同一格内存，没有新格子
 </a:t>
             </a:r>
             <a:endParaRPr lang="en-US" sz="1400" dirty="0"/>
@@ -4808,13 +4517,12 @@
             <a:avLst/>
           </a:prstGeom>
           <a:noFill/>
-          <a:ln/>
         </p:spPr>
         <p:txBody>
           <a:bodyPr wrap="square" rtlCol="0" anchor="t"/>
           <a:lstStyle/>
           <a:p>
-            <a:pPr algn="l" indent="0" marL="0">
+            <a:pPr marL="0" indent="0" algn="l">
               <a:lnSpc>
                 <a:spcPct val="115000"/>
               </a:lnSpc>
@@ -4825,25 +4533,68 @@
                 <a:solidFill>
                   <a:srgbClr val="1F4E9C"/>
                 </a:solidFill>
-                <a:latin typeface="微软雅黑" pitchFamily="34" charset="0"/>
-                <a:ea typeface="微软雅黑" pitchFamily="34" charset="-122"/>
-                <a:cs typeface="微软雅黑" pitchFamily="34" charset="-120"/>
+                <a:latin typeface="微软雅黑" panose="020B0503020204020204" pitchFamily="34" charset="-122"/>
+                <a:ea typeface="微软雅黑" panose="020B0503020204020204" pitchFamily="34" charset="-122"/>
+                <a:cs typeface="微软雅黑" panose="020B0503020204020204" pitchFamily="34" charset="-120"/>
               </a:rPr>
               <a:t>•  </a:t>
             </a:r>
-            <a:pPr algn="l" indent="0" marL="0">
+            <a:r>
+              <a:rPr lang="en-US" sz="1800" dirty="0">
+                <a:solidFill>
+                  <a:srgbClr val="000000"/>
+                </a:solidFill>
+              </a:rPr>
+              <a:t>两条规矩：定义时必须初始化；绑定之后不能改绑</a:t>
+            </a:r>
+            <a:endParaRPr lang="en-US" sz="1800" dirty="0"/>
+          </a:p>
+        </p:txBody>
+      </p:sp>
+      <p:sp>
+        <p:nvSpPr>
+          <p:cNvPr id="9" name="Text 7"/>
+          <p:cNvSpPr/>
+          <p:nvPr/>
+        </p:nvSpPr>
+        <p:spPr>
+          <a:xfrm>
+            <a:off x="896112" y="4338828"/>
+            <a:ext cx="10454335" cy="397764"/>
+          </a:xfrm>
+          <a:prstGeom prst="rect">
+            <a:avLst/>
+          </a:prstGeom>
+          <a:noFill/>
+        </p:spPr>
+        <p:txBody>
+          <a:bodyPr wrap="square" rtlCol="0" anchor="t"/>
+          <a:lstStyle/>
+          <a:p>
+            <a:pPr marL="0" indent="0" algn="l">
               <a:lnSpc>
                 <a:spcPct val="115000"/>
               </a:lnSpc>
               <a:buNone/>
             </a:pPr>
             <a:r>
+              <a:rPr lang="en-US" sz="1800" b="1" dirty="0">
+                <a:solidFill>
+                  <a:srgbClr val="1F4E9C"/>
+                </a:solidFill>
+                <a:latin typeface="微软雅黑" panose="020B0503020204020204" pitchFamily="34" charset="-122"/>
+                <a:ea typeface="微软雅黑" panose="020B0503020204020204" pitchFamily="34" charset="-122"/>
+                <a:cs typeface="微软雅黑" panose="020B0503020204020204" pitchFamily="34" charset="-120"/>
+              </a:rPr>
+              <a:t>•  </a:t>
+            </a:r>
+            <a:r>
               <a:rPr lang="en-US" sz="1800" dirty="0">
                 <a:solidFill>
                   <a:srgbClr val="000000"/>
                 </a:solidFill>
               </a:rPr>
-              <a:t>基础阶段留过这个问题：函数里明明改了，外面为什么没变</a:t>
+              <a:t>r = y是把y的值赋给x，不是让r改指向y——这点和指针相反</a:t>
             </a:r>
             <a:endParaRPr lang="en-US" sz="1800" dirty="0"/>
           </a:p>
@@ -4851,26 +4602,25 @@
       </p:sp>
       <p:sp>
         <p:nvSpPr>
-          <p:cNvPr id="9" name="Text 7"/>
-          <p:cNvSpPr/>
-          <p:nvPr/>
-        </p:nvSpPr>
-        <p:spPr>
-          <a:xfrm>
-            <a:off x="896112" y="4338828"/>
+          <p:cNvPr id="10" name="Text 8"/>
+          <p:cNvSpPr/>
+          <p:nvPr/>
+        </p:nvSpPr>
+        <p:spPr>
+          <a:xfrm>
+            <a:off x="896112" y="4809744"/>
             <a:ext cx="10454335" cy="397764"/>
           </a:xfrm>
           <a:prstGeom prst="rect">
             <a:avLst/>
           </a:prstGeom>
           <a:noFill/>
-          <a:ln/>
         </p:spPr>
         <p:txBody>
           <a:bodyPr wrap="square" rtlCol="0" anchor="t"/>
           <a:lstStyle/>
           <a:p>
-            <a:pPr algn="l" indent="0" marL="0">
+            <a:pPr marL="0" indent="0" algn="l">
               <a:lnSpc>
                 <a:spcPct val="115000"/>
               </a:lnSpc>
@@ -4881,81 +4631,68 @@
                 <a:solidFill>
                   <a:srgbClr val="1F4E9C"/>
                 </a:solidFill>
-                <a:latin typeface="微软雅黑" pitchFamily="34" charset="0"/>
-                <a:ea typeface="微软雅黑" pitchFamily="34" charset="-122"/>
-                <a:cs typeface="微软雅黑" pitchFamily="34" charset="-120"/>
+                <a:latin typeface="微软雅黑" panose="020B0503020204020204" pitchFamily="34" charset="-122"/>
+                <a:ea typeface="微软雅黑" panose="020B0503020204020204" pitchFamily="34" charset="-122"/>
+                <a:cs typeface="微软雅黑" panose="020B0503020204020204" pitchFamily="34" charset="-120"/>
               </a:rPr>
               <a:t>•  </a:t>
             </a:r>
-            <a:pPr algn="l" indent="0" marL="0">
+            <a:r>
+              <a:rPr lang="en-US" sz="1800" dirty="0">
+                <a:solidFill>
+                  <a:srgbClr val="000000"/>
+                </a:solidFill>
+              </a:rPr>
+              <a:t>这个&amp;是声明别名，与取地址的&amp;是同一符号两种含义，看位置区分</a:t>
+            </a:r>
+            <a:endParaRPr lang="en-US" sz="1800" dirty="0"/>
+          </a:p>
+        </p:txBody>
+      </p:sp>
+      <p:sp>
+        <p:nvSpPr>
+          <p:cNvPr id="11" name="Text 9"/>
+          <p:cNvSpPr/>
+          <p:nvPr/>
+        </p:nvSpPr>
+        <p:spPr>
+          <a:xfrm>
+            <a:off x="896112" y="5280660"/>
+            <a:ext cx="10454335" cy="397764"/>
+          </a:xfrm>
+          <a:prstGeom prst="rect">
+            <a:avLst/>
+          </a:prstGeom>
+          <a:noFill/>
+        </p:spPr>
+        <p:txBody>
+          <a:bodyPr wrap="square" rtlCol="0" anchor="t"/>
+          <a:lstStyle/>
+          <a:p>
+            <a:pPr marL="0" indent="0" algn="l">
               <a:lnSpc>
                 <a:spcPct val="115000"/>
               </a:lnSpc>
               <a:buNone/>
             </a:pPr>
             <a:r>
+              <a:rPr lang="en-US" sz="1800" b="1" dirty="0">
+                <a:solidFill>
+                  <a:srgbClr val="1F4E9C"/>
+                </a:solidFill>
+                <a:latin typeface="微软雅黑" panose="020B0503020204020204" pitchFamily="34" charset="-122"/>
+                <a:ea typeface="微软雅黑" panose="020B0503020204020204" pitchFamily="34" charset="-122"/>
+                <a:cs typeface="微软雅黑" panose="020B0503020204020204" pitchFamily="34" charset="-120"/>
+              </a:rPr>
+              <a:t>•  </a:t>
+            </a:r>
+            <a:r>
               <a:rPr lang="en-US" sz="1800" dirty="0">
                 <a:solidFill>
                   <a:srgbClr val="000000"/>
                 </a:solidFill>
               </a:rPr>
-              <a:t>今天把传参的机制一次讲透，还会给你两种真正改得动的写法</a:t>
-            </a:r>
-            <a:endParaRPr lang="en-US" sz="1800" dirty="0"/>
-          </a:p>
-        </p:txBody>
-      </p:sp>
-      <p:sp>
-        <p:nvSpPr>
-          <p:cNvPr id="10" name="Text 8"/>
-          <p:cNvSpPr/>
-          <p:nvPr/>
-        </p:nvSpPr>
-        <p:spPr>
-          <a:xfrm>
-            <a:off x="896112" y="4809744"/>
-            <a:ext cx="10454335" cy="397764"/>
-          </a:xfrm>
-          <a:prstGeom prst="rect">
-            <a:avLst/>
-          </a:prstGeom>
-          <a:noFill/>
-          <a:ln/>
-        </p:spPr>
-        <p:txBody>
-          <a:bodyPr wrap="square" rtlCol="0" anchor="t"/>
-          <a:lstStyle/>
-          <a:p>
-            <a:pPr algn="l" indent="0" marL="0">
-              <a:lnSpc>
-                <a:spcPct val="115000"/>
-              </a:lnSpc>
-              <a:buNone/>
-            </a:pPr>
-            <a:r>
-              <a:rPr lang="en-US" sz="1800" b="1" dirty="0">
-                <a:solidFill>
-                  <a:srgbClr val="1F4E9C"/>
-                </a:solidFill>
-                <a:latin typeface="微软雅黑" pitchFamily="34" charset="0"/>
-                <a:ea typeface="微软雅黑" pitchFamily="34" charset="-122"/>
-                <a:cs typeface="微软雅黑" pitchFamily="34" charset="-120"/>
-              </a:rPr>
-              <a:t>•  </a:t>
-            </a:r>
-            <a:pPr algn="l" indent="0" marL="0">
-              <a:lnSpc>
-                <a:spcPct val="115000"/>
-              </a:lnSpc>
-              <a:buNone/>
-            </a:pPr>
-            <a:r>
-              <a:rPr lang="en-US" sz="1800" dirty="0">
-                <a:solidFill>
-                  <a:srgbClr val="000000"/>
-                </a:solidFill>
-              </a:rPr>
-              <a:t>本节目标：看懂值传递、指针传参、引用传参三种写法</a:t>
+              <a:t>引用是C++语法，纯C没有；802伪代码环境直接可用</a:t>
             </a:r>
             <a:endParaRPr lang="en-US" sz="1800" dirty="0"/>
           </a:p>
@@ -4969,9 +4706,9 @@
 </p:sld>
 </file>
 
-<file path=ppt/slides/slide3.xml><?xml version="1.0" encoding="utf-8"?>
+<file path=ppt/slides/slide6.xml><?xml version="1.0" encoding="utf-8"?>
 <p:sld xmlns:a="http://schemas.openxmlformats.org/drawingml/2006/main" xmlns:r="http://schemas.openxmlformats.org/officeDocument/2006/relationships" xmlns:p="http://schemas.openxmlformats.org/presentationml/2006/main">
-  <p:cSld name="Slide 3">
+  <p:cSld>
     <p:bg>
       <p:bgPr>
         <a:blipFill dpi="0" rotWithShape="1">
@@ -5015,13 +4752,12 @@
             <a:avLst/>
           </a:prstGeom>
           <a:noFill/>
-          <a:ln/>
         </p:spPr>
         <p:txBody>
           <a:bodyPr wrap="square" rtlCol="0" anchor="ctr"/>
           <a:lstStyle/>
           <a:p>
-            <a:pPr algn="r" indent="0" marL="0">
+            <a:pPr marL="0" indent="0" algn="r">
               <a:buNone/>
             </a:pPr>
             <a:r>
@@ -5029,11 +4765,11 @@
                 <a:solidFill>
                   <a:srgbClr val="8A9099"/>
                 </a:solidFill>
-                <a:latin typeface="微软雅黑" pitchFamily="34" charset="0"/>
-                <a:ea typeface="微软雅黑" pitchFamily="34" charset="-122"/>
-                <a:cs typeface="微软雅黑" pitchFamily="34" charset="-120"/>
-              </a:rPr>
-              <a:t>3 / 15</a:t>
+                <a:latin typeface="微软雅黑" panose="020B0503020204020204" pitchFamily="34" charset="-122"/>
+                <a:ea typeface="微软雅黑" panose="020B0503020204020204" pitchFamily="34" charset="-122"/>
+                <a:cs typeface="微软雅黑" panose="020B0503020204020204" pitchFamily="34" charset="-120"/>
+              </a:rPr>
+              <a:t>6 / 12</a:t>
             </a:r>
             <a:endParaRPr lang="en-US" sz="1000" dirty="0"/>
           </a:p>
@@ -5054,13 +4790,12 @@
             <a:avLst/>
           </a:prstGeom>
           <a:noFill/>
-          <a:ln/>
         </p:spPr>
         <p:txBody>
           <a:bodyPr wrap="square" rtlCol="0" anchor="ctr"/>
           <a:lstStyle/>
           <a:p>
-            <a:pPr algn="l" indent="0" marL="0">
+            <a:pPr marL="0" indent="0" algn="l">
               <a:buNone/>
             </a:pPr>
             <a:r>
@@ -5068,11 +4803,11 @@
                 <a:solidFill>
                   <a:srgbClr val="1F4E9C"/>
                 </a:solidFill>
-                <a:latin typeface="微软雅黑" pitchFamily="34" charset="0"/>
-                <a:ea typeface="微软雅黑" pitchFamily="34" charset="-122"/>
-                <a:cs typeface="微软雅黑" pitchFamily="34" charset="-120"/>
-              </a:rPr>
-              <a:t>值传递</a:t>
+                <a:latin typeface="微软雅黑" panose="020B0503020204020204" pitchFamily="34" charset="-122"/>
+                <a:ea typeface="微软雅黑" panose="020B0503020204020204" pitchFamily="34" charset="-122"/>
+                <a:cs typeface="微软雅黑" panose="020B0503020204020204" pitchFamily="34" charset="-120"/>
+              </a:rPr>
+              <a:t>引用传参</a:t>
             </a:r>
             <a:endParaRPr lang="en-US" sz="1400" dirty="0"/>
           </a:p>
@@ -5093,13 +4828,12 @@
             <a:avLst/>
           </a:prstGeom>
           <a:noFill/>
-          <a:ln/>
         </p:spPr>
         <p:txBody>
           <a:bodyPr wrap="square" rtlCol="0" anchor="ctr"/>
           <a:lstStyle/>
           <a:p>
-            <a:pPr algn="l" indent="0" marL="0">
+            <a:pPr marL="0" indent="0" algn="l">
               <a:buNone/>
             </a:pPr>
             <a:r>
@@ -5107,11 +4841,11 @@
                 <a:solidFill>
                   <a:srgbClr val="1F2329"/>
                 </a:solidFill>
-                <a:latin typeface="微软雅黑" pitchFamily="34" charset="0"/>
-                <a:ea typeface="微软雅黑" pitchFamily="34" charset="-122"/>
-                <a:cs typeface="微软雅黑" pitchFamily="34" charset="-120"/>
-              </a:rPr>
-              <a:t>传参的真相：参数收到的是副本</a:t>
+                <a:latin typeface="微软雅黑" panose="020B0503020204020204" pitchFamily="34" charset="-122"/>
+                <a:ea typeface="微软雅黑" panose="020B0503020204020204" pitchFamily="34" charset="-122"/>
+                <a:cs typeface="微软雅黑" panose="020B0503020204020204" pitchFamily="34" charset="-120"/>
+              </a:rPr>
+              <a:t>引用版swap：函数体和失败版一样，只多两个&amp;</a:t>
             </a:r>
             <a:endParaRPr lang="en-US" sz="2800" dirty="0"/>
           </a:p>
@@ -5119,26 +4853,108 @@
       </p:sp>
       <p:sp>
         <p:nvSpPr>
-          <p:cNvPr id="5" name="Text 3"/>
-          <p:cNvSpPr/>
-          <p:nvPr/>
-        </p:nvSpPr>
-        <p:spPr>
-          <a:xfrm>
-            <a:off x="896112" y="2395728"/>
+          <p:cNvPr id="5" name="Shape 3"/>
+          <p:cNvSpPr/>
+          <p:nvPr/>
+        </p:nvSpPr>
+        <p:spPr>
+          <a:xfrm>
+            <a:off x="822960" y="2395728"/>
+            <a:ext cx="10545775" cy="1508760"/>
+          </a:xfrm>
+          <a:prstGeom prst="rect">
+            <a:avLst/>
+          </a:prstGeom>
+          <a:solidFill>
+            <a:srgbClr val="F7F9FC"/>
+          </a:solidFill>
+        </p:spPr>
+      </p:sp>
+      <p:sp>
+        <p:nvSpPr>
+          <p:cNvPr id="6" name="Shape 4"/>
+          <p:cNvSpPr/>
+          <p:nvPr/>
+        </p:nvSpPr>
+        <p:spPr>
+          <a:xfrm>
+            <a:off x="822960" y="2395728"/>
+            <a:ext cx="50292" cy="1508760"/>
+          </a:xfrm>
+          <a:prstGeom prst="rect">
+            <a:avLst/>
+          </a:prstGeom>
+          <a:solidFill>
+            <a:srgbClr val="1F4E9C"/>
+          </a:solidFill>
+        </p:spPr>
+      </p:sp>
+      <p:sp>
+        <p:nvSpPr>
+          <p:cNvPr id="7" name="Text 5"/>
+          <p:cNvSpPr/>
+          <p:nvPr/>
+        </p:nvSpPr>
+        <p:spPr>
+          <a:xfrm>
+            <a:off x="1078992" y="2505456"/>
+            <a:ext cx="10033711" cy="1289304"/>
+          </a:xfrm>
+          <a:prstGeom prst="rect">
+            <a:avLst/>
+          </a:prstGeom>
+          <a:noFill/>
+        </p:spPr>
+        <p:txBody>
+          <a:bodyPr wrap="square" rtlCol="0" anchor="t"/>
+          <a:lstStyle/>
+          <a:p>
+            <a:pPr marL="0" indent="0" algn="l">
+              <a:lnSpc>
+                <a:spcPct val="125000"/>
+              </a:lnSpc>
+              <a:buNone/>
+            </a:pPr>
+            <a:r>
+              <a:rPr lang="en-US" sz="1400" dirty="0">
+                <a:solidFill>
+                  <a:srgbClr val="1F2329"/>
+                </a:solidFill>
+                <a:latin typeface="Consolas" panose="020B0609020204030204" pitchFamily="34" charset="0"/>
+                <a:ea typeface="Consolas" panose="020B0609020204030204" pitchFamily="34" charset="-122"/>
+                <a:cs typeface="Consolas" panose="020B0609020204030204" pitchFamily="34" charset="-120"/>
+              </a:rPr>
+              <a:t>void swap(int &amp;x, int &amp;y){
+    int t = x; x = y; y = t;   // 改x就是改a
+}
+swap(a, b);        // 调用处不用写&amp;
+</a:t>
+            </a:r>
+            <a:endParaRPr lang="en-US" sz="1400" dirty="0"/>
+          </a:p>
+        </p:txBody>
+      </p:sp>
+      <p:sp>
+        <p:nvSpPr>
+          <p:cNvPr id="8" name="Text 6"/>
+          <p:cNvSpPr/>
+          <p:nvPr/>
+        </p:nvSpPr>
+        <p:spPr>
+          <a:xfrm>
+            <a:off x="896112" y="4105656"/>
             <a:ext cx="10454335" cy="397764"/>
           </a:xfrm>
           <a:prstGeom prst="rect">
             <a:avLst/>
           </a:prstGeom>
           <a:noFill/>
-          <a:ln/>
         </p:spPr>
         <p:txBody>
           <a:bodyPr wrap="square" rtlCol="0" anchor="t"/>
           <a:lstStyle/>
           <a:p>
-            <a:pPr algn="l" indent="0" marL="0">
+            <a:pPr marL="0" indent="0" algn="l">
               <a:lnSpc>
                 <a:spcPct val="115000"/>
               </a:lnSpc>
@@ -5149,27 +4965,94 @@
                 <a:solidFill>
                   <a:srgbClr val="1F4E9C"/>
                 </a:solidFill>
-                <a:latin typeface="微软雅黑" pitchFamily="34" charset="0"/>
-                <a:ea typeface="微软雅黑" pitchFamily="34" charset="-122"/>
-                <a:cs typeface="微软雅黑" pitchFamily="34" charset="-120"/>
+                <a:latin typeface="微软雅黑" panose="020B0503020204020204" pitchFamily="34" charset="-122"/>
+                <a:ea typeface="微软雅黑" panose="020B0503020204020204" pitchFamily="34" charset="-122"/>
+                <a:cs typeface="微软雅黑" panose="020B0503020204020204" pitchFamily="34" charset="-120"/>
               </a:rPr>
               <a:t>•  </a:t>
             </a:r>
-            <a:pPr algn="l" indent="0" marL="0">
+            <a:r>
+              <a:rPr lang="en-US" sz="1800" dirty="0">
+                <a:solidFill>
+                  <a:srgbClr val="000000"/>
+                </a:solidFill>
+              </a:rPr>
+              <a:t>参数x是a的别名，没有新格子、没有复印，函数里改x就是改a</a:t>
+            </a:r>
+            <a:endParaRPr lang="en-US" sz="1800" dirty="0"/>
+          </a:p>
+        </p:txBody>
+      </p:sp>
+      <p:sp>
+        <p:nvSpPr>
+          <p:cNvPr id="9" name="Text 7"/>
+          <p:cNvSpPr/>
+          <p:nvPr/>
+        </p:nvSpPr>
+        <p:spPr>
+          <a:xfrm>
+            <a:off x="896112" y="4576572"/>
+            <a:ext cx="10454335" cy="397764"/>
+          </a:xfrm>
+          <a:prstGeom prst="rect">
+            <a:avLst/>
+          </a:prstGeom>
+          <a:noFill/>
+        </p:spPr>
+        <p:txBody>
+          <a:bodyPr wrap="square" rtlCol="0" anchor="t"/>
+          <a:lstStyle/>
+          <a:p>
+            <a:pPr marL="0" indent="0" algn="l">
               <a:lnSpc>
                 <a:spcPct val="115000"/>
               </a:lnSpc>
               <a:buNone/>
             </a:pPr>
             <a:r>
+              <a:rPr lang="en-US" sz="1800" b="1" dirty="0">
+                <a:solidFill>
+                  <a:srgbClr val="1F4E9C"/>
+                </a:solidFill>
+                <a:latin typeface="微软雅黑" panose="020B0503020204020204" pitchFamily="34" charset="-122"/>
+                <a:ea typeface="微软雅黑" panose="020B0503020204020204" pitchFamily="34" charset="-122"/>
+                <a:cs typeface="微软雅黑" panose="020B0503020204020204" pitchFamily="34" charset="-120"/>
+              </a:rPr>
+              <a:t>•  </a:t>
+            </a:r>
+            <a:r>
               <a:rPr lang="en-US" sz="1800" dirty="0">
                 <a:solidFill>
                   <a:srgbClr val="000000"/>
                 </a:solidFill>
               </a:rPr>
-              <a:t>调用swap(a, b)时，a和b把自己的</a:t>
-            </a:r>
-            <a:pPr algn="l" indent="0" marL="0">
+              <a:t>传大结构体时这点很值钱：值传递每次调用拷一整片，引用一格都不拷</a:t>
+            </a:r>
+            <a:endParaRPr lang="en-US" sz="1800" dirty="0"/>
+          </a:p>
+        </p:txBody>
+      </p:sp>
+      <p:sp>
+        <p:nvSpPr>
+          <p:cNvPr id="10" name="Text 8"/>
+          <p:cNvSpPr/>
+          <p:nvPr/>
+        </p:nvSpPr>
+        <p:spPr>
+          <a:xfrm>
+            <a:off x="896112" y="5047488"/>
+            <a:ext cx="10454335" cy="740664"/>
+          </a:xfrm>
+          <a:prstGeom prst="rect">
+            <a:avLst/>
+          </a:prstGeom>
+          <a:noFill/>
+        </p:spPr>
+        <p:txBody>
+          <a:bodyPr wrap="square" rtlCol="0" anchor="t"/>
+          <a:lstStyle/>
+          <a:p>
+            <a:pPr marL="0" indent="0" algn="l">
               <a:lnSpc>
                 <a:spcPct val="115000"/>
               </a:lnSpc>
@@ -5178,136 +5061,21 @@
             <a:r>
               <a:rPr lang="en-US" sz="1800" b="1" dirty="0">
                 <a:solidFill>
+                  <a:srgbClr val="1F4E9C"/>
+                </a:solidFill>
+                <a:latin typeface="微软雅黑" panose="020B0503020204020204" pitchFamily="34" charset="-122"/>
+                <a:ea typeface="微软雅黑" panose="020B0503020204020204" pitchFamily="34" charset="-122"/>
+                <a:cs typeface="微软雅黑" panose="020B0503020204020204" pitchFamily="34" charset="-120"/>
+              </a:rPr>
+              <a:t>•  </a:t>
+            </a:r>
+            <a:r>
+              <a:rPr lang="en-US" sz="1800" dirty="0">
+                <a:solidFill>
                   <a:srgbClr val="000000"/>
                 </a:solidFill>
               </a:rPr>
-              <a:t>值复印一份</a:t>
-            </a:r>
-            <a:pPr algn="l" indent="0" marL="0">
-              <a:lnSpc>
-                <a:spcPct val="115000"/>
-              </a:lnSpc>
-              <a:buNone/>
-            </a:pPr>
-            <a:r>
-              <a:rPr lang="en-US" sz="1800" dirty="0">
-                <a:solidFill>
-                  <a:srgbClr val="000000"/>
-                </a:solidFill>
-              </a:rPr>
-              <a:t>交给x和y</a:t>
-            </a:r>
-            <a:endParaRPr lang="en-US" sz="1800" dirty="0"/>
-          </a:p>
-        </p:txBody>
-      </p:sp>
-      <p:sp>
-        <p:nvSpPr>
-          <p:cNvPr id="6" name="Text 4"/>
-          <p:cNvSpPr/>
-          <p:nvPr/>
-        </p:nvSpPr>
-        <p:spPr>
-          <a:xfrm>
-            <a:off x="896112" y="2866644"/>
-            <a:ext cx="10454335" cy="397764"/>
-          </a:xfrm>
-          <a:prstGeom prst="rect">
-            <a:avLst/>
-          </a:prstGeom>
-          <a:noFill/>
-          <a:ln/>
-        </p:spPr>
-        <p:txBody>
-          <a:bodyPr wrap="square" rtlCol="0" anchor="t"/>
-          <a:lstStyle/>
-          <a:p>
-            <a:pPr algn="l" indent="0" marL="0">
-              <a:lnSpc>
-                <a:spcPct val="115000"/>
-              </a:lnSpc>
-              <a:buNone/>
-            </a:pPr>
-            <a:r>
-              <a:rPr lang="en-US" sz="1800" b="1" dirty="0">
-                <a:solidFill>
-                  <a:srgbClr val="1F4E9C"/>
-                </a:solidFill>
-                <a:latin typeface="微软雅黑" pitchFamily="34" charset="0"/>
-                <a:ea typeface="微软雅黑" pitchFamily="34" charset="-122"/>
-                <a:cs typeface="微软雅黑" pitchFamily="34" charset="-120"/>
-              </a:rPr>
-              <a:t>•  </a:t>
-            </a:r>
-            <a:pPr algn="l" indent="0" marL="0">
-              <a:lnSpc>
-                <a:spcPct val="115000"/>
-              </a:lnSpc>
-              <a:buNone/>
-            </a:pPr>
-            <a:r>
-              <a:rPr lang="en-US" sz="1800" dirty="0">
-                <a:solidFill>
-                  <a:srgbClr val="000000"/>
-                </a:solidFill>
-              </a:rPr>
-              <a:t>x、y是函数自己的局部变量，住在栈上的新格子里</a:t>
-            </a:r>
-            <a:endParaRPr lang="en-US" sz="1800" dirty="0"/>
-          </a:p>
-        </p:txBody>
-      </p:sp>
-      <p:sp>
-        <p:nvSpPr>
-          <p:cNvPr id="7" name="Text 5"/>
-          <p:cNvSpPr/>
-          <p:nvPr/>
-        </p:nvSpPr>
-        <p:spPr>
-          <a:xfrm>
-            <a:off x="896112" y="3337560"/>
-            <a:ext cx="10454335" cy="397764"/>
-          </a:xfrm>
-          <a:prstGeom prst="rect">
-            <a:avLst/>
-          </a:prstGeom>
-          <a:noFill/>
-          <a:ln/>
-        </p:spPr>
-        <p:txBody>
-          <a:bodyPr wrap="square" rtlCol="0" anchor="t"/>
-          <a:lstStyle/>
-          <a:p>
-            <a:pPr algn="l" indent="0" marL="0">
-              <a:lnSpc>
-                <a:spcPct val="115000"/>
-              </a:lnSpc>
-              <a:buNone/>
-            </a:pPr>
-            <a:r>
-              <a:rPr lang="en-US" sz="1800" b="1" dirty="0">
-                <a:solidFill>
-                  <a:srgbClr val="1F4E9C"/>
-                </a:solidFill>
-                <a:latin typeface="微软雅黑" pitchFamily="34" charset="0"/>
-                <a:ea typeface="微软雅黑" pitchFamily="34" charset="-122"/>
-                <a:cs typeface="微软雅黑" pitchFamily="34" charset="-120"/>
-              </a:rPr>
-              <a:t>•  </a:t>
-            </a:r>
-            <a:pPr algn="l" indent="0" marL="0">
-              <a:lnSpc>
-                <a:spcPct val="115000"/>
-              </a:lnSpc>
-              <a:buNone/>
-            </a:pPr>
-            <a:r>
-              <a:rPr lang="en-US" sz="1800" dirty="0">
-                <a:solidFill>
-                  <a:srgbClr val="000000"/>
-                </a:solidFill>
-              </a:rPr>
-              <a:t>函数里改的是复印件，原件从头到尾没人碰过</a:t>
+              <a:t>struct Student stu是白拷一次还改不动，struct Student &amp;stu直接改本人</a:t>
             </a:r>
             <a:endParaRPr lang="en-US" sz="1800" dirty="0"/>
           </a:p>
@@ -5321,9 +5089,9 @@
 </p:sld>
 </file>
 
-<file path=ppt/slides/slide4.xml><?xml version="1.0" encoding="utf-8"?>
+<file path=ppt/slides/slide7.xml><?xml version="1.0" encoding="utf-8"?>
 <p:sld xmlns:a="http://schemas.openxmlformats.org/drawingml/2006/main" xmlns:r="http://schemas.openxmlformats.org/officeDocument/2006/relationships" xmlns:p="http://schemas.openxmlformats.org/presentationml/2006/main">
-  <p:cSld name="Slide 4">
+  <p:cSld>
     <p:bg>
       <p:bgPr>
         <a:blipFill dpi="0" rotWithShape="1">
@@ -5367,13 +5135,12 @@
             <a:avLst/>
           </a:prstGeom>
           <a:noFill/>
-          <a:ln/>
         </p:spPr>
         <p:txBody>
           <a:bodyPr wrap="square" rtlCol="0" anchor="ctr"/>
           <a:lstStyle/>
           <a:p>
-            <a:pPr algn="r" indent="0" marL="0">
+            <a:pPr marL="0" indent="0" algn="r">
               <a:buNone/>
             </a:pPr>
             <a:r>
@@ -5381,11 +5148,11 @@
                 <a:solidFill>
                   <a:srgbClr val="8A9099"/>
                 </a:solidFill>
-                <a:latin typeface="微软雅黑" pitchFamily="34" charset="0"/>
-                <a:ea typeface="微软雅黑" pitchFamily="34" charset="-122"/>
-                <a:cs typeface="微软雅黑" pitchFamily="34" charset="-120"/>
-              </a:rPr>
-              <a:t>4 / 15</a:t>
+                <a:latin typeface="微软雅黑" panose="020B0503020204020204" pitchFamily="34" charset="-122"/>
+                <a:ea typeface="微软雅黑" panose="020B0503020204020204" pitchFamily="34" charset="-122"/>
+                <a:cs typeface="微软雅黑" panose="020B0503020204020204" pitchFamily="34" charset="-120"/>
+              </a:rPr>
+              <a:t>7 / 12</a:t>
             </a:r>
             <a:endParaRPr lang="en-US" sz="1000" dirty="0"/>
           </a:p>
@@ -5406,13 +5173,12 @@
             <a:avLst/>
           </a:prstGeom>
           <a:noFill/>
-          <a:ln/>
         </p:spPr>
         <p:txBody>
           <a:bodyPr wrap="square" rtlCol="0" anchor="ctr"/>
           <a:lstStyle/>
           <a:p>
-            <a:pPr algn="l" indent="0" marL="0">
+            <a:pPr marL="0" indent="0" algn="l">
               <a:buNone/>
             </a:pPr>
             <a:r>
@@ -5420,11 +5186,11 @@
                 <a:solidFill>
                   <a:srgbClr val="1F4E9C"/>
                 </a:solidFill>
-                <a:latin typeface="微软雅黑" pitchFamily="34" charset="0"/>
-                <a:ea typeface="微软雅黑" pitchFamily="34" charset="-122"/>
-                <a:cs typeface="微软雅黑" pitchFamily="34" charset="-120"/>
-              </a:rPr>
-              <a:t>失败现场</a:t>
+                <a:latin typeface="微软雅黑" panose="020B0503020204020204" pitchFamily="34" charset="-122"/>
+                <a:ea typeface="微软雅黑" panose="020B0503020204020204" pitchFamily="34" charset="-122"/>
+                <a:cs typeface="微软雅黑" panose="020B0503020204020204" pitchFamily="34" charset="-120"/>
+              </a:rPr>
+              <a:t>三种写法</a:t>
             </a:r>
             <a:endParaRPr lang="en-US" sz="1400" dirty="0"/>
           </a:p>
@@ -5445,13 +5211,12 @@
             <a:avLst/>
           </a:prstGeom>
           <a:noFill/>
-          <a:ln/>
         </p:spPr>
         <p:txBody>
           <a:bodyPr wrap="square" rtlCol="0" anchor="ctr"/>
           <a:lstStyle/>
           <a:p>
-            <a:pPr algn="l" indent="0" marL="0">
+            <a:pPr marL="0" indent="0" algn="l">
               <a:buNone/>
             </a:pPr>
             <a:r>
@@ -5459,1993 +5224,11 @@
                 <a:solidFill>
                   <a:srgbClr val="1F2329"/>
                 </a:solidFill>
-                <a:latin typeface="微软雅黑" pitchFamily="34" charset="0"/>
-                <a:ea typeface="微软雅黑" pitchFamily="34" charset="-122"/>
-                <a:cs typeface="微软雅黑" pitchFamily="34" charset="-120"/>
-              </a:rPr>
-              <a:t>swap失败版：函数里换得热闹，外面毫无变化</a:t>
-            </a:r>
-            <a:endParaRPr lang="en-US" sz="2800" dirty="0"/>
-          </a:p>
-        </p:txBody>
-      </p:sp>
-      <p:sp>
-        <p:nvSpPr>
-          <p:cNvPr id="5" name="Shape 3"/>
-          <p:cNvSpPr/>
-          <p:nvPr/>
-        </p:nvSpPr>
-        <p:spPr>
-          <a:xfrm>
-            <a:off x="822960" y="2395728"/>
-            <a:ext cx="10545775" cy="1746504"/>
-          </a:xfrm>
-          <a:prstGeom prst="rect">
-            <a:avLst/>
-          </a:prstGeom>
-          <a:solidFill>
-            <a:srgbClr val="F7F9FC"/>
-          </a:solidFill>
-          <a:ln/>
-        </p:spPr>
-      </p:sp>
-      <p:sp>
-        <p:nvSpPr>
-          <p:cNvPr id="6" name="Shape 4"/>
-          <p:cNvSpPr/>
-          <p:nvPr/>
-        </p:nvSpPr>
-        <p:spPr>
-          <a:xfrm>
-            <a:off x="822960" y="2395728"/>
-            <a:ext cx="50292" cy="1746504"/>
-          </a:xfrm>
-          <a:prstGeom prst="rect">
-            <a:avLst/>
-          </a:prstGeom>
-          <a:solidFill>
-            <a:srgbClr val="1F4E9C"/>
-          </a:solidFill>
-          <a:ln/>
-        </p:spPr>
-      </p:sp>
-      <p:sp>
-        <p:nvSpPr>
-          <p:cNvPr id="7" name="Text 5"/>
-          <p:cNvSpPr/>
-          <p:nvPr/>
-        </p:nvSpPr>
-        <p:spPr>
-          <a:xfrm>
-            <a:off x="1078992" y="2505456"/>
-            <a:ext cx="10033711" cy="1527048"/>
-          </a:xfrm>
-          <a:prstGeom prst="rect">
-            <a:avLst/>
-          </a:prstGeom>
-          <a:noFill/>
-          <a:ln/>
-        </p:spPr>
-        <p:txBody>
-          <a:bodyPr wrap="square" rtlCol="0" anchor="t"/>
-          <a:lstStyle/>
-          <a:p>
-            <a:pPr algn="l" indent="0" marL="0">
-              <a:lnSpc>
-                <a:spcPct val="125000"/>
-              </a:lnSpc>
-              <a:buNone/>
-            </a:pPr>
-            <a:r>
-              <a:rPr lang="en-US" sz="1400" dirty="0">
-                <a:solidFill>
-                  <a:srgbClr val="1F2329"/>
-                </a:solidFill>
-                <a:latin typeface="Consolas" pitchFamily="34" charset="0"/>
-                <a:ea typeface="Consolas" pitchFamily="34" charset="-122"/>
-                <a:cs typeface="Consolas" pitchFamily="34" charset="-120"/>
-              </a:rPr>
-              <a:t>void swap(int x, int y){
-    int t = x;
-    x = y;
-    y = t;          // 换的只是x和y这两个副本
-}
-</a:t>
-            </a:r>
-            <a:endParaRPr lang="en-US" sz="1400" dirty="0"/>
-          </a:p>
-        </p:txBody>
-      </p:sp>
-      <p:sp>
-        <p:nvSpPr>
-          <p:cNvPr id="8" name="Text 6"/>
-          <p:cNvSpPr/>
-          <p:nvPr/>
-        </p:nvSpPr>
-        <p:spPr>
-          <a:xfrm>
-            <a:off x="896112" y="4343400"/>
-            <a:ext cx="10454335" cy="397764"/>
-          </a:xfrm>
-          <a:prstGeom prst="rect">
-            <a:avLst/>
-          </a:prstGeom>
-          <a:noFill/>
-          <a:ln/>
-        </p:spPr>
-        <p:txBody>
-          <a:bodyPr wrap="square" rtlCol="0" anchor="t"/>
-          <a:lstStyle/>
-          <a:p>
-            <a:pPr algn="l" indent="0" marL="0">
-              <a:lnSpc>
-                <a:spcPct val="115000"/>
-              </a:lnSpc>
-              <a:buNone/>
-            </a:pPr>
-            <a:r>
-              <a:rPr lang="en-US" sz="1800" b="1" dirty="0">
-                <a:solidFill>
-                  <a:srgbClr val="1F4E9C"/>
-                </a:solidFill>
-                <a:latin typeface="微软雅黑" pitchFamily="34" charset="0"/>
-                <a:ea typeface="微软雅黑" pitchFamily="34" charset="-122"/>
-                <a:cs typeface="微软雅黑" pitchFamily="34" charset="-120"/>
-              </a:rPr>
-              <a:t>•  </a:t>
-            </a:r>
-            <a:pPr algn="l" indent="0" marL="0">
-              <a:lnSpc>
-                <a:spcPct val="115000"/>
-              </a:lnSpc>
-              <a:buNone/>
-            </a:pPr>
-            <a:r>
-              <a:rPr lang="en-US" sz="1800" dirty="0">
-                <a:solidFill>
-                  <a:srgbClr val="000000"/>
-                </a:solidFill>
-              </a:rPr>
-              <a:t>函数结束，x和y的格子被栈收回，复印件销毁</a:t>
-            </a:r>
-            <a:endParaRPr lang="en-US" sz="1800" dirty="0"/>
-          </a:p>
-        </p:txBody>
-      </p:sp>
-      <p:sp>
-        <p:nvSpPr>
-          <p:cNvPr id="9" name="Text 7"/>
-          <p:cNvSpPr/>
-          <p:nvPr/>
-        </p:nvSpPr>
-        <p:spPr>
-          <a:xfrm>
-            <a:off x="896112" y="4814316"/>
-            <a:ext cx="10454335" cy="397764"/>
-          </a:xfrm>
-          <a:prstGeom prst="rect">
-            <a:avLst/>
-          </a:prstGeom>
-          <a:noFill/>
-          <a:ln/>
-        </p:spPr>
-        <p:txBody>
-          <a:bodyPr wrap="square" rtlCol="0" anchor="t"/>
-          <a:lstStyle/>
-          <a:p>
-            <a:pPr algn="l" indent="0" marL="0">
-              <a:lnSpc>
-                <a:spcPct val="115000"/>
-              </a:lnSpc>
-              <a:buNone/>
-            </a:pPr>
-            <a:r>
-              <a:rPr lang="en-US" sz="1800" b="1" dirty="0">
-                <a:solidFill>
-                  <a:srgbClr val="1F4E9C"/>
-                </a:solidFill>
-                <a:latin typeface="微软雅黑" pitchFamily="34" charset="0"/>
-                <a:ea typeface="微软雅黑" pitchFamily="34" charset="-122"/>
-                <a:cs typeface="微软雅黑" pitchFamily="34" charset="-120"/>
-              </a:rPr>
-              <a:t>•  </a:t>
-            </a:r>
-            <a:pPr algn="l" indent="0" marL="0">
-              <a:lnSpc>
-                <a:spcPct val="115000"/>
-              </a:lnSpc>
-              <a:buNone/>
-            </a:pPr>
-            <a:r>
-              <a:rPr lang="en-US" sz="1800" dirty="0">
-                <a:solidFill>
-                  <a:srgbClr val="000000"/>
-                </a:solidFill>
-              </a:rPr>
-              <a:t>a和b各自的格子里，还是3和5</a:t>
-            </a:r>
-            <a:endParaRPr lang="en-US" sz="1800" dirty="0"/>
-          </a:p>
-        </p:txBody>
-      </p:sp>
-      <p:sp>
-        <p:nvSpPr>
-          <p:cNvPr id="10" name="Text 8"/>
-          <p:cNvSpPr/>
-          <p:nvPr/>
-        </p:nvSpPr>
-        <p:spPr>
-          <a:xfrm>
-            <a:off x="896112" y="5285232"/>
-            <a:ext cx="10454335" cy="397764"/>
-          </a:xfrm>
-          <a:prstGeom prst="rect">
-            <a:avLst/>
-          </a:prstGeom>
-          <a:noFill/>
-          <a:ln/>
-        </p:spPr>
-        <p:txBody>
-          <a:bodyPr wrap="square" rtlCol="0" anchor="t"/>
-          <a:lstStyle/>
-          <a:p>
-            <a:pPr algn="l" indent="0" marL="0">
-              <a:lnSpc>
-                <a:spcPct val="115000"/>
-              </a:lnSpc>
-              <a:buNone/>
-            </a:pPr>
-            <a:r>
-              <a:rPr lang="en-US" sz="1800" b="1" dirty="0">
-                <a:solidFill>
-                  <a:srgbClr val="1F4E9C"/>
-                </a:solidFill>
-                <a:latin typeface="微软雅黑" pitchFamily="34" charset="0"/>
-                <a:ea typeface="微软雅黑" pitchFamily="34" charset="-122"/>
-                <a:cs typeface="微软雅黑" pitchFamily="34" charset="-120"/>
-              </a:rPr>
-              <a:t>•  </a:t>
-            </a:r>
-            <a:pPr algn="l" indent="0" marL="0">
-              <a:lnSpc>
-                <a:spcPct val="115000"/>
-              </a:lnSpc>
-              <a:buNone/>
-            </a:pPr>
-            <a:r>
-              <a:rPr lang="en-US" sz="1800" dirty="0">
-                <a:solidFill>
-                  <a:srgbClr val="000000"/>
-                </a:solidFill>
-              </a:rPr>
-              <a:t>想让函数改外面的变量，光靠值传递做不到</a:t>
-            </a:r>
-            <a:endParaRPr lang="en-US" sz="1800" dirty="0"/>
-          </a:p>
-        </p:txBody>
-      </p:sp>
-    </p:spTree>
-  </p:cSld>
-  <p:clrMapOvr>
-    <a:masterClrMapping/>
-  </p:clrMapOvr>
-</p:sld>
-</file>
-
-<file path=ppt/slides/slide5.xml><?xml version="1.0" encoding="utf-8"?>
-<p:sld xmlns:a="http://schemas.openxmlformats.org/drawingml/2006/main" xmlns:r="http://schemas.openxmlformats.org/officeDocument/2006/relationships" xmlns:p="http://schemas.openxmlformats.org/presentationml/2006/main">
-  <p:cSld name="Slide 5">
-    <p:bg>
-      <p:bgPr>
-        <a:blipFill dpi="0" rotWithShape="1">
-          <a:blip r:embed="rId1">
-            <a:lum/>
-          </a:blip>
-          <a:srcRect/>
-          <a:stretch>
-            <a:fillRect/>
-          </a:stretch>
-        </a:blipFill>
-        <a:effectLst/>
-      </p:bgPr>
-    </p:bg>
-    <p:spTree>
-      <p:nvGrpSpPr>
-        <p:cNvPr id="1" name=""/>
-        <p:cNvGrpSpPr/>
-        <p:nvPr/>
-      </p:nvGrpSpPr>
-      <p:grpSpPr>
-        <a:xfrm>
-          <a:off x="0" y="0"/>
-          <a:ext cx="0" cy="0"/>
-          <a:chOff x="0" y="0"/>
-          <a:chExt cx="0" cy="0"/>
-        </a:xfrm>
-      </p:grpSpPr>
-      <p:sp>
-        <p:nvSpPr>
-          <p:cNvPr id="2" name="Text 0"/>
-          <p:cNvSpPr/>
-          <p:nvPr/>
-        </p:nvSpPr>
-        <p:spPr>
-          <a:xfrm>
-            <a:off x="10362895" y="6016752"/>
-            <a:ext cx="1463040" cy="320040"/>
-          </a:xfrm>
-          <a:prstGeom prst="rect">
-            <a:avLst/>
-          </a:prstGeom>
-          <a:noFill/>
-          <a:ln/>
-        </p:spPr>
-        <p:txBody>
-          <a:bodyPr wrap="square" rtlCol="0" anchor="ctr"/>
-          <a:lstStyle/>
-          <a:p>
-            <a:pPr algn="r" indent="0" marL="0">
-              <a:buNone/>
-            </a:pPr>
-            <a:r>
-              <a:rPr lang="en-US" sz="1000" dirty="0">
-                <a:solidFill>
-                  <a:srgbClr val="8A9099"/>
-                </a:solidFill>
-                <a:latin typeface="微软雅黑" pitchFamily="34" charset="0"/>
-                <a:ea typeface="微软雅黑" pitchFamily="34" charset="-122"/>
-                <a:cs typeface="微软雅黑" pitchFamily="34" charset="-120"/>
-              </a:rPr>
-              <a:t>5 / 15</a:t>
-            </a:r>
-            <a:endParaRPr lang="en-US" sz="1000" dirty="0"/>
-          </a:p>
-        </p:txBody>
-      </p:sp>
-      <p:sp>
-        <p:nvSpPr>
-          <p:cNvPr id="3" name="Text 1"/>
-          <p:cNvSpPr/>
-          <p:nvPr/>
-        </p:nvSpPr>
-        <p:spPr>
-          <a:xfrm>
-            <a:off x="822960" y="960120"/>
-            <a:ext cx="10545775" cy="365760"/>
-          </a:xfrm>
-          <a:prstGeom prst="rect">
-            <a:avLst/>
-          </a:prstGeom>
-          <a:noFill/>
-          <a:ln/>
-        </p:spPr>
-        <p:txBody>
-          <a:bodyPr wrap="square" rtlCol="0" anchor="ctr"/>
-          <a:lstStyle/>
-          <a:p>
-            <a:pPr algn="l" indent="0" marL="0">
-              <a:buNone/>
-            </a:pPr>
-            <a:r>
-              <a:rPr lang="en-US" sz="1400" b="1" dirty="0">
-                <a:solidFill>
-                  <a:srgbClr val="1F4E9C"/>
-                </a:solidFill>
-                <a:latin typeface="微软雅黑" pitchFamily="34" charset="0"/>
-                <a:ea typeface="微软雅黑" pitchFamily="34" charset="-122"/>
-                <a:cs typeface="微软雅黑" pitchFamily="34" charset="-120"/>
-              </a:rPr>
-              <a:t>指针传参</a:t>
-            </a:r>
-            <a:endParaRPr lang="en-US" sz="1400" dirty="0"/>
-          </a:p>
-        </p:txBody>
-      </p:sp>
-      <p:sp>
-        <p:nvSpPr>
-          <p:cNvPr id="4" name="Text 2"/>
-          <p:cNvSpPr/>
-          <p:nvPr/>
-        </p:nvSpPr>
-        <p:spPr>
-          <a:xfrm>
-            <a:off x="822960" y="1344168"/>
-            <a:ext cx="10545775" cy="731520"/>
-          </a:xfrm>
-          <a:prstGeom prst="rect">
-            <a:avLst/>
-          </a:prstGeom>
-          <a:noFill/>
-          <a:ln/>
-        </p:spPr>
-        <p:txBody>
-          <a:bodyPr wrap="square" rtlCol="0" anchor="ctr"/>
-          <a:lstStyle/>
-          <a:p>
-            <a:pPr algn="l" indent="0" marL="0">
-              <a:buNone/>
-            </a:pPr>
-            <a:r>
-              <a:rPr lang="en-US" sz="2800" b="1" dirty="0">
-                <a:solidFill>
-                  <a:srgbClr val="1F2329"/>
-                </a:solidFill>
-                <a:latin typeface="微软雅黑" pitchFamily="34" charset="0"/>
-                <a:ea typeface="微软雅黑" pitchFamily="34" charset="-122"/>
-                <a:cs typeface="微软雅黑" pitchFamily="34" charset="-120"/>
-              </a:rPr>
-              <a:t>第一种解法：把地址传进去，顺着地址改</a:t>
-            </a:r>
-            <a:endParaRPr lang="en-US" sz="2800" dirty="0"/>
-          </a:p>
-        </p:txBody>
-      </p:sp>
-      <p:sp>
-        <p:nvSpPr>
-          <p:cNvPr id="5" name="Shape 3"/>
-          <p:cNvSpPr/>
-          <p:nvPr/>
-        </p:nvSpPr>
-        <p:spPr>
-          <a:xfrm>
-            <a:off x="822960" y="2395728"/>
-            <a:ext cx="10545775" cy="1984248"/>
-          </a:xfrm>
-          <a:prstGeom prst="rect">
-            <a:avLst/>
-          </a:prstGeom>
-          <a:solidFill>
-            <a:srgbClr val="F7F9FC"/>
-          </a:solidFill>
-          <a:ln/>
-        </p:spPr>
-      </p:sp>
-      <p:sp>
-        <p:nvSpPr>
-          <p:cNvPr id="6" name="Shape 4"/>
-          <p:cNvSpPr/>
-          <p:nvPr/>
-        </p:nvSpPr>
-        <p:spPr>
-          <a:xfrm>
-            <a:off x="822960" y="2395728"/>
-            <a:ext cx="50292" cy="1984248"/>
-          </a:xfrm>
-          <a:prstGeom prst="rect">
-            <a:avLst/>
-          </a:prstGeom>
-          <a:solidFill>
-            <a:srgbClr val="1F4E9C"/>
-          </a:solidFill>
-          <a:ln/>
-        </p:spPr>
-      </p:sp>
-      <p:sp>
-        <p:nvSpPr>
-          <p:cNvPr id="7" name="Text 5"/>
-          <p:cNvSpPr/>
-          <p:nvPr/>
-        </p:nvSpPr>
-        <p:spPr>
-          <a:xfrm>
-            <a:off x="1078992" y="2505456"/>
-            <a:ext cx="10033711" cy="1764792"/>
-          </a:xfrm>
-          <a:prstGeom prst="rect">
-            <a:avLst/>
-          </a:prstGeom>
-          <a:noFill/>
-          <a:ln/>
-        </p:spPr>
-        <p:txBody>
-          <a:bodyPr wrap="square" rtlCol="0" anchor="t"/>
-          <a:lstStyle/>
-          <a:p>
-            <a:pPr algn="l" indent="0" marL="0">
-              <a:lnSpc>
-                <a:spcPct val="125000"/>
-              </a:lnSpc>
-              <a:buNone/>
-            </a:pPr>
-            <a:r>
-              <a:rPr lang="en-US" sz="1400" dirty="0">
-                <a:solidFill>
-                  <a:srgbClr val="1F2329"/>
-                </a:solidFill>
-                <a:latin typeface="Consolas" pitchFamily="34" charset="0"/>
-                <a:ea typeface="Consolas" pitchFamily="34" charset="-122"/>
-                <a:cs typeface="Consolas" pitchFamily="34" charset="-120"/>
-              </a:rPr>
-              <a:t>void swap(int *px, int *py){
-    int t = *px;
-    *px = *py;
-    *py = t;
-}
-swap(&amp;a, &amp;b);       // 传的是a和b的地址
-</a:t>
-            </a:r>
-            <a:endParaRPr lang="en-US" sz="1400" dirty="0"/>
-          </a:p>
-        </p:txBody>
-      </p:sp>
-      <p:sp>
-        <p:nvSpPr>
-          <p:cNvPr id="8" name="Text 6"/>
-          <p:cNvSpPr/>
-          <p:nvPr/>
-        </p:nvSpPr>
-        <p:spPr>
-          <a:xfrm>
-            <a:off x="896112" y="4581144"/>
-            <a:ext cx="10454335" cy="397764"/>
-          </a:xfrm>
-          <a:prstGeom prst="rect">
-            <a:avLst/>
-          </a:prstGeom>
-          <a:noFill/>
-          <a:ln/>
-        </p:spPr>
-        <p:txBody>
-          <a:bodyPr wrap="square" rtlCol="0" anchor="t"/>
-          <a:lstStyle/>
-          <a:p>
-            <a:pPr algn="l" indent="0" marL="0">
-              <a:lnSpc>
-                <a:spcPct val="115000"/>
-              </a:lnSpc>
-              <a:buNone/>
-            </a:pPr>
-            <a:r>
-              <a:rPr lang="en-US" sz="1800" b="1" dirty="0">
-                <a:solidFill>
-                  <a:srgbClr val="1F4E9C"/>
-                </a:solidFill>
-                <a:latin typeface="微软雅黑" pitchFamily="34" charset="0"/>
-                <a:ea typeface="微软雅黑" pitchFamily="34" charset="-122"/>
-                <a:cs typeface="微软雅黑" pitchFamily="34" charset="-120"/>
-              </a:rPr>
-              <a:t>•  </a:t>
-            </a:r>
-            <a:pPr algn="l" indent="0" marL="0">
-              <a:lnSpc>
-                <a:spcPct val="115000"/>
-              </a:lnSpc>
-              <a:buNone/>
-            </a:pPr>
-            <a:r>
-              <a:rPr lang="en-US" sz="1800" dirty="0">
-                <a:solidFill>
-                  <a:srgbClr val="000000"/>
-                </a:solidFill>
-              </a:rPr>
-              <a:t>参数收的不是值的复印件，是</a:t>
-            </a:r>
-            <a:pPr algn="l" indent="0" marL="0">
-              <a:lnSpc>
-                <a:spcPct val="115000"/>
-              </a:lnSpc>
-              <a:buNone/>
-            </a:pPr>
-            <a:r>
-              <a:rPr lang="en-US" sz="1800" b="1" dirty="0">
-                <a:solidFill>
-                  <a:srgbClr val="000000"/>
-                </a:solidFill>
-              </a:rPr>
-              <a:t>地址</a:t>
-            </a:r>
-            <a:endParaRPr lang="en-US" sz="1800" dirty="0"/>
-          </a:p>
-        </p:txBody>
-      </p:sp>
-      <p:sp>
-        <p:nvSpPr>
-          <p:cNvPr id="9" name="Text 7"/>
-          <p:cNvSpPr/>
-          <p:nvPr/>
-        </p:nvSpPr>
-        <p:spPr>
-          <a:xfrm>
-            <a:off x="896112" y="5052060"/>
-            <a:ext cx="10454335" cy="397764"/>
-          </a:xfrm>
-          <a:prstGeom prst="rect">
-            <a:avLst/>
-          </a:prstGeom>
-          <a:noFill/>
-          <a:ln/>
-        </p:spPr>
-        <p:txBody>
-          <a:bodyPr wrap="square" rtlCol="0" anchor="t"/>
-          <a:lstStyle/>
-          <a:p>
-            <a:pPr algn="l" indent="0" marL="0">
-              <a:lnSpc>
-                <a:spcPct val="115000"/>
-              </a:lnSpc>
-              <a:buNone/>
-            </a:pPr>
-            <a:r>
-              <a:rPr lang="en-US" sz="1800" b="1" dirty="0">
-                <a:solidFill>
-                  <a:srgbClr val="1F4E9C"/>
-                </a:solidFill>
-                <a:latin typeface="微软雅黑" pitchFamily="34" charset="0"/>
-                <a:ea typeface="微软雅黑" pitchFamily="34" charset="-122"/>
-                <a:cs typeface="微软雅黑" pitchFamily="34" charset="-120"/>
-              </a:rPr>
-              <a:t>•  </a:t>
-            </a:r>
-            <a:pPr algn="l" indent="0" marL="0">
-              <a:lnSpc>
-                <a:spcPct val="115000"/>
-              </a:lnSpc>
-              <a:buNone/>
-            </a:pPr>
-            <a:r>
-              <a:rPr lang="en-US" sz="1800" dirty="0">
-                <a:solidFill>
-                  <a:srgbClr val="000000"/>
-                </a:solidFill>
-              </a:rPr>
-              <a:t>*px改的就是a那一格：前几节课的隔空改物，用在这了</a:t>
-            </a:r>
-            <a:endParaRPr lang="en-US" sz="1800" dirty="0"/>
-          </a:p>
-        </p:txBody>
-      </p:sp>
-      <p:sp>
-        <p:nvSpPr>
-          <p:cNvPr id="10" name="Text 8"/>
-          <p:cNvSpPr/>
-          <p:nvPr/>
-        </p:nvSpPr>
-        <p:spPr>
-          <a:xfrm>
-            <a:off x="896112" y="5522976"/>
-            <a:ext cx="10454335" cy="397764"/>
-          </a:xfrm>
-          <a:prstGeom prst="rect">
-            <a:avLst/>
-          </a:prstGeom>
-          <a:noFill/>
-          <a:ln/>
-        </p:spPr>
-        <p:txBody>
-          <a:bodyPr wrap="square" rtlCol="0" anchor="t"/>
-          <a:lstStyle/>
-          <a:p>
-            <a:pPr algn="l" indent="0" marL="0">
-              <a:lnSpc>
-                <a:spcPct val="115000"/>
-              </a:lnSpc>
-              <a:buNone/>
-            </a:pPr>
-            <a:r>
-              <a:rPr lang="en-US" sz="1800" b="1" dirty="0">
-                <a:solidFill>
-                  <a:srgbClr val="1F4E9C"/>
-                </a:solidFill>
-                <a:latin typeface="微软雅黑" pitchFamily="34" charset="0"/>
-                <a:ea typeface="微软雅黑" pitchFamily="34" charset="-122"/>
-                <a:cs typeface="微软雅黑" pitchFamily="34" charset="-120"/>
-              </a:rPr>
-              <a:t>•  </a:t>
-            </a:r>
-            <a:pPr algn="l" indent="0" marL="0">
-              <a:lnSpc>
-                <a:spcPct val="115000"/>
-              </a:lnSpc>
-              <a:buNone/>
-            </a:pPr>
-            <a:r>
-              <a:rPr lang="en-US" sz="1800" dirty="0">
-                <a:solidFill>
-                  <a:srgbClr val="000000"/>
-                </a:solidFill>
-              </a:rPr>
-              <a:t>调用处要写&amp;a和&amp;b，把钥匙交出去</a:t>
-            </a:r>
-            <a:endParaRPr lang="en-US" sz="1800" dirty="0"/>
-          </a:p>
-        </p:txBody>
-      </p:sp>
-    </p:spTree>
-  </p:cSld>
-  <p:clrMapOvr>
-    <a:masterClrMapping/>
-  </p:clrMapOvr>
-</p:sld>
-</file>
-
-<file path=ppt/slides/slide6.xml><?xml version="1.0" encoding="utf-8"?>
-<p:sld xmlns:a="http://schemas.openxmlformats.org/drawingml/2006/main" xmlns:r="http://schemas.openxmlformats.org/officeDocument/2006/relationships" xmlns:p="http://schemas.openxmlformats.org/presentationml/2006/main">
-  <p:cSld name="Slide 6">
-    <p:bg>
-      <p:bgPr>
-        <a:blipFill dpi="0" rotWithShape="1">
-          <a:blip r:embed="rId1">
-            <a:lum/>
-          </a:blip>
-          <a:srcRect/>
-          <a:stretch>
-            <a:fillRect/>
-          </a:stretch>
-        </a:blipFill>
-        <a:effectLst/>
-      </p:bgPr>
-    </p:bg>
-    <p:spTree>
-      <p:nvGrpSpPr>
-        <p:cNvPr id="1" name=""/>
-        <p:cNvGrpSpPr/>
-        <p:nvPr/>
-      </p:nvGrpSpPr>
-      <p:grpSpPr>
-        <a:xfrm>
-          <a:off x="0" y="0"/>
-          <a:ext cx="0" cy="0"/>
-          <a:chOff x="0" y="0"/>
-          <a:chExt cx="0" cy="0"/>
-        </a:xfrm>
-      </p:grpSpPr>
-      <p:sp>
-        <p:nvSpPr>
-          <p:cNvPr id="2" name="Text 0"/>
-          <p:cNvSpPr/>
-          <p:nvPr/>
-        </p:nvSpPr>
-        <p:spPr>
-          <a:xfrm>
-            <a:off x="10362895" y="6016752"/>
-            <a:ext cx="1463040" cy="320040"/>
-          </a:xfrm>
-          <a:prstGeom prst="rect">
-            <a:avLst/>
-          </a:prstGeom>
-          <a:noFill/>
-          <a:ln/>
-        </p:spPr>
-        <p:txBody>
-          <a:bodyPr wrap="square" rtlCol="0" anchor="ctr"/>
-          <a:lstStyle/>
-          <a:p>
-            <a:pPr algn="r" indent="0" marL="0">
-              <a:buNone/>
-            </a:pPr>
-            <a:r>
-              <a:rPr lang="en-US" sz="1000" dirty="0">
-                <a:solidFill>
-                  <a:srgbClr val="8A9099"/>
-                </a:solidFill>
-                <a:latin typeface="微软雅黑" pitchFamily="34" charset="0"/>
-                <a:ea typeface="微软雅黑" pitchFamily="34" charset="-122"/>
-                <a:cs typeface="微软雅黑" pitchFamily="34" charset="-120"/>
-              </a:rPr>
-              <a:t>6 / 15</a:t>
-            </a:r>
-            <a:endParaRPr lang="en-US" sz="1000" dirty="0"/>
-          </a:p>
-        </p:txBody>
-      </p:sp>
-      <p:sp>
-        <p:nvSpPr>
-          <p:cNvPr id="3" name="Text 1"/>
-          <p:cNvSpPr/>
-          <p:nvPr/>
-        </p:nvSpPr>
-        <p:spPr>
-          <a:xfrm>
-            <a:off x="822960" y="960120"/>
-            <a:ext cx="10545775" cy="365760"/>
-          </a:xfrm>
-          <a:prstGeom prst="rect">
-            <a:avLst/>
-          </a:prstGeom>
-          <a:noFill/>
-          <a:ln/>
-        </p:spPr>
-        <p:txBody>
-          <a:bodyPr wrap="square" rtlCol="0" anchor="ctr"/>
-          <a:lstStyle/>
-          <a:p>
-            <a:pPr algn="l" indent="0" marL="0">
-              <a:buNone/>
-            </a:pPr>
-            <a:r>
-              <a:rPr lang="en-US" sz="1400" b="1" dirty="0">
-                <a:solidFill>
-                  <a:srgbClr val="1F4E9C"/>
-                </a:solidFill>
-                <a:latin typeface="微软雅黑" pitchFamily="34" charset="0"/>
-                <a:ea typeface="微软雅黑" pitchFamily="34" charset="-122"/>
-                <a:cs typeface="微软雅黑" pitchFamily="34" charset="-120"/>
-              </a:rPr>
-              <a:t>引用登场</a:t>
-            </a:r>
-            <a:endParaRPr lang="en-US" sz="1400" dirty="0"/>
-          </a:p>
-        </p:txBody>
-      </p:sp>
-      <p:sp>
-        <p:nvSpPr>
-          <p:cNvPr id="4" name="Text 2"/>
-          <p:cNvSpPr/>
-          <p:nvPr/>
-        </p:nvSpPr>
-        <p:spPr>
-          <a:xfrm>
-            <a:off x="822960" y="1344168"/>
-            <a:ext cx="10545775" cy="731520"/>
-          </a:xfrm>
-          <a:prstGeom prst="rect">
-            <a:avLst/>
-          </a:prstGeom>
-          <a:noFill/>
-          <a:ln/>
-        </p:spPr>
-        <p:txBody>
-          <a:bodyPr wrap="square" rtlCol="0" anchor="ctr"/>
-          <a:lstStyle/>
-          <a:p>
-            <a:pPr algn="l" indent="0" marL="0">
-              <a:buNone/>
-            </a:pPr>
-            <a:r>
-              <a:rPr lang="en-US" sz="2800" b="1" dirty="0">
-                <a:solidFill>
-                  <a:srgbClr val="1F2329"/>
-                </a:solidFill>
-                <a:latin typeface="微软雅黑" pitchFamily="34" charset="0"/>
-                <a:ea typeface="微软雅黑" pitchFamily="34" charset="-122"/>
-                <a:cs typeface="微软雅黑" pitchFamily="34" charset="-120"/>
-              </a:rPr>
-              <a:t>引用：变量的第二个名字</a:t>
-            </a:r>
-            <a:endParaRPr lang="en-US" sz="2800" dirty="0"/>
-          </a:p>
-        </p:txBody>
-      </p:sp>
-      <p:sp>
-        <p:nvSpPr>
-          <p:cNvPr id="5" name="Shape 3"/>
-          <p:cNvSpPr/>
-          <p:nvPr/>
-        </p:nvSpPr>
-        <p:spPr>
-          <a:xfrm>
-            <a:off x="822960" y="2395728"/>
-            <a:ext cx="10545775" cy="1271016"/>
-          </a:xfrm>
-          <a:prstGeom prst="rect">
-            <a:avLst/>
-          </a:prstGeom>
-          <a:solidFill>
-            <a:srgbClr val="F7F9FC"/>
-          </a:solidFill>
-          <a:ln/>
-        </p:spPr>
-      </p:sp>
-      <p:sp>
-        <p:nvSpPr>
-          <p:cNvPr id="6" name="Shape 4"/>
-          <p:cNvSpPr/>
-          <p:nvPr/>
-        </p:nvSpPr>
-        <p:spPr>
-          <a:xfrm>
-            <a:off x="822960" y="2395728"/>
-            <a:ext cx="50292" cy="1271016"/>
-          </a:xfrm>
-          <a:prstGeom prst="rect">
-            <a:avLst/>
-          </a:prstGeom>
-          <a:solidFill>
-            <a:srgbClr val="1F4E9C"/>
-          </a:solidFill>
-          <a:ln/>
-        </p:spPr>
-      </p:sp>
-      <p:sp>
-        <p:nvSpPr>
-          <p:cNvPr id="7" name="Text 5"/>
-          <p:cNvSpPr/>
-          <p:nvPr/>
-        </p:nvSpPr>
-        <p:spPr>
-          <a:xfrm>
-            <a:off x="1078992" y="2505456"/>
-            <a:ext cx="10033711" cy="1051560"/>
-          </a:xfrm>
-          <a:prstGeom prst="rect">
-            <a:avLst/>
-          </a:prstGeom>
-          <a:noFill/>
-          <a:ln/>
-        </p:spPr>
-        <p:txBody>
-          <a:bodyPr wrap="square" rtlCol="0" anchor="t"/>
-          <a:lstStyle/>
-          <a:p>
-            <a:pPr algn="l" indent="0" marL="0">
-              <a:lnSpc>
-                <a:spcPct val="125000"/>
-              </a:lnSpc>
-              <a:buNone/>
-            </a:pPr>
-            <a:r>
-              <a:rPr lang="en-US" sz="1400" dirty="0">
-                <a:solidFill>
-                  <a:srgbClr val="1F2329"/>
-                </a:solidFill>
-                <a:latin typeface="Consolas" pitchFamily="34" charset="0"/>
-                <a:ea typeface="Consolas" pitchFamily="34" charset="-122"/>
-                <a:cs typeface="Consolas" pitchFamily="34" charset="-120"/>
-              </a:rPr>
-              <a:t>int x = 10;
-int &amp;r = x;        // r是x的引用，读作r是x的别名
-r = 20;            // x也变成20
-</a:t>
-            </a:r>
-            <a:endParaRPr lang="en-US" sz="1400" dirty="0"/>
-          </a:p>
-        </p:txBody>
-      </p:sp>
-      <p:sp>
-        <p:nvSpPr>
-          <p:cNvPr id="8" name="Text 6"/>
-          <p:cNvSpPr/>
-          <p:nvPr/>
-        </p:nvSpPr>
-        <p:spPr>
-          <a:xfrm>
-            <a:off x="896112" y="3867912"/>
-            <a:ext cx="10454335" cy="397764"/>
-          </a:xfrm>
-          <a:prstGeom prst="rect">
-            <a:avLst/>
-          </a:prstGeom>
-          <a:noFill/>
-          <a:ln/>
-        </p:spPr>
-        <p:txBody>
-          <a:bodyPr wrap="square" rtlCol="0" anchor="t"/>
-          <a:lstStyle/>
-          <a:p>
-            <a:pPr algn="l" indent="0" marL="0">
-              <a:lnSpc>
-                <a:spcPct val="115000"/>
-              </a:lnSpc>
-              <a:buNone/>
-            </a:pPr>
-            <a:r>
-              <a:rPr lang="en-US" sz="1800" b="1" dirty="0">
-                <a:solidFill>
-                  <a:srgbClr val="1F4E9C"/>
-                </a:solidFill>
-                <a:latin typeface="微软雅黑" pitchFamily="34" charset="0"/>
-                <a:ea typeface="微软雅黑" pitchFamily="34" charset="-122"/>
-                <a:cs typeface="微软雅黑" pitchFamily="34" charset="-120"/>
-              </a:rPr>
-              <a:t>•  </a:t>
-            </a:r>
-            <a:pPr algn="l" indent="0" marL="0">
-              <a:lnSpc>
-                <a:spcPct val="115000"/>
-              </a:lnSpc>
-              <a:buNone/>
-            </a:pPr>
-            <a:r>
-              <a:rPr lang="en-US" sz="1800" dirty="0">
-                <a:solidFill>
-                  <a:srgbClr val="000000"/>
-                </a:solidFill>
-              </a:rPr>
-              <a:t>引用就是别名：r和x是同一格内存的两个名字</a:t>
-            </a:r>
-            <a:endParaRPr lang="en-US" sz="1800" dirty="0"/>
-          </a:p>
-        </p:txBody>
-      </p:sp>
-      <p:sp>
-        <p:nvSpPr>
-          <p:cNvPr id="9" name="Text 7"/>
-          <p:cNvSpPr/>
-          <p:nvPr/>
-        </p:nvSpPr>
-        <p:spPr>
-          <a:xfrm>
-            <a:off x="896112" y="4338828"/>
-            <a:ext cx="10454335" cy="397764"/>
-          </a:xfrm>
-          <a:prstGeom prst="rect">
-            <a:avLst/>
-          </a:prstGeom>
-          <a:noFill/>
-          <a:ln/>
-        </p:spPr>
-        <p:txBody>
-          <a:bodyPr wrap="square" rtlCol="0" anchor="t"/>
-          <a:lstStyle/>
-          <a:p>
-            <a:pPr algn="l" indent="0" marL="0">
-              <a:lnSpc>
-                <a:spcPct val="115000"/>
-              </a:lnSpc>
-              <a:buNone/>
-            </a:pPr>
-            <a:r>
-              <a:rPr lang="en-US" sz="1800" b="1" dirty="0">
-                <a:solidFill>
-                  <a:srgbClr val="1F4E9C"/>
-                </a:solidFill>
-                <a:latin typeface="微软雅黑" pitchFamily="34" charset="0"/>
-                <a:ea typeface="微软雅黑" pitchFamily="34" charset="-122"/>
-                <a:cs typeface="微软雅黑" pitchFamily="34" charset="-120"/>
-              </a:rPr>
-              <a:t>•  </a:t>
-            </a:r>
-            <a:pPr algn="l" indent="0" marL="0">
-              <a:lnSpc>
-                <a:spcPct val="115000"/>
-              </a:lnSpc>
-              <a:buNone/>
-            </a:pPr>
-            <a:r>
-              <a:rPr lang="en-US" sz="1800" dirty="0">
-                <a:solidFill>
-                  <a:srgbClr val="000000"/>
-                </a:solidFill>
-              </a:rPr>
-              <a:t>第一节课说的别名现象，今天有了专门的语法</a:t>
-            </a:r>
-            <a:endParaRPr lang="en-US" sz="1800" dirty="0"/>
-          </a:p>
-        </p:txBody>
-      </p:sp>
-      <p:sp>
-        <p:nvSpPr>
-          <p:cNvPr id="10" name="Text 8"/>
-          <p:cNvSpPr/>
-          <p:nvPr/>
-        </p:nvSpPr>
-        <p:spPr>
-          <a:xfrm>
-            <a:off x="896112" y="4809744"/>
-            <a:ext cx="10454335" cy="397764"/>
-          </a:xfrm>
-          <a:prstGeom prst="rect">
-            <a:avLst/>
-          </a:prstGeom>
-          <a:noFill/>
-          <a:ln/>
-        </p:spPr>
-        <p:txBody>
-          <a:bodyPr wrap="square" rtlCol="0" anchor="t"/>
-          <a:lstStyle/>
-          <a:p>
-            <a:pPr algn="l" indent="0" marL="0">
-              <a:lnSpc>
-                <a:spcPct val="115000"/>
-              </a:lnSpc>
-              <a:buNone/>
-            </a:pPr>
-            <a:r>
-              <a:rPr lang="en-US" sz="1800" b="1" dirty="0">
-                <a:solidFill>
-                  <a:srgbClr val="1F4E9C"/>
-                </a:solidFill>
-                <a:latin typeface="微软雅黑" pitchFamily="34" charset="0"/>
-                <a:ea typeface="微软雅黑" pitchFamily="34" charset="-122"/>
-                <a:cs typeface="微软雅黑" pitchFamily="34" charset="-120"/>
-              </a:rPr>
-              <a:t>•  </a:t>
-            </a:r>
-            <a:pPr algn="l" indent="0" marL="0">
-              <a:lnSpc>
-                <a:spcPct val="115000"/>
-              </a:lnSpc>
-              <a:buNone/>
-            </a:pPr>
-            <a:r>
-              <a:rPr lang="en-US" sz="1800" dirty="0">
-                <a:solidFill>
-                  <a:srgbClr val="000000"/>
-                </a:solidFill>
-              </a:rPr>
-              <a:t>引用是C++的语法，伪代码环境里可以直接用</a:t>
-            </a:r>
-            <a:endParaRPr lang="en-US" sz="1800" dirty="0"/>
-          </a:p>
-        </p:txBody>
-      </p:sp>
-    </p:spTree>
-  </p:cSld>
-  <p:clrMapOvr>
-    <a:masterClrMapping/>
-  </p:clrMapOvr>
-</p:sld>
-</file>
-
-<file path=ppt/slides/slide7.xml><?xml version="1.0" encoding="utf-8"?>
-<p:sld xmlns:a="http://schemas.openxmlformats.org/drawingml/2006/main" xmlns:r="http://schemas.openxmlformats.org/officeDocument/2006/relationships" xmlns:p="http://schemas.openxmlformats.org/presentationml/2006/main">
-  <p:cSld name="Slide 7">
-    <p:bg>
-      <p:bgPr>
-        <a:blipFill dpi="0" rotWithShape="1">
-          <a:blip r:embed="rId1">
-            <a:lum/>
-          </a:blip>
-          <a:srcRect/>
-          <a:stretch>
-            <a:fillRect/>
-          </a:stretch>
-        </a:blipFill>
-        <a:effectLst/>
-      </p:bgPr>
-    </p:bg>
-    <p:spTree>
-      <p:nvGrpSpPr>
-        <p:cNvPr id="1" name=""/>
-        <p:cNvGrpSpPr/>
-        <p:nvPr/>
-      </p:nvGrpSpPr>
-      <p:grpSpPr>
-        <a:xfrm>
-          <a:off x="0" y="0"/>
-          <a:ext cx="0" cy="0"/>
-          <a:chOff x="0" y="0"/>
-          <a:chExt cx="0" cy="0"/>
-        </a:xfrm>
-      </p:grpSpPr>
-      <p:sp>
-        <p:nvSpPr>
-          <p:cNvPr id="2" name="Text 0"/>
-          <p:cNvSpPr/>
-          <p:nvPr/>
-        </p:nvSpPr>
-        <p:spPr>
-          <a:xfrm>
-            <a:off x="10362895" y="6016752"/>
-            <a:ext cx="1463040" cy="320040"/>
-          </a:xfrm>
-          <a:prstGeom prst="rect">
-            <a:avLst/>
-          </a:prstGeom>
-          <a:noFill/>
-          <a:ln/>
-        </p:spPr>
-        <p:txBody>
-          <a:bodyPr wrap="square" rtlCol="0" anchor="ctr"/>
-          <a:lstStyle/>
-          <a:p>
-            <a:pPr algn="r" indent="0" marL="0">
-              <a:buNone/>
-            </a:pPr>
-            <a:r>
-              <a:rPr lang="en-US" sz="1000" dirty="0">
-                <a:solidFill>
-                  <a:srgbClr val="8A9099"/>
-                </a:solidFill>
-                <a:latin typeface="微软雅黑" pitchFamily="34" charset="0"/>
-                <a:ea typeface="微软雅黑" pitchFamily="34" charset="-122"/>
-                <a:cs typeface="微软雅黑" pitchFamily="34" charset="-120"/>
-              </a:rPr>
-              <a:t>7 / 15</a:t>
-            </a:r>
-            <a:endParaRPr lang="en-US" sz="1000" dirty="0"/>
-          </a:p>
-        </p:txBody>
-      </p:sp>
-      <p:sp>
-        <p:nvSpPr>
-          <p:cNvPr id="3" name="Text 1"/>
-          <p:cNvSpPr/>
-          <p:nvPr/>
-        </p:nvSpPr>
-        <p:spPr>
-          <a:xfrm>
-            <a:off x="822960" y="960120"/>
-            <a:ext cx="10545775" cy="365760"/>
-          </a:xfrm>
-          <a:prstGeom prst="rect">
-            <a:avLst/>
-          </a:prstGeom>
-          <a:noFill/>
-          <a:ln/>
-        </p:spPr>
-        <p:txBody>
-          <a:bodyPr wrap="square" rtlCol="0" anchor="ctr"/>
-          <a:lstStyle/>
-          <a:p>
-            <a:pPr algn="l" indent="0" marL="0">
-              <a:buNone/>
-            </a:pPr>
-            <a:r>
-              <a:rPr lang="en-US" sz="1400" b="1" dirty="0">
-                <a:solidFill>
-                  <a:srgbClr val="1F4E9C"/>
-                </a:solidFill>
-                <a:latin typeface="微软雅黑" pitchFamily="34" charset="0"/>
-                <a:ea typeface="微软雅黑" pitchFamily="34" charset="-122"/>
-                <a:cs typeface="微软雅黑" pitchFamily="34" charset="-120"/>
-              </a:rPr>
-              <a:t>引用的规矩</a:t>
-            </a:r>
-            <a:endParaRPr lang="en-US" sz="1400" dirty="0"/>
-          </a:p>
-        </p:txBody>
-      </p:sp>
-      <p:sp>
-        <p:nvSpPr>
-          <p:cNvPr id="4" name="Text 2"/>
-          <p:cNvSpPr/>
-          <p:nvPr/>
-        </p:nvSpPr>
-        <p:spPr>
-          <a:xfrm>
-            <a:off x="822960" y="1344168"/>
-            <a:ext cx="10545775" cy="731520"/>
-          </a:xfrm>
-          <a:prstGeom prst="rect">
-            <a:avLst/>
-          </a:prstGeom>
-          <a:noFill/>
-          <a:ln/>
-        </p:spPr>
-        <p:txBody>
-          <a:bodyPr wrap="square" rtlCol="0" anchor="ctr"/>
-          <a:lstStyle/>
-          <a:p>
-            <a:pPr algn="l" indent="0" marL="0">
-              <a:buNone/>
-            </a:pPr>
-            <a:r>
-              <a:rPr lang="en-US" sz="2800" b="1" dirty="0">
-                <a:solidFill>
-                  <a:srgbClr val="1F2329"/>
-                </a:solidFill>
-                <a:latin typeface="微软雅黑" pitchFamily="34" charset="0"/>
-                <a:ea typeface="微软雅黑" pitchFamily="34" charset="-122"/>
-                <a:cs typeface="微软雅黑" pitchFamily="34" charset="-120"/>
-              </a:rPr>
-              <a:t>引用两条规矩：出生就要绑定，绑了不改</a:t>
-            </a:r>
-            <a:endParaRPr lang="en-US" sz="2800" dirty="0"/>
-          </a:p>
-        </p:txBody>
-      </p:sp>
-      <p:sp>
-        <p:nvSpPr>
-          <p:cNvPr id="5" name="Text 3"/>
-          <p:cNvSpPr/>
-          <p:nvPr/>
-        </p:nvSpPr>
-        <p:spPr>
-          <a:xfrm>
-            <a:off x="896112" y="2395728"/>
-            <a:ext cx="10454335" cy="397764"/>
-          </a:xfrm>
-          <a:prstGeom prst="rect">
-            <a:avLst/>
-          </a:prstGeom>
-          <a:noFill/>
-          <a:ln/>
-        </p:spPr>
-        <p:txBody>
-          <a:bodyPr wrap="square" rtlCol="0" anchor="t"/>
-          <a:lstStyle/>
-          <a:p>
-            <a:pPr algn="l" indent="0" marL="0">
-              <a:lnSpc>
-                <a:spcPct val="115000"/>
-              </a:lnSpc>
-              <a:buNone/>
-            </a:pPr>
-            <a:r>
-              <a:rPr lang="en-US" sz="1800" b="1" dirty="0">
-                <a:solidFill>
-                  <a:srgbClr val="1F4E9C"/>
-                </a:solidFill>
-                <a:latin typeface="微软雅黑" pitchFamily="34" charset="0"/>
-                <a:ea typeface="微软雅黑" pitchFamily="34" charset="-122"/>
-                <a:cs typeface="微软雅黑" pitchFamily="34" charset="-120"/>
-              </a:rPr>
-              <a:t>•  </a:t>
-            </a:r>
-            <a:pPr algn="l" indent="0" marL="0">
-              <a:lnSpc>
-                <a:spcPct val="115000"/>
-              </a:lnSpc>
-              <a:buNone/>
-            </a:pPr>
-            <a:r>
-              <a:rPr lang="en-US" sz="1800" dirty="0">
-                <a:solidFill>
-                  <a:srgbClr val="000000"/>
-                </a:solidFill>
-              </a:rPr>
-              <a:t>引用必须在定义时就初始化：int &amp;r;单独一行不合法</a:t>
-            </a:r>
-            <a:endParaRPr lang="en-US" sz="1800" dirty="0"/>
-          </a:p>
-        </p:txBody>
-      </p:sp>
-      <p:sp>
-        <p:nvSpPr>
-          <p:cNvPr id="6" name="Text 4"/>
-          <p:cNvSpPr/>
-          <p:nvPr/>
-        </p:nvSpPr>
-        <p:spPr>
-          <a:xfrm>
-            <a:off x="896112" y="2866644"/>
-            <a:ext cx="10454335" cy="397764"/>
-          </a:xfrm>
-          <a:prstGeom prst="rect">
-            <a:avLst/>
-          </a:prstGeom>
-          <a:noFill/>
-          <a:ln/>
-        </p:spPr>
-        <p:txBody>
-          <a:bodyPr wrap="square" rtlCol="0" anchor="t"/>
-          <a:lstStyle/>
-          <a:p>
-            <a:pPr algn="l" indent="0" marL="0">
-              <a:lnSpc>
-                <a:spcPct val="115000"/>
-              </a:lnSpc>
-              <a:buNone/>
-            </a:pPr>
-            <a:r>
-              <a:rPr lang="en-US" sz="1800" b="1" dirty="0">
-                <a:solidFill>
-                  <a:srgbClr val="1F4E9C"/>
-                </a:solidFill>
-                <a:latin typeface="微软雅黑" pitchFamily="34" charset="0"/>
-                <a:ea typeface="微软雅黑" pitchFamily="34" charset="-122"/>
-                <a:cs typeface="微软雅黑" pitchFamily="34" charset="-120"/>
-              </a:rPr>
-              <a:t>•  </a:t>
-            </a:r>
-            <a:pPr algn="l" indent="0" marL="0">
-              <a:lnSpc>
-                <a:spcPct val="115000"/>
-              </a:lnSpc>
-              <a:buNone/>
-            </a:pPr>
-            <a:r>
-              <a:rPr lang="en-US" sz="1800" dirty="0">
-                <a:solidFill>
-                  <a:srgbClr val="000000"/>
-                </a:solidFill>
-              </a:rPr>
-              <a:t>绑定之后不能改绑：r = y是改x的值，不是让r改指向y</a:t>
-            </a:r>
-            <a:endParaRPr lang="en-US" sz="1800" dirty="0"/>
-          </a:p>
-        </p:txBody>
-      </p:sp>
-      <p:sp>
-        <p:nvSpPr>
-          <p:cNvPr id="7" name="Text 5"/>
-          <p:cNvSpPr/>
-          <p:nvPr/>
-        </p:nvSpPr>
-        <p:spPr>
-          <a:xfrm>
-            <a:off x="896112" y="3337560"/>
-            <a:ext cx="10454335" cy="397764"/>
-          </a:xfrm>
-          <a:prstGeom prst="rect">
-            <a:avLst/>
-          </a:prstGeom>
-          <a:noFill/>
-          <a:ln/>
-        </p:spPr>
-        <p:txBody>
-          <a:bodyPr wrap="square" rtlCol="0" anchor="t"/>
-          <a:lstStyle/>
-          <a:p>
-            <a:pPr algn="l" indent="0" marL="0">
-              <a:lnSpc>
-                <a:spcPct val="115000"/>
-              </a:lnSpc>
-              <a:buNone/>
-            </a:pPr>
-            <a:r>
-              <a:rPr lang="en-US" sz="1800" b="1" dirty="0">
-                <a:solidFill>
-                  <a:srgbClr val="1F4E9C"/>
-                </a:solidFill>
-                <a:latin typeface="微软雅黑" pitchFamily="34" charset="0"/>
-                <a:ea typeface="微软雅黑" pitchFamily="34" charset="-122"/>
-                <a:cs typeface="微软雅黑" pitchFamily="34" charset="-120"/>
-              </a:rPr>
-              <a:t>•  </a:t>
-            </a:r>
-            <a:pPr algn="l" indent="0" marL="0">
-              <a:lnSpc>
-                <a:spcPct val="115000"/>
-              </a:lnSpc>
-              <a:buNone/>
-            </a:pPr>
-            <a:r>
-              <a:rPr lang="en-US" sz="1800" dirty="0">
-                <a:solidFill>
-                  <a:srgbClr val="000000"/>
-                </a:solidFill>
-              </a:rPr>
-              <a:t>这一点和指针正好相反：指针随时能换指向，引用从一而终</a:t>
-            </a:r>
-            <a:endParaRPr lang="en-US" sz="1800" dirty="0"/>
-          </a:p>
-        </p:txBody>
-      </p:sp>
-    </p:spTree>
-  </p:cSld>
-  <p:clrMapOvr>
-    <a:masterClrMapping/>
-  </p:clrMapOvr>
-</p:sld>
-</file>
-
-<file path=ppt/slides/slide8.xml><?xml version="1.0" encoding="utf-8"?>
-<p:sld xmlns:a="http://schemas.openxmlformats.org/drawingml/2006/main" xmlns:r="http://schemas.openxmlformats.org/officeDocument/2006/relationships" xmlns:p="http://schemas.openxmlformats.org/presentationml/2006/main">
-  <p:cSld name="Slide 8">
-    <p:bg>
-      <p:bgPr>
-        <a:blipFill dpi="0" rotWithShape="1">
-          <a:blip r:embed="rId1">
-            <a:lum/>
-          </a:blip>
-          <a:srcRect/>
-          <a:stretch>
-            <a:fillRect/>
-          </a:stretch>
-        </a:blipFill>
-        <a:effectLst/>
-      </p:bgPr>
-    </p:bg>
-    <p:spTree>
-      <p:nvGrpSpPr>
-        <p:cNvPr id="1" name=""/>
-        <p:cNvGrpSpPr/>
-        <p:nvPr/>
-      </p:nvGrpSpPr>
-      <p:grpSpPr>
-        <a:xfrm>
-          <a:off x="0" y="0"/>
-          <a:ext cx="0" cy="0"/>
-          <a:chOff x="0" y="0"/>
-          <a:chExt cx="0" cy="0"/>
-        </a:xfrm>
-      </p:grpSpPr>
-      <p:sp>
-        <p:nvSpPr>
-          <p:cNvPr id="2" name="Text 0"/>
-          <p:cNvSpPr/>
-          <p:nvPr/>
-        </p:nvSpPr>
-        <p:spPr>
-          <a:xfrm>
-            <a:off x="10362895" y="6016752"/>
-            <a:ext cx="1463040" cy="320040"/>
-          </a:xfrm>
-          <a:prstGeom prst="rect">
-            <a:avLst/>
-          </a:prstGeom>
-          <a:noFill/>
-          <a:ln/>
-        </p:spPr>
-        <p:txBody>
-          <a:bodyPr wrap="square" rtlCol="0" anchor="ctr"/>
-          <a:lstStyle/>
-          <a:p>
-            <a:pPr algn="r" indent="0" marL="0">
-              <a:buNone/>
-            </a:pPr>
-            <a:r>
-              <a:rPr lang="en-US" sz="1000" dirty="0">
-                <a:solidFill>
-                  <a:srgbClr val="8A9099"/>
-                </a:solidFill>
-                <a:latin typeface="微软雅黑" pitchFamily="34" charset="0"/>
-                <a:ea typeface="微软雅黑" pitchFamily="34" charset="-122"/>
-                <a:cs typeface="微软雅黑" pitchFamily="34" charset="-120"/>
-              </a:rPr>
-              <a:t>8 / 15</a:t>
-            </a:r>
-            <a:endParaRPr lang="en-US" sz="1000" dirty="0"/>
-          </a:p>
-        </p:txBody>
-      </p:sp>
-      <p:sp>
-        <p:nvSpPr>
-          <p:cNvPr id="3" name="Text 1"/>
-          <p:cNvSpPr/>
-          <p:nvPr/>
-        </p:nvSpPr>
-        <p:spPr>
-          <a:xfrm>
-            <a:off x="822960" y="960120"/>
-            <a:ext cx="10545775" cy="365760"/>
-          </a:xfrm>
-          <a:prstGeom prst="rect">
-            <a:avLst/>
-          </a:prstGeom>
-          <a:noFill/>
-          <a:ln/>
-        </p:spPr>
-        <p:txBody>
-          <a:bodyPr wrap="square" rtlCol="0" anchor="ctr"/>
-          <a:lstStyle/>
-          <a:p>
-            <a:pPr algn="l" indent="0" marL="0">
-              <a:buNone/>
-            </a:pPr>
-            <a:r>
-              <a:rPr lang="en-US" sz="1400" b="1" dirty="0">
-                <a:solidFill>
-                  <a:srgbClr val="1F4E9C"/>
-                </a:solidFill>
-                <a:latin typeface="微软雅黑" pitchFamily="34" charset="0"/>
-                <a:ea typeface="微软雅黑" pitchFamily="34" charset="-122"/>
-                <a:cs typeface="微软雅黑" pitchFamily="34" charset="-120"/>
-              </a:rPr>
-              <a:t>引用传参</a:t>
-            </a:r>
-            <a:endParaRPr lang="en-US" sz="1400" dirty="0"/>
-          </a:p>
-        </p:txBody>
-      </p:sp>
-      <p:sp>
-        <p:nvSpPr>
-          <p:cNvPr id="4" name="Text 2"/>
-          <p:cNvSpPr/>
-          <p:nvPr/>
-        </p:nvSpPr>
-        <p:spPr>
-          <a:xfrm>
-            <a:off x="822960" y="1344168"/>
-            <a:ext cx="10545775" cy="731520"/>
-          </a:xfrm>
-          <a:prstGeom prst="rect">
-            <a:avLst/>
-          </a:prstGeom>
-          <a:noFill/>
-          <a:ln/>
-        </p:spPr>
-        <p:txBody>
-          <a:bodyPr wrap="square" rtlCol="0" anchor="ctr"/>
-          <a:lstStyle/>
-          <a:p>
-            <a:pPr algn="l" indent="0" marL="0">
-              <a:buNone/>
-            </a:pPr>
-            <a:r>
-              <a:rPr lang="en-US" sz="2800" b="1" dirty="0">
-                <a:solidFill>
-                  <a:srgbClr val="1F2329"/>
-                </a:solidFill>
-                <a:latin typeface="微软雅黑" pitchFamily="34" charset="0"/>
-                <a:ea typeface="微软雅黑" pitchFamily="34" charset="-122"/>
-                <a:cs typeface="微软雅黑" pitchFamily="34" charset="-120"/>
-              </a:rPr>
-              <a:t>第二种解法：引用传参，写法最干净</a:t>
-            </a:r>
-            <a:endParaRPr lang="en-US" sz="2800" dirty="0"/>
-          </a:p>
-        </p:txBody>
-      </p:sp>
-      <p:sp>
-        <p:nvSpPr>
-          <p:cNvPr id="5" name="Shape 3"/>
-          <p:cNvSpPr/>
-          <p:nvPr/>
-        </p:nvSpPr>
-        <p:spPr>
-          <a:xfrm>
-            <a:off x="822960" y="2395728"/>
-            <a:ext cx="10545775" cy="1984248"/>
-          </a:xfrm>
-          <a:prstGeom prst="rect">
-            <a:avLst/>
-          </a:prstGeom>
-          <a:solidFill>
-            <a:srgbClr val="F7F9FC"/>
-          </a:solidFill>
-          <a:ln/>
-        </p:spPr>
-      </p:sp>
-      <p:sp>
-        <p:nvSpPr>
-          <p:cNvPr id="6" name="Shape 4"/>
-          <p:cNvSpPr/>
-          <p:nvPr/>
-        </p:nvSpPr>
-        <p:spPr>
-          <a:xfrm>
-            <a:off x="822960" y="2395728"/>
-            <a:ext cx="50292" cy="1984248"/>
-          </a:xfrm>
-          <a:prstGeom prst="rect">
-            <a:avLst/>
-          </a:prstGeom>
-          <a:solidFill>
-            <a:srgbClr val="1F4E9C"/>
-          </a:solidFill>
-          <a:ln/>
-        </p:spPr>
-      </p:sp>
-      <p:sp>
-        <p:nvSpPr>
-          <p:cNvPr id="7" name="Text 5"/>
-          <p:cNvSpPr/>
-          <p:nvPr/>
-        </p:nvSpPr>
-        <p:spPr>
-          <a:xfrm>
-            <a:off x="1078992" y="2505456"/>
-            <a:ext cx="10033711" cy="1764792"/>
-          </a:xfrm>
-          <a:prstGeom prst="rect">
-            <a:avLst/>
-          </a:prstGeom>
-          <a:noFill/>
-          <a:ln/>
-        </p:spPr>
-        <p:txBody>
-          <a:bodyPr wrap="square" rtlCol="0" anchor="t"/>
-          <a:lstStyle/>
-          <a:p>
-            <a:pPr algn="l" indent="0" marL="0">
-              <a:lnSpc>
-                <a:spcPct val="125000"/>
-              </a:lnSpc>
-              <a:buNone/>
-            </a:pPr>
-            <a:r>
-              <a:rPr lang="en-US" sz="1400" dirty="0">
-                <a:solidFill>
-                  <a:srgbClr val="1F2329"/>
-                </a:solidFill>
-                <a:latin typeface="Consolas" pitchFamily="34" charset="0"/>
-                <a:ea typeface="Consolas" pitchFamily="34" charset="-122"/>
-                <a:cs typeface="Consolas" pitchFamily="34" charset="-120"/>
-              </a:rPr>
-              <a:t>void swap(int &amp;x, int &amp;y){
-    int t = x;
-    x = y;
-    y = t;          // 直接改的就是a和b
-}
-swap(a, b);         // 调用处不用写&amp;
-</a:t>
-            </a:r>
-            <a:endParaRPr lang="en-US" sz="1400" dirty="0"/>
-          </a:p>
-        </p:txBody>
-      </p:sp>
-      <p:sp>
-        <p:nvSpPr>
-          <p:cNvPr id="8" name="Text 6"/>
-          <p:cNvSpPr/>
-          <p:nvPr/>
-        </p:nvSpPr>
-        <p:spPr>
-          <a:xfrm>
-            <a:off x="896112" y="4581144"/>
-            <a:ext cx="10454335" cy="397764"/>
-          </a:xfrm>
-          <a:prstGeom prst="rect">
-            <a:avLst/>
-          </a:prstGeom>
-          <a:noFill/>
-          <a:ln/>
-        </p:spPr>
-        <p:txBody>
-          <a:bodyPr wrap="square" rtlCol="0" anchor="t"/>
-          <a:lstStyle/>
-          <a:p>
-            <a:pPr algn="l" indent="0" marL="0">
-              <a:lnSpc>
-                <a:spcPct val="115000"/>
-              </a:lnSpc>
-              <a:buNone/>
-            </a:pPr>
-            <a:r>
-              <a:rPr lang="en-US" sz="1800" b="1" dirty="0">
-                <a:solidFill>
-                  <a:srgbClr val="1F4E9C"/>
-                </a:solidFill>
-                <a:latin typeface="微软雅黑" pitchFamily="34" charset="0"/>
-                <a:ea typeface="微软雅黑" pitchFamily="34" charset="-122"/>
-                <a:cs typeface="微软雅黑" pitchFamily="34" charset="-120"/>
-              </a:rPr>
-              <a:t>•  </a:t>
-            </a:r>
-            <a:pPr algn="l" indent="0" marL="0">
-              <a:lnSpc>
-                <a:spcPct val="115000"/>
-              </a:lnSpc>
-              <a:buNone/>
-            </a:pPr>
-            <a:r>
-              <a:rPr lang="en-US" sz="1800" dirty="0">
-                <a:solidFill>
-                  <a:srgbClr val="000000"/>
-                </a:solidFill>
-              </a:rPr>
-              <a:t>参数x是a的别名，y是b的别名：函数里改x就是改a</a:t>
-            </a:r>
-            <a:endParaRPr lang="en-US" sz="1800" dirty="0"/>
-          </a:p>
-        </p:txBody>
-      </p:sp>
-      <p:sp>
-        <p:nvSpPr>
-          <p:cNvPr id="9" name="Text 7"/>
-          <p:cNvSpPr/>
-          <p:nvPr/>
-        </p:nvSpPr>
-        <p:spPr>
-          <a:xfrm>
-            <a:off x="896112" y="5052060"/>
-            <a:ext cx="10454335" cy="397764"/>
-          </a:xfrm>
-          <a:prstGeom prst="rect">
-            <a:avLst/>
-          </a:prstGeom>
-          <a:noFill/>
-          <a:ln/>
-        </p:spPr>
-        <p:txBody>
-          <a:bodyPr wrap="square" rtlCol="0" anchor="t"/>
-          <a:lstStyle/>
-          <a:p>
-            <a:pPr algn="l" indent="0" marL="0">
-              <a:lnSpc>
-                <a:spcPct val="115000"/>
-              </a:lnSpc>
-              <a:buNone/>
-            </a:pPr>
-            <a:r>
-              <a:rPr lang="en-US" sz="1800" b="1" dirty="0">
-                <a:solidFill>
-                  <a:srgbClr val="1F4E9C"/>
-                </a:solidFill>
-                <a:latin typeface="微软雅黑" pitchFamily="34" charset="0"/>
-                <a:ea typeface="微软雅黑" pitchFamily="34" charset="-122"/>
-                <a:cs typeface="微软雅黑" pitchFamily="34" charset="-120"/>
-              </a:rPr>
-              <a:t>•  </a:t>
-            </a:r>
-            <a:pPr algn="l" indent="0" marL="0">
-              <a:lnSpc>
-                <a:spcPct val="115000"/>
-              </a:lnSpc>
-              <a:buNone/>
-            </a:pPr>
-            <a:r>
-              <a:rPr lang="en-US" sz="1800" dirty="0">
-                <a:solidFill>
-                  <a:srgbClr val="000000"/>
-                </a:solidFill>
-              </a:rPr>
-              <a:t>函数体长得和失败版一模一样，差别只在参数表多了&amp;</a:t>
-            </a:r>
-            <a:endParaRPr lang="en-US" sz="1800" dirty="0"/>
-          </a:p>
-        </p:txBody>
-      </p:sp>
-      <p:sp>
-        <p:nvSpPr>
-          <p:cNvPr id="10" name="Text 8"/>
-          <p:cNvSpPr/>
-          <p:nvPr/>
-        </p:nvSpPr>
-        <p:spPr>
-          <a:xfrm>
-            <a:off x="896112" y="5522976"/>
-            <a:ext cx="10454335" cy="397764"/>
-          </a:xfrm>
-          <a:prstGeom prst="rect">
-            <a:avLst/>
-          </a:prstGeom>
-          <a:noFill/>
-          <a:ln/>
-        </p:spPr>
-        <p:txBody>
-          <a:bodyPr wrap="square" rtlCol="0" anchor="t"/>
-          <a:lstStyle/>
-          <a:p>
-            <a:pPr algn="l" indent="0" marL="0">
-              <a:lnSpc>
-                <a:spcPct val="115000"/>
-              </a:lnSpc>
-              <a:buNone/>
-            </a:pPr>
-            <a:r>
-              <a:rPr lang="en-US" sz="1800" b="1" dirty="0">
-                <a:solidFill>
-                  <a:srgbClr val="1F4E9C"/>
-                </a:solidFill>
-                <a:latin typeface="微软雅黑" pitchFamily="34" charset="0"/>
-                <a:ea typeface="微软雅黑" pitchFamily="34" charset="-122"/>
-                <a:cs typeface="微软雅黑" pitchFamily="34" charset="-120"/>
-              </a:rPr>
-              <a:t>•  </a:t>
-            </a:r>
-            <a:pPr algn="l" indent="0" marL="0">
-              <a:lnSpc>
-                <a:spcPct val="115000"/>
-              </a:lnSpc>
-              <a:buNone/>
-            </a:pPr>
-            <a:r>
-              <a:rPr lang="en-US" sz="1800" dirty="0">
-                <a:solidFill>
-                  <a:srgbClr val="000000"/>
-                </a:solidFill>
-              </a:rPr>
-              <a:t>调用处干干净净，swap(a, b)，不用交地址</a:t>
-            </a:r>
-            <a:endParaRPr lang="en-US" sz="1800" dirty="0"/>
-          </a:p>
-        </p:txBody>
-      </p:sp>
-    </p:spTree>
-  </p:cSld>
-  <p:clrMapOvr>
-    <a:masterClrMapping/>
-  </p:clrMapOvr>
-</p:sld>
-</file>
-
-<file path=ppt/slides/slide9.xml><?xml version="1.0" encoding="utf-8"?>
-<p:sld xmlns:a="http://schemas.openxmlformats.org/drawingml/2006/main" xmlns:r="http://schemas.openxmlformats.org/officeDocument/2006/relationships" xmlns:p="http://schemas.openxmlformats.org/presentationml/2006/main">
-  <p:cSld name="Slide 9">
-    <p:bg>
-      <p:bgPr>
-        <a:blipFill dpi="0" rotWithShape="1">
-          <a:blip r:embed="rId1">
-            <a:lum/>
-          </a:blip>
-          <a:srcRect/>
-          <a:stretch>
-            <a:fillRect/>
-          </a:stretch>
-        </a:blipFill>
-        <a:effectLst/>
-      </p:bgPr>
-    </p:bg>
-    <p:spTree>
-      <p:nvGrpSpPr>
-        <p:cNvPr id="1" name=""/>
-        <p:cNvGrpSpPr/>
-        <p:nvPr/>
-      </p:nvGrpSpPr>
-      <p:grpSpPr>
-        <a:xfrm>
-          <a:off x="0" y="0"/>
-          <a:ext cx="0" cy="0"/>
-          <a:chOff x="0" y="0"/>
-          <a:chExt cx="0" cy="0"/>
-        </a:xfrm>
-      </p:grpSpPr>
-      <p:sp>
-        <p:nvSpPr>
-          <p:cNvPr id="2" name="Text 0"/>
-          <p:cNvSpPr/>
-          <p:nvPr/>
-        </p:nvSpPr>
-        <p:spPr>
-          <a:xfrm>
-            <a:off x="10362895" y="6016752"/>
-            <a:ext cx="1463040" cy="320040"/>
-          </a:xfrm>
-          <a:prstGeom prst="rect">
-            <a:avLst/>
-          </a:prstGeom>
-          <a:noFill/>
-          <a:ln/>
-        </p:spPr>
-        <p:txBody>
-          <a:bodyPr wrap="square" rtlCol="0" anchor="ctr"/>
-          <a:lstStyle/>
-          <a:p>
-            <a:pPr algn="r" indent="0" marL="0">
-              <a:buNone/>
-            </a:pPr>
-            <a:r>
-              <a:rPr lang="en-US" sz="1000" dirty="0">
-                <a:solidFill>
-                  <a:srgbClr val="8A9099"/>
-                </a:solidFill>
-                <a:latin typeface="微软雅黑" pitchFamily="34" charset="0"/>
-                <a:ea typeface="微软雅黑" pitchFamily="34" charset="-122"/>
-                <a:cs typeface="微软雅黑" pitchFamily="34" charset="-120"/>
-              </a:rPr>
-              <a:t>9 / 15</a:t>
-            </a:r>
-            <a:endParaRPr lang="en-US" sz="1000" dirty="0"/>
-          </a:p>
-        </p:txBody>
-      </p:sp>
-      <p:sp>
-        <p:nvSpPr>
-          <p:cNvPr id="3" name="Text 1"/>
-          <p:cNvSpPr/>
-          <p:nvPr/>
-        </p:nvSpPr>
-        <p:spPr>
-          <a:xfrm>
-            <a:off x="822960" y="960120"/>
-            <a:ext cx="10545775" cy="365760"/>
-          </a:xfrm>
-          <a:prstGeom prst="rect">
-            <a:avLst/>
-          </a:prstGeom>
-          <a:noFill/>
-          <a:ln/>
-        </p:spPr>
-        <p:txBody>
-          <a:bodyPr wrap="square" rtlCol="0" anchor="ctr"/>
-          <a:lstStyle/>
-          <a:p>
-            <a:pPr algn="l" indent="0" marL="0">
-              <a:buNone/>
-            </a:pPr>
-            <a:r>
-              <a:rPr lang="en-US" sz="1400" b="1" dirty="0">
-                <a:solidFill>
-                  <a:srgbClr val="1F4E9C"/>
-                </a:solidFill>
-                <a:latin typeface="微软雅黑" pitchFamily="34" charset="0"/>
-                <a:ea typeface="微软雅黑" pitchFamily="34" charset="-122"/>
-                <a:cs typeface="微软雅黑" pitchFamily="34" charset="-120"/>
-              </a:rPr>
-              <a:t>对比</a:t>
-            </a:r>
-            <a:endParaRPr lang="en-US" sz="1400" dirty="0"/>
-          </a:p>
-        </p:txBody>
-      </p:sp>
-      <p:sp>
-        <p:nvSpPr>
-          <p:cNvPr id="4" name="Text 2"/>
-          <p:cNvSpPr/>
-          <p:nvPr/>
-        </p:nvSpPr>
-        <p:spPr>
-          <a:xfrm>
-            <a:off x="822960" y="1344168"/>
-            <a:ext cx="10545775" cy="731520"/>
-          </a:xfrm>
-          <a:prstGeom prst="rect">
-            <a:avLst/>
-          </a:prstGeom>
-          <a:noFill/>
-          <a:ln/>
-        </p:spPr>
-        <p:txBody>
-          <a:bodyPr wrap="square" rtlCol="0" anchor="ctr"/>
-          <a:lstStyle/>
-          <a:p>
-            <a:pPr algn="l" indent="0" marL="0">
-              <a:buNone/>
-            </a:pPr>
-            <a:r>
-              <a:rPr lang="en-US" sz="2800" b="1" dirty="0">
-                <a:solidFill>
-                  <a:srgbClr val="1F2329"/>
-                </a:solidFill>
-                <a:latin typeface="微软雅黑" pitchFamily="34" charset="0"/>
-                <a:ea typeface="微软雅黑" pitchFamily="34" charset="-122"/>
-                <a:cs typeface="微软雅黑" pitchFamily="34" charset="-120"/>
-              </a:rPr>
-              <a:t>三种传参：一套需求，三种写法</a:t>
+                <a:latin typeface="微软雅黑" panose="020B0503020204020204" pitchFamily="34" charset="-122"/>
+                <a:ea typeface="微软雅黑" panose="020B0503020204020204" pitchFamily="34" charset="-122"/>
+                <a:cs typeface="微软雅黑" panose="020B0503020204020204" pitchFamily="34" charset="-120"/>
+              </a:rPr>
+              <a:t>三种传参：一张表看清楚，也知道怎么选</a:t>
             </a:r>
             <a:endParaRPr lang="en-US" sz="2800" dirty="0"/>
           </a:p>
@@ -7453,21 +5236,15 @@
       </p:sp>
       <p:graphicFrame>
         <p:nvGraphicFramePr>
-          <p:cNvPr id="10" name="Table 0"/>
+          <p:cNvPr id="8" name="Table 0"/>
           <p:cNvGraphicFramePr>
             <a:graphicFrameLocks noGrp="1"/>
           </p:cNvGraphicFramePr>
-          <p:nvPr>
-            <p:extLst>
-              <p:ext uri="{D42A27DB-BD31-4B8C-83A1-F6EECF244321}">
-                <p14:modId xmlns:p14="http://schemas.microsoft.com/office/powerpoint/2010/main" val="1579011935"/>
-              </p:ext>
-            </p:extLst>
-          </p:nvPr>
+          <p:nvPr/>
         </p:nvGraphicFramePr>
         <p:xfrm>
           <a:off x="822960" y="2395728"/>
-          <a:ext cx="10545775" cy="914400"/>
+          <a:ext cx="10545776" cy="1682496"/>
         </p:xfrm>
         <a:graphic>
           <a:graphicData uri="http://schemas.openxmlformats.org/drawingml/2006/table">
@@ -7485,28 +5262,28 @@
                     <a:bodyPr/>
                     <a:lstStyle/>
                     <a:p>
-                      <a:pPr algn="ctr" indent="0" marL="0">
+                      <a:pPr marL="0" indent="0" algn="ctr">
                         <a:buNone/>
                       </a:pPr>
                       <a:r>
-                        <a:rPr lang="en-US" sz="1500" b="1" dirty="0">
+                        <a:rPr lang="en-US" sz="1400" b="1" dirty="0">
                           <a:solidFill>
                             <a:srgbClr val="1F4E9C"/>
                           </a:solidFill>
-                          <a:latin typeface="微软雅黑" pitchFamily="34" charset="0"/>
-                          <a:ea typeface="微软雅黑" pitchFamily="34" charset="-122"/>
-                          <a:cs typeface="微软雅黑" pitchFamily="34" charset="-120"/>
+                          <a:latin typeface="微软雅黑" panose="020B0503020204020204" pitchFamily="34" charset="-122"/>
+                          <a:ea typeface="微软雅黑" panose="020B0503020204020204" pitchFamily="34" charset="-122"/>
+                          <a:cs typeface="微软雅黑" panose="020B0503020204020204" pitchFamily="34" charset="-120"/>
                         </a:rPr>
                         <a:t>写法</a:t>
                       </a:r>
-                      <a:endParaRPr lang="en-US" sz="1500" dirty="0">
-                        <a:latin typeface="微软雅黑" charset="0"/>
-                        <a:ea typeface="微软雅黑" charset="0"/>
-                        <a:cs typeface="微软雅黑" charset="0"/>
+                      <a:endParaRPr lang="en-US" sz="1400" dirty="0">
+                        <a:latin typeface="微软雅黑" panose="020B0503020204020204" pitchFamily="34" charset="-122"/>
+                        <a:ea typeface="微软雅黑" panose="020B0503020204020204" pitchFamily="34" charset="-122"/>
+                        <a:cs typeface="微软雅黑" panose="020B0503020204020204" pitchFamily="34" charset="-122"/>
                       </a:endParaRPr>
                     </a:p>
                   </a:txBody>
-                  <a:tcPr marL="91440" marR="91440" marT="45720" marB="45720" anchor="ctr">
+                  <a:tcPr anchor="ctr">
                     <a:lnL w="9525" cap="flat" cmpd="sng" algn="ctr">
                       <a:solidFill>
                         <a:srgbClr val="D8DBE0"/>
@@ -7553,28 +5330,28 @@
                     <a:bodyPr/>
                     <a:lstStyle/>
                     <a:p>
-                      <a:pPr algn="ctr" indent="0" marL="0">
+                      <a:pPr marL="0" indent="0" algn="ctr">
                         <a:buNone/>
                       </a:pPr>
                       <a:r>
-                        <a:rPr lang="en-US" sz="1500" b="1" dirty="0">
+                        <a:rPr lang="en-US" sz="1400" b="1" dirty="0">
                           <a:solidFill>
                             <a:srgbClr val="1F4E9C"/>
                           </a:solidFill>
-                          <a:latin typeface="微软雅黑" pitchFamily="34" charset="0"/>
-                          <a:ea typeface="微软雅黑" pitchFamily="34" charset="-122"/>
-                          <a:cs typeface="微软雅黑" pitchFamily="34" charset="-120"/>
+                          <a:latin typeface="微软雅黑" panose="020B0503020204020204" pitchFamily="34" charset="-122"/>
+                          <a:ea typeface="微软雅黑" panose="020B0503020204020204" pitchFamily="34" charset="-122"/>
+                          <a:cs typeface="微软雅黑" panose="020B0503020204020204" pitchFamily="34" charset="-120"/>
                         </a:rPr>
                         <a:t>参数收到什么</a:t>
                       </a:r>
-                      <a:endParaRPr lang="en-US" sz="1500" dirty="0">
-                        <a:latin typeface="微软雅黑" charset="0"/>
-                        <a:ea typeface="微软雅黑" charset="0"/>
-                        <a:cs typeface="微软雅黑" charset="0"/>
+                      <a:endParaRPr lang="en-US" sz="1400" dirty="0">
+                        <a:latin typeface="微软雅黑" panose="020B0503020204020204" pitchFamily="34" charset="-122"/>
+                        <a:ea typeface="微软雅黑" panose="020B0503020204020204" pitchFamily="34" charset="-122"/>
+                        <a:cs typeface="微软雅黑" panose="020B0503020204020204" pitchFamily="34" charset="-122"/>
                       </a:endParaRPr>
                     </a:p>
                   </a:txBody>
-                  <a:tcPr marL="91440" marR="91440" marT="45720" marB="45720" anchor="ctr">
+                  <a:tcPr anchor="ctr">
                     <a:lnL w="9525" cap="flat" cmpd="sng" algn="ctr">
                       <a:solidFill>
                         <a:srgbClr val="D8DBE0"/>
@@ -7621,28 +5398,28 @@
                     <a:bodyPr/>
                     <a:lstStyle/>
                     <a:p>
-                      <a:pPr algn="ctr" indent="0" marL="0">
+                      <a:pPr marL="0" indent="0" algn="ctr">
                         <a:buNone/>
                       </a:pPr>
                       <a:r>
-                        <a:rPr lang="en-US" sz="1500" b="1" dirty="0">
+                        <a:rPr lang="en-US" sz="1400" b="1" dirty="0">
                           <a:solidFill>
                             <a:srgbClr val="1F4E9C"/>
                           </a:solidFill>
-                          <a:latin typeface="微软雅黑" pitchFamily="34" charset="0"/>
-                          <a:ea typeface="微软雅黑" pitchFamily="34" charset="-122"/>
-                          <a:cs typeface="微软雅黑" pitchFamily="34" charset="-120"/>
+                          <a:latin typeface="微软雅黑" panose="020B0503020204020204" pitchFamily="34" charset="-122"/>
+                          <a:ea typeface="微软雅黑" panose="020B0503020204020204" pitchFamily="34" charset="-122"/>
+                          <a:cs typeface="微软雅黑" panose="020B0503020204020204" pitchFamily="34" charset="-120"/>
                         </a:rPr>
                         <a:t>能改外面吗</a:t>
                       </a:r>
-                      <a:endParaRPr lang="en-US" sz="1500" dirty="0">
-                        <a:latin typeface="微软雅黑" charset="0"/>
-                        <a:ea typeface="微软雅黑" charset="0"/>
-                        <a:cs typeface="微软雅黑" charset="0"/>
+                      <a:endParaRPr lang="en-US" sz="1400" dirty="0">
+                        <a:latin typeface="微软雅黑" panose="020B0503020204020204" pitchFamily="34" charset="-122"/>
+                        <a:ea typeface="微软雅黑" panose="020B0503020204020204" pitchFamily="34" charset="-122"/>
+                        <a:cs typeface="微软雅黑" panose="020B0503020204020204" pitchFamily="34" charset="-122"/>
                       </a:endParaRPr>
                     </a:p>
                   </a:txBody>
-                  <a:tcPr marL="91440" marR="91440" marT="45720" marB="45720" anchor="ctr">
+                  <a:tcPr anchor="ctr">
                     <a:lnL w="9525" cap="flat" cmpd="sng" algn="ctr">
                       <a:solidFill>
                         <a:srgbClr val="D8DBE0"/>
@@ -7689,28 +5466,28 @@
                     <a:bodyPr/>
                     <a:lstStyle/>
                     <a:p>
-                      <a:pPr algn="ctr" indent="0" marL="0">
+                      <a:pPr marL="0" indent="0" algn="ctr">
                         <a:buNone/>
                       </a:pPr>
                       <a:r>
-                        <a:rPr lang="en-US" sz="1500" b="1" dirty="0">
+                        <a:rPr lang="en-US" sz="1400" b="1" dirty="0">
                           <a:solidFill>
                             <a:srgbClr val="1F4E9C"/>
                           </a:solidFill>
-                          <a:latin typeface="微软雅黑" pitchFamily="34" charset="0"/>
-                          <a:ea typeface="微软雅黑" pitchFamily="34" charset="-122"/>
-                          <a:cs typeface="微软雅黑" pitchFamily="34" charset="-120"/>
+                          <a:latin typeface="微软雅黑" panose="020B0503020204020204" pitchFamily="34" charset="-122"/>
+                          <a:ea typeface="微软雅黑" panose="020B0503020204020204" pitchFamily="34" charset="-122"/>
+                          <a:cs typeface="微软雅黑" panose="020B0503020204020204" pitchFamily="34" charset="-120"/>
                         </a:rPr>
                         <a:t>调用处</a:t>
                       </a:r>
-                      <a:endParaRPr lang="en-US" sz="1500" dirty="0">
-                        <a:latin typeface="微软雅黑" charset="0"/>
-                        <a:ea typeface="微软雅黑" charset="0"/>
-                        <a:cs typeface="微软雅黑" charset="0"/>
+                      <a:endParaRPr lang="en-US" sz="1400" dirty="0">
+                        <a:latin typeface="微软雅黑" panose="020B0503020204020204" pitchFamily="34" charset="-122"/>
+                        <a:ea typeface="微软雅黑" panose="020B0503020204020204" pitchFamily="34" charset="-122"/>
+                        <a:cs typeface="微软雅黑" panose="020B0503020204020204" pitchFamily="34" charset="-122"/>
                       </a:endParaRPr>
                     </a:p>
                   </a:txBody>
-                  <a:tcPr marL="91440" marR="91440" marT="45720" marB="45720" anchor="ctr">
+                  <a:tcPr anchor="ctr">
                     <a:lnL w="9525" cap="flat" cmpd="sng" algn="ctr">
                       <a:solidFill>
                         <a:srgbClr val="D8DBE0"/>
@@ -7759,28 +5536,28 @@
                     <a:bodyPr/>
                     <a:lstStyle/>
                     <a:p>
-                      <a:pPr algn="ctr" indent="0" marL="0">
+                      <a:pPr marL="0" indent="0" algn="ctr">
                         <a:buNone/>
                       </a:pPr>
                       <a:r>
-                        <a:rPr lang="en-US" sz="1500" dirty="0">
+                        <a:rPr lang="en-US" sz="1400" dirty="0">
                           <a:solidFill>
                             <a:srgbClr val="1F2329"/>
                           </a:solidFill>
-                          <a:latin typeface="微软雅黑" pitchFamily="34" charset="0"/>
-                          <a:ea typeface="微软雅黑" pitchFamily="34" charset="-122"/>
-                          <a:cs typeface="微软雅黑" pitchFamily="34" charset="-120"/>
+                          <a:latin typeface="微软雅黑" panose="020B0503020204020204" pitchFamily="34" charset="-122"/>
+                          <a:ea typeface="微软雅黑" panose="020B0503020204020204" pitchFamily="34" charset="-122"/>
+                          <a:cs typeface="微软雅黑" panose="020B0503020204020204" pitchFamily="34" charset="-120"/>
                         </a:rPr>
                         <a:t>值传递</a:t>
                       </a:r>
-                      <a:endParaRPr lang="en-US" sz="1500" dirty="0">
-                        <a:latin typeface="微软雅黑" charset="0"/>
-                        <a:ea typeface="微软雅黑" charset="0"/>
-                        <a:cs typeface="微软雅黑" charset="0"/>
+                      <a:endParaRPr lang="en-US" sz="1400" dirty="0">
+                        <a:latin typeface="微软雅黑" panose="020B0503020204020204" pitchFamily="34" charset="-122"/>
+                        <a:ea typeface="微软雅黑" panose="020B0503020204020204" pitchFamily="34" charset="-122"/>
+                        <a:cs typeface="微软雅黑" panose="020B0503020204020204" pitchFamily="34" charset="-122"/>
                       </a:endParaRPr>
                     </a:p>
                   </a:txBody>
-                  <a:tcPr marL="91440" marR="91440" marT="45720" marB="45720" anchor="ctr">
+                  <a:tcPr anchor="ctr">
                     <a:lnL w="9525" cap="flat" cmpd="sng" algn="ctr">
                       <a:solidFill>
                         <a:srgbClr val="D8DBE0"/>
@@ -7827,28 +5604,28 @@
                     <a:bodyPr/>
                     <a:lstStyle/>
                     <a:p>
-                      <a:pPr algn="ctr" indent="0" marL="0">
+                      <a:pPr marL="0" indent="0" algn="ctr">
                         <a:buNone/>
                       </a:pPr>
                       <a:r>
-                        <a:rPr lang="en-US" sz="1500" dirty="0">
+                        <a:rPr lang="en-US" sz="1400" dirty="0">
                           <a:solidFill>
                             <a:srgbClr val="1F2329"/>
                           </a:solidFill>
-                          <a:latin typeface="微软雅黑" pitchFamily="34" charset="0"/>
-                          <a:ea typeface="微软雅黑" pitchFamily="34" charset="-122"/>
-                          <a:cs typeface="微软雅黑" pitchFamily="34" charset="-120"/>
+                          <a:latin typeface="微软雅黑" panose="020B0503020204020204" pitchFamily="34" charset="-122"/>
+                          <a:ea typeface="微软雅黑" panose="020B0503020204020204" pitchFamily="34" charset="-122"/>
+                          <a:cs typeface="微软雅黑" panose="020B0503020204020204" pitchFamily="34" charset="-120"/>
                         </a:rPr>
                         <a:t>值的副本</a:t>
                       </a:r>
-                      <a:endParaRPr lang="en-US" sz="1500" dirty="0">
-                        <a:latin typeface="微软雅黑" charset="0"/>
-                        <a:ea typeface="微软雅黑" charset="0"/>
-                        <a:cs typeface="微软雅黑" charset="0"/>
+                      <a:endParaRPr lang="en-US" sz="1400" dirty="0">
+                        <a:latin typeface="微软雅黑" panose="020B0503020204020204" pitchFamily="34" charset="-122"/>
+                        <a:ea typeface="微软雅黑" panose="020B0503020204020204" pitchFamily="34" charset="-122"/>
+                        <a:cs typeface="微软雅黑" panose="020B0503020204020204" pitchFamily="34" charset="-122"/>
                       </a:endParaRPr>
                     </a:p>
                   </a:txBody>
-                  <a:tcPr marL="91440" marR="91440" marT="45720" marB="45720" anchor="ctr">
+                  <a:tcPr anchor="ctr">
                     <a:lnL w="9525" cap="flat" cmpd="sng" algn="ctr">
                       <a:solidFill>
                         <a:srgbClr val="D8DBE0"/>
@@ -7895,28 +5672,28 @@
                     <a:bodyPr/>
                     <a:lstStyle/>
                     <a:p>
-                      <a:pPr algn="ctr" indent="0" marL="0">
+                      <a:pPr marL="0" indent="0" algn="ctr">
                         <a:buNone/>
                       </a:pPr>
                       <a:r>
-                        <a:rPr lang="en-US" sz="1500" dirty="0">
+                        <a:rPr lang="en-US" sz="1400" dirty="0">
                           <a:solidFill>
                             <a:srgbClr val="1F2329"/>
                           </a:solidFill>
-                          <a:latin typeface="微软雅黑" pitchFamily="34" charset="0"/>
-                          <a:ea typeface="微软雅黑" pitchFamily="34" charset="-122"/>
-                          <a:cs typeface="微软雅黑" pitchFamily="34" charset="-120"/>
+                          <a:latin typeface="微软雅黑" panose="020B0503020204020204" pitchFamily="34" charset="-122"/>
+                          <a:ea typeface="微软雅黑" panose="020B0503020204020204" pitchFamily="34" charset="-122"/>
+                          <a:cs typeface="微软雅黑" panose="020B0503020204020204" pitchFamily="34" charset="-120"/>
                         </a:rPr>
                         <a:t>不能</a:t>
                       </a:r>
-                      <a:endParaRPr lang="en-US" sz="1500" dirty="0">
-                        <a:latin typeface="微软雅黑" charset="0"/>
-                        <a:ea typeface="微软雅黑" charset="0"/>
-                        <a:cs typeface="微软雅黑" charset="0"/>
+                      <a:endParaRPr lang="en-US" sz="1400" dirty="0">
+                        <a:latin typeface="微软雅黑" panose="020B0503020204020204" pitchFamily="34" charset="-122"/>
+                        <a:ea typeface="微软雅黑" panose="020B0503020204020204" pitchFamily="34" charset="-122"/>
+                        <a:cs typeface="微软雅黑" panose="020B0503020204020204" pitchFamily="34" charset="-122"/>
                       </a:endParaRPr>
                     </a:p>
                   </a:txBody>
-                  <a:tcPr marL="91440" marR="91440" marT="45720" marB="45720" anchor="ctr">
+                  <a:tcPr anchor="ctr">
                     <a:lnL w="9525" cap="flat" cmpd="sng" algn="ctr">
                       <a:solidFill>
                         <a:srgbClr val="D8DBE0"/>
@@ -7963,96 +5740,28 @@
                     <a:bodyPr/>
                     <a:lstStyle/>
                     <a:p>
-                      <a:pPr algn="ctr" indent="0" marL="0">
+                      <a:pPr marL="0" indent="0" algn="ctr">
                         <a:buNone/>
                       </a:pPr>
                       <a:r>
-                        <a:rPr lang="en-US" sz="1500" dirty="0">
+                        <a:rPr lang="en-US" sz="1400" dirty="0">
                           <a:solidFill>
                             <a:srgbClr val="1F2329"/>
                           </a:solidFill>
-                          <a:latin typeface="微软雅黑" pitchFamily="34" charset="0"/>
-                          <a:ea typeface="微软雅黑" pitchFamily="34" charset="-122"/>
-                          <a:cs typeface="微软雅黑" pitchFamily="34" charset="-120"/>
+                          <a:latin typeface="微软雅黑" panose="020B0503020204020204" pitchFamily="34" charset="-122"/>
+                          <a:ea typeface="微软雅黑" panose="020B0503020204020204" pitchFamily="34" charset="-122"/>
+                          <a:cs typeface="微软雅黑" panose="020B0503020204020204" pitchFamily="34" charset="-120"/>
                         </a:rPr>
                         <a:t>swap(a</a:t>
                       </a:r>
-                      <a:endParaRPr lang="en-US" sz="1500" dirty="0">
-                        <a:latin typeface="微软雅黑" charset="0"/>
-                        <a:ea typeface="微软雅黑" charset="0"/>
-                        <a:cs typeface="微软雅黑" charset="0"/>
+                      <a:endParaRPr lang="en-US" sz="1400" dirty="0">
+                        <a:latin typeface="微软雅黑" panose="020B0503020204020204" pitchFamily="34" charset="-122"/>
+                        <a:ea typeface="微软雅黑" panose="020B0503020204020204" pitchFamily="34" charset="-122"/>
+                        <a:cs typeface="微软雅黑" panose="020B0503020204020204" pitchFamily="34" charset="-122"/>
                       </a:endParaRPr>
                     </a:p>
                   </a:txBody>
-                  <a:tcPr marL="91440" marR="91440" marT="45720" marB="45720" anchor="ctr">
-                    <a:lnL w="9525" cap="flat" cmpd="sng" algn="ctr">
-                      <a:solidFill>
-                        <a:srgbClr val="D8DBE0"/>
-                      </a:solidFill>
-                      <a:prstDash val="solid"/>
-                      <a:round/>
-                      <a:headEnd type="none" w="med" len="med"/>
-                      <a:tailEnd type="none" w="med" len="med"/>
-                    </a:lnL>
-                    <a:lnR w="9525" cap="flat" cmpd="sng" algn="ctr">
-                      <a:solidFill>
-                        <a:srgbClr val="D8DBE0"/>
-                      </a:solidFill>
-                      <a:prstDash val="solid"/>
-                      <a:round/>
-                      <a:headEnd type="none" w="med" len="med"/>
-                      <a:tailEnd type="none" w="med" len="med"/>
-                    </a:lnR>
-                    <a:lnT w="9525" cap="flat" cmpd="sng" algn="ctr">
-                      <a:solidFill>
-                        <a:srgbClr val="D8DBE0"/>
-                      </a:solidFill>
-                      <a:prstDash val="solid"/>
-                      <a:round/>
-                      <a:headEnd type="none" w="med" len="med"/>
-                      <a:tailEnd type="none" w="med" len="med"/>
-                    </a:lnT>
-                    <a:lnB w="9525" cap="flat" cmpd="sng" algn="ctr">
-                      <a:solidFill>
-                        <a:srgbClr val="D8DBE0"/>
-                      </a:solidFill>
-                      <a:prstDash val="solid"/>
-                      <a:round/>
-                      <a:headEnd type="none" w="med" len="med"/>
-                      <a:tailEnd type="none" w="med" len="med"/>
-                    </a:lnB>
-                    <a:solidFill>
-                      <a:srgbClr val="FFFFFF"/>
-                    </a:solidFill>
-                  </a:tcPr>
-                </a:tc>
-                <a:tc>
-                  <a:txBody>
-                    <a:bodyPr/>
-                    <a:lstStyle/>
-                    <a:p>
-                      <a:pPr algn="ctr" indent="0" marL="0">
-                        <a:buNone/>
-                      </a:pPr>
-                      <a:r>
-                        <a:rPr lang="en-US" sz="1500" dirty="0">
-                          <a:solidFill>
-                            <a:srgbClr val="1F2329"/>
-                          </a:solidFill>
-                          <a:latin typeface="微软雅黑" pitchFamily="34" charset="0"/>
-                          <a:ea typeface="微软雅黑" pitchFamily="34" charset="-122"/>
-                          <a:cs typeface="微软雅黑" pitchFamily="34" charset="-120"/>
-                        </a:rPr>
-                        <a:t>b)</a:t>
-                      </a:r>
-                      <a:endParaRPr lang="en-US" sz="1500" dirty="0">
-                        <a:latin typeface="微软雅黑" charset="0"/>
-                        <a:ea typeface="微软雅黑" charset="0"/>
-                        <a:cs typeface="微软雅黑" charset="0"/>
-                      </a:endParaRPr>
-                    </a:p>
-                  </a:txBody>
-                  <a:tcPr marL="91440" marR="91440" marT="45720" marB="45720" anchor="ctr">
+                  <a:tcPr anchor="ctr">
                     <a:lnL w="9525" cap="flat" cmpd="sng" algn="ctr">
                       <a:solidFill>
                         <a:srgbClr val="D8DBE0"/>
@@ -8101,28 +5810,28 @@
                     <a:bodyPr/>
                     <a:lstStyle/>
                     <a:p>
-                      <a:pPr algn="ctr" indent="0" marL="0">
+                      <a:pPr marL="0" indent="0" algn="ctr">
                         <a:buNone/>
                       </a:pPr>
                       <a:r>
-                        <a:rPr lang="en-US" sz="1500" dirty="0">
+                        <a:rPr lang="en-US" sz="1400" dirty="0">
                           <a:solidFill>
                             <a:srgbClr val="1F2329"/>
                           </a:solidFill>
-                          <a:latin typeface="微软雅黑" pitchFamily="34" charset="0"/>
-                          <a:ea typeface="微软雅黑" pitchFamily="34" charset="-122"/>
-                          <a:cs typeface="微软雅黑" pitchFamily="34" charset="-120"/>
+                          <a:latin typeface="微软雅黑" panose="020B0503020204020204" pitchFamily="34" charset="-122"/>
+                          <a:ea typeface="微软雅黑" panose="020B0503020204020204" pitchFamily="34" charset="-122"/>
+                          <a:cs typeface="微软雅黑" panose="020B0503020204020204" pitchFamily="34" charset="-120"/>
                         </a:rPr>
                         <a:t>指针传参</a:t>
                       </a:r>
-                      <a:endParaRPr lang="en-US" sz="1500" dirty="0">
-                        <a:latin typeface="微软雅黑" charset="0"/>
-                        <a:ea typeface="微软雅黑" charset="0"/>
-                        <a:cs typeface="微软雅黑" charset="0"/>
+                      <a:endParaRPr lang="en-US" sz="1400" dirty="0">
+                        <a:latin typeface="微软雅黑" panose="020B0503020204020204" pitchFamily="34" charset="-122"/>
+                        <a:ea typeface="微软雅黑" panose="020B0503020204020204" pitchFamily="34" charset="-122"/>
+                        <a:cs typeface="微软雅黑" panose="020B0503020204020204" pitchFamily="34" charset="-122"/>
                       </a:endParaRPr>
                     </a:p>
                   </a:txBody>
-                  <a:tcPr marL="91440" marR="91440" marT="45720" marB="45720" anchor="ctr">
+                  <a:tcPr anchor="ctr">
                     <a:lnL w="9525" cap="flat" cmpd="sng" algn="ctr">
                       <a:solidFill>
                         <a:srgbClr val="D8DBE0"/>
@@ -8169,28 +5878,28 @@
                     <a:bodyPr/>
                     <a:lstStyle/>
                     <a:p>
-                      <a:pPr algn="ctr" indent="0" marL="0">
+                      <a:pPr marL="0" indent="0" algn="ctr">
                         <a:buNone/>
                       </a:pPr>
                       <a:r>
-                        <a:rPr lang="en-US" sz="1500" dirty="0">
+                        <a:rPr lang="en-US" sz="1400" dirty="0">
                           <a:solidFill>
                             <a:srgbClr val="1F2329"/>
                           </a:solidFill>
-                          <a:latin typeface="微软雅黑" pitchFamily="34" charset="0"/>
-                          <a:ea typeface="微软雅黑" pitchFamily="34" charset="-122"/>
-                          <a:cs typeface="微软雅黑" pitchFamily="34" charset="-120"/>
+                          <a:latin typeface="微软雅黑" panose="020B0503020204020204" pitchFamily="34" charset="-122"/>
+                          <a:ea typeface="微软雅黑" panose="020B0503020204020204" pitchFamily="34" charset="-122"/>
+                          <a:cs typeface="微软雅黑" panose="020B0503020204020204" pitchFamily="34" charset="-120"/>
                         </a:rPr>
                         <a:t>地址</a:t>
                       </a:r>
-                      <a:endParaRPr lang="en-US" sz="1500" dirty="0">
-                        <a:latin typeface="微软雅黑" charset="0"/>
-                        <a:ea typeface="微软雅黑" charset="0"/>
-                        <a:cs typeface="微软雅黑" charset="0"/>
+                      <a:endParaRPr lang="en-US" sz="1400" dirty="0">
+                        <a:latin typeface="微软雅黑" panose="020B0503020204020204" pitchFamily="34" charset="-122"/>
+                        <a:ea typeface="微软雅黑" panose="020B0503020204020204" pitchFamily="34" charset="-122"/>
+                        <a:cs typeface="微软雅黑" panose="020B0503020204020204" pitchFamily="34" charset="-122"/>
                       </a:endParaRPr>
                     </a:p>
                   </a:txBody>
-                  <a:tcPr marL="91440" marR="91440" marT="45720" marB="45720" anchor="ctr">
+                  <a:tcPr anchor="ctr">
                     <a:lnL w="9525" cap="flat" cmpd="sng" algn="ctr">
                       <a:solidFill>
                         <a:srgbClr val="D8DBE0"/>
@@ -8237,28 +5946,28 @@
                     <a:bodyPr/>
                     <a:lstStyle/>
                     <a:p>
-                      <a:pPr algn="ctr" indent="0" marL="0">
+                      <a:pPr marL="0" indent="0" algn="ctr">
                         <a:buNone/>
                       </a:pPr>
                       <a:r>
-                        <a:rPr lang="en-US" sz="1500" dirty="0">
+                        <a:rPr lang="en-US" sz="1400" dirty="0">
                           <a:solidFill>
                             <a:srgbClr val="1F2329"/>
                           </a:solidFill>
-                          <a:latin typeface="微软雅黑" pitchFamily="34" charset="0"/>
-                          <a:ea typeface="微软雅黑" pitchFamily="34" charset="-122"/>
-                          <a:cs typeface="微软雅黑" pitchFamily="34" charset="-120"/>
+                          <a:latin typeface="微软雅黑" panose="020B0503020204020204" pitchFamily="34" charset="-122"/>
+                          <a:ea typeface="微软雅黑" panose="020B0503020204020204" pitchFamily="34" charset="-122"/>
+                          <a:cs typeface="微软雅黑" panose="020B0503020204020204" pitchFamily="34" charset="-120"/>
                         </a:rPr>
                         <a:t>能</a:t>
                       </a:r>
-                      <a:endParaRPr lang="en-US" sz="1500" dirty="0">
-                        <a:latin typeface="微软雅黑" charset="0"/>
-                        <a:ea typeface="微软雅黑" charset="0"/>
-                        <a:cs typeface="微软雅黑" charset="0"/>
+                      <a:endParaRPr lang="en-US" sz="1400" dirty="0">
+                        <a:latin typeface="微软雅黑" panose="020B0503020204020204" pitchFamily="34" charset="-122"/>
+                        <a:ea typeface="微软雅黑" panose="020B0503020204020204" pitchFamily="34" charset="-122"/>
+                        <a:cs typeface="微软雅黑" panose="020B0503020204020204" pitchFamily="34" charset="-122"/>
                       </a:endParaRPr>
                     </a:p>
                   </a:txBody>
-                  <a:tcPr marL="91440" marR="91440" marT="45720" marB="45720" anchor="ctr">
+                  <a:tcPr anchor="ctr">
                     <a:lnL w="9525" cap="flat" cmpd="sng" algn="ctr">
                       <a:solidFill>
                         <a:srgbClr val="D8DBE0"/>
@@ -8305,96 +6014,28 @@
                     <a:bodyPr/>
                     <a:lstStyle/>
                     <a:p>
-                      <a:pPr algn="ctr" indent="0" marL="0">
+                      <a:pPr marL="0" indent="0" algn="ctr">
                         <a:buNone/>
                       </a:pPr>
                       <a:r>
-                        <a:rPr lang="en-US" sz="1500" dirty="0">
+                        <a:rPr lang="en-US" sz="1400" dirty="0">
                           <a:solidFill>
                             <a:srgbClr val="1F2329"/>
                           </a:solidFill>
-                          <a:latin typeface="微软雅黑" pitchFamily="34" charset="0"/>
-                          <a:ea typeface="微软雅黑" pitchFamily="34" charset="-122"/>
-                          <a:cs typeface="微软雅黑" pitchFamily="34" charset="-120"/>
+                          <a:latin typeface="微软雅黑" panose="020B0503020204020204" pitchFamily="34" charset="-122"/>
+                          <a:ea typeface="微软雅黑" panose="020B0503020204020204" pitchFamily="34" charset="-122"/>
+                          <a:cs typeface="微软雅黑" panose="020B0503020204020204" pitchFamily="34" charset="-120"/>
                         </a:rPr>
                         <a:t>swap(&amp;a</a:t>
                       </a:r>
-                      <a:endParaRPr lang="en-US" sz="1500" dirty="0">
-                        <a:latin typeface="微软雅黑" charset="0"/>
-                        <a:ea typeface="微软雅黑" charset="0"/>
-                        <a:cs typeface="微软雅黑" charset="0"/>
+                      <a:endParaRPr lang="en-US" sz="1400" dirty="0">
+                        <a:latin typeface="微软雅黑" panose="020B0503020204020204" pitchFamily="34" charset="-122"/>
+                        <a:ea typeface="微软雅黑" panose="020B0503020204020204" pitchFamily="34" charset="-122"/>
+                        <a:cs typeface="微软雅黑" panose="020B0503020204020204" pitchFamily="34" charset="-122"/>
                       </a:endParaRPr>
                     </a:p>
                   </a:txBody>
-                  <a:tcPr marL="91440" marR="91440" marT="45720" marB="45720" anchor="ctr">
-                    <a:lnL w="9525" cap="flat" cmpd="sng" algn="ctr">
-                      <a:solidFill>
-                        <a:srgbClr val="D8DBE0"/>
-                      </a:solidFill>
-                      <a:prstDash val="solid"/>
-                      <a:round/>
-                      <a:headEnd type="none" w="med" len="med"/>
-                      <a:tailEnd type="none" w="med" len="med"/>
-                    </a:lnL>
-                    <a:lnR w="9525" cap="flat" cmpd="sng" algn="ctr">
-                      <a:solidFill>
-                        <a:srgbClr val="D8DBE0"/>
-                      </a:solidFill>
-                      <a:prstDash val="solid"/>
-                      <a:round/>
-                      <a:headEnd type="none" w="med" len="med"/>
-                      <a:tailEnd type="none" w="med" len="med"/>
-                    </a:lnR>
-                    <a:lnT w="9525" cap="flat" cmpd="sng" algn="ctr">
-                      <a:solidFill>
-                        <a:srgbClr val="D8DBE0"/>
-                      </a:solidFill>
-                      <a:prstDash val="solid"/>
-                      <a:round/>
-                      <a:headEnd type="none" w="med" len="med"/>
-                      <a:tailEnd type="none" w="med" len="med"/>
-                    </a:lnT>
-                    <a:lnB w="9525" cap="flat" cmpd="sng" algn="ctr">
-                      <a:solidFill>
-                        <a:srgbClr val="D8DBE0"/>
-                      </a:solidFill>
-                      <a:prstDash val="solid"/>
-                      <a:round/>
-                      <a:headEnd type="none" w="med" len="med"/>
-                      <a:tailEnd type="none" w="med" len="med"/>
-                    </a:lnB>
-                    <a:solidFill>
-                      <a:srgbClr val="FFFFFF"/>
-                    </a:solidFill>
-                  </a:tcPr>
-                </a:tc>
-                <a:tc>
-                  <a:txBody>
-                    <a:bodyPr/>
-                    <a:lstStyle/>
-                    <a:p>
-                      <a:pPr algn="ctr" indent="0" marL="0">
-                        <a:buNone/>
-                      </a:pPr>
-                      <a:r>
-                        <a:rPr lang="en-US" sz="1500" dirty="0">
-                          <a:solidFill>
-                            <a:srgbClr val="1F2329"/>
-                          </a:solidFill>
-                          <a:latin typeface="微软雅黑" pitchFamily="34" charset="0"/>
-                          <a:ea typeface="微软雅黑" pitchFamily="34" charset="-122"/>
-                          <a:cs typeface="微软雅黑" pitchFamily="34" charset="-120"/>
-                        </a:rPr>
-                        <a:t>null</a:t>
-                      </a:r>
-                      <a:endParaRPr lang="en-US" sz="1500" dirty="0">
-                        <a:latin typeface="微软雅黑" charset="0"/>
-                        <a:ea typeface="微软雅黑" charset="0"/>
-                        <a:cs typeface="微软雅黑" charset="0"/>
-                      </a:endParaRPr>
-                    </a:p>
-                  </a:txBody>
-                  <a:tcPr marL="91440" marR="91440" marT="45720" marB="45720" anchor="ctr">
+                  <a:tcPr anchor="ctr">
                     <a:lnL w="9525" cap="flat" cmpd="sng" algn="ctr">
                       <a:solidFill>
                         <a:srgbClr val="D8DBE0"/>
@@ -8443,28 +6084,28 @@
                     <a:bodyPr/>
                     <a:lstStyle/>
                     <a:p>
-                      <a:pPr algn="ctr" indent="0" marL="0">
+                      <a:pPr marL="0" indent="0" algn="ctr">
                         <a:buNone/>
                       </a:pPr>
                       <a:r>
-                        <a:rPr lang="en-US" sz="1500" dirty="0">
+                        <a:rPr lang="en-US" sz="1400" dirty="0">
                           <a:solidFill>
                             <a:srgbClr val="1F2329"/>
                           </a:solidFill>
-                          <a:latin typeface="微软雅黑" pitchFamily="34" charset="0"/>
-                          <a:ea typeface="微软雅黑" pitchFamily="34" charset="-122"/>
-                          <a:cs typeface="微软雅黑" pitchFamily="34" charset="-120"/>
+                          <a:latin typeface="微软雅黑" panose="020B0503020204020204" pitchFamily="34" charset="-122"/>
+                          <a:ea typeface="微软雅黑" panose="020B0503020204020204" pitchFamily="34" charset="-122"/>
+                          <a:cs typeface="微软雅黑" panose="020B0503020204020204" pitchFamily="34" charset="-120"/>
                         </a:rPr>
                         <a:t>引用传参</a:t>
                       </a:r>
-                      <a:endParaRPr lang="en-US" sz="1500" dirty="0">
-                        <a:latin typeface="微软雅黑" charset="0"/>
-                        <a:ea typeface="微软雅黑" charset="0"/>
-                        <a:cs typeface="微软雅黑" charset="0"/>
+                      <a:endParaRPr lang="en-US" sz="1400" dirty="0">
+                        <a:latin typeface="微软雅黑" panose="020B0503020204020204" pitchFamily="34" charset="-122"/>
+                        <a:ea typeface="微软雅黑" panose="020B0503020204020204" pitchFamily="34" charset="-122"/>
+                        <a:cs typeface="微软雅黑" panose="020B0503020204020204" pitchFamily="34" charset="-122"/>
                       </a:endParaRPr>
                     </a:p>
                   </a:txBody>
-                  <a:tcPr marL="91440" marR="91440" marT="45720" marB="45720" anchor="ctr">
+                  <a:tcPr anchor="ctr">
                     <a:lnL w="9525" cap="flat" cmpd="sng" algn="ctr">
                       <a:solidFill>
                         <a:srgbClr val="D8DBE0"/>
@@ -8511,28 +6152,28 @@
                     <a:bodyPr/>
                     <a:lstStyle/>
                     <a:p>
-                      <a:pPr algn="ctr" indent="0" marL="0">
+                      <a:pPr marL="0" indent="0" algn="ctr">
                         <a:buNone/>
                       </a:pPr>
                       <a:r>
-                        <a:rPr lang="en-US" sz="1500" dirty="0">
+                        <a:rPr lang="en-US" sz="1400" dirty="0">
                           <a:solidFill>
                             <a:srgbClr val="1F2329"/>
                           </a:solidFill>
-                          <a:latin typeface="微软雅黑" pitchFamily="34" charset="0"/>
-                          <a:ea typeface="微软雅黑" pitchFamily="34" charset="-122"/>
-                          <a:cs typeface="微软雅黑" pitchFamily="34" charset="-120"/>
+                          <a:latin typeface="微软雅黑" panose="020B0503020204020204" pitchFamily="34" charset="-122"/>
+                          <a:ea typeface="微软雅黑" panose="020B0503020204020204" pitchFamily="34" charset="-122"/>
+                          <a:cs typeface="微软雅黑" panose="020B0503020204020204" pitchFamily="34" charset="-120"/>
                         </a:rPr>
                         <a:t>别名</a:t>
                       </a:r>
-                      <a:endParaRPr lang="en-US" sz="1500" dirty="0">
-                        <a:latin typeface="微软雅黑" charset="0"/>
-                        <a:ea typeface="微软雅黑" charset="0"/>
-                        <a:cs typeface="微软雅黑" charset="0"/>
+                      <a:endParaRPr lang="en-US" sz="1400" dirty="0">
+                        <a:latin typeface="微软雅黑" panose="020B0503020204020204" pitchFamily="34" charset="-122"/>
+                        <a:ea typeface="微软雅黑" panose="020B0503020204020204" pitchFamily="34" charset="-122"/>
+                        <a:cs typeface="微软雅黑" panose="020B0503020204020204" pitchFamily="34" charset="-122"/>
                       </a:endParaRPr>
                     </a:p>
                   </a:txBody>
-                  <a:tcPr marL="91440" marR="91440" marT="45720" marB="45720" anchor="ctr">
+                  <a:tcPr anchor="ctr">
                     <a:lnL w="9525" cap="flat" cmpd="sng" algn="ctr">
                       <a:solidFill>
                         <a:srgbClr val="D8DBE0"/>
@@ -8579,28 +6220,28 @@
                     <a:bodyPr/>
                     <a:lstStyle/>
                     <a:p>
-                      <a:pPr algn="ctr" indent="0" marL="0">
+                      <a:pPr marL="0" indent="0" algn="ctr">
                         <a:buNone/>
                       </a:pPr>
                       <a:r>
-                        <a:rPr lang="en-US" sz="1500" dirty="0">
+                        <a:rPr lang="en-US" sz="1400" dirty="0">
                           <a:solidFill>
                             <a:srgbClr val="1F2329"/>
                           </a:solidFill>
-                          <a:latin typeface="微软雅黑" pitchFamily="34" charset="0"/>
-                          <a:ea typeface="微软雅黑" pitchFamily="34" charset="-122"/>
-                          <a:cs typeface="微软雅黑" pitchFamily="34" charset="-120"/>
+                          <a:latin typeface="微软雅黑" panose="020B0503020204020204" pitchFamily="34" charset="-122"/>
+                          <a:ea typeface="微软雅黑" panose="020B0503020204020204" pitchFamily="34" charset="-122"/>
+                          <a:cs typeface="微软雅黑" panose="020B0503020204020204" pitchFamily="34" charset="-120"/>
                         </a:rPr>
                         <a:t>能</a:t>
                       </a:r>
-                      <a:endParaRPr lang="en-US" sz="1500" dirty="0">
-                        <a:latin typeface="微软雅黑" charset="0"/>
-                        <a:ea typeface="微软雅黑" charset="0"/>
-                        <a:cs typeface="微软雅黑" charset="0"/>
+                      <a:endParaRPr lang="en-US" sz="1400" dirty="0">
+                        <a:latin typeface="微软雅黑" panose="020B0503020204020204" pitchFamily="34" charset="-122"/>
+                        <a:ea typeface="微软雅黑" panose="020B0503020204020204" pitchFamily="34" charset="-122"/>
+                        <a:cs typeface="微软雅黑" panose="020B0503020204020204" pitchFamily="34" charset="-122"/>
                       </a:endParaRPr>
                     </a:p>
                   </a:txBody>
-                  <a:tcPr marL="91440" marR="91440" marT="45720" marB="45720" anchor="ctr">
+                  <a:tcPr anchor="ctr">
                     <a:lnL w="9525" cap="flat" cmpd="sng" algn="ctr">
                       <a:solidFill>
                         <a:srgbClr val="D8DBE0"/>
@@ -8647,96 +6288,28 @@
                     <a:bodyPr/>
                     <a:lstStyle/>
                     <a:p>
-                      <a:pPr algn="ctr" indent="0" marL="0">
+                      <a:pPr marL="0" indent="0" algn="ctr">
                         <a:buNone/>
                       </a:pPr>
                       <a:r>
-                        <a:rPr lang="en-US" sz="1500" dirty="0">
+                        <a:rPr lang="en-US" sz="1400" dirty="0">
                           <a:solidFill>
                             <a:srgbClr val="1F2329"/>
                           </a:solidFill>
-                          <a:latin typeface="微软雅黑" pitchFamily="34" charset="0"/>
-                          <a:ea typeface="微软雅黑" pitchFamily="34" charset="-122"/>
-                          <a:cs typeface="微软雅黑" pitchFamily="34" charset="-120"/>
+                          <a:latin typeface="微软雅黑" panose="020B0503020204020204" pitchFamily="34" charset="-122"/>
+                          <a:ea typeface="微软雅黑" panose="020B0503020204020204" pitchFamily="34" charset="-122"/>
+                          <a:cs typeface="微软雅黑" panose="020B0503020204020204" pitchFamily="34" charset="-120"/>
                         </a:rPr>
                         <a:t>swap(a</a:t>
                       </a:r>
-                      <a:endParaRPr lang="en-US" sz="1500" dirty="0">
-                        <a:latin typeface="微软雅黑" charset="0"/>
-                        <a:ea typeface="微软雅黑" charset="0"/>
-                        <a:cs typeface="微软雅黑" charset="0"/>
+                      <a:endParaRPr lang="en-US" sz="1400" dirty="0">
+                        <a:latin typeface="微软雅黑" panose="020B0503020204020204" pitchFamily="34" charset="-122"/>
+                        <a:ea typeface="微软雅黑" panose="020B0503020204020204" pitchFamily="34" charset="-122"/>
+                        <a:cs typeface="微软雅黑" panose="020B0503020204020204" pitchFamily="34" charset="-122"/>
                       </a:endParaRPr>
                     </a:p>
                   </a:txBody>
-                  <a:tcPr marL="91440" marR="91440" marT="45720" marB="45720" anchor="ctr">
-                    <a:lnL w="9525" cap="flat" cmpd="sng" algn="ctr">
-                      <a:solidFill>
-                        <a:srgbClr val="D8DBE0"/>
-                      </a:solidFill>
-                      <a:prstDash val="solid"/>
-                      <a:round/>
-                      <a:headEnd type="none" w="med" len="med"/>
-                      <a:tailEnd type="none" w="med" len="med"/>
-                    </a:lnL>
-                    <a:lnR w="9525" cap="flat" cmpd="sng" algn="ctr">
-                      <a:solidFill>
-                        <a:srgbClr val="D8DBE0"/>
-                      </a:solidFill>
-                      <a:prstDash val="solid"/>
-                      <a:round/>
-                      <a:headEnd type="none" w="med" len="med"/>
-                      <a:tailEnd type="none" w="med" len="med"/>
-                    </a:lnR>
-                    <a:lnT w="9525" cap="flat" cmpd="sng" algn="ctr">
-                      <a:solidFill>
-                        <a:srgbClr val="D8DBE0"/>
-                      </a:solidFill>
-                      <a:prstDash val="solid"/>
-                      <a:round/>
-                      <a:headEnd type="none" w="med" len="med"/>
-                      <a:tailEnd type="none" w="med" len="med"/>
-                    </a:lnT>
-                    <a:lnB w="9525" cap="flat" cmpd="sng" algn="ctr">
-                      <a:solidFill>
-                        <a:srgbClr val="D8DBE0"/>
-                      </a:solidFill>
-                      <a:prstDash val="solid"/>
-                      <a:round/>
-                      <a:headEnd type="none" w="med" len="med"/>
-                      <a:tailEnd type="none" w="med" len="med"/>
-                    </a:lnB>
-                    <a:solidFill>
-                      <a:srgbClr val="FFFFFF"/>
-                    </a:solidFill>
-                  </a:tcPr>
-                </a:tc>
-                <a:tc>
-                  <a:txBody>
-                    <a:bodyPr/>
-                    <a:lstStyle/>
-                    <a:p>
-                      <a:pPr algn="ctr" indent="0" marL="0">
-                        <a:buNone/>
-                      </a:pPr>
-                      <a:r>
-                        <a:rPr lang="en-US" sz="1500" dirty="0">
-                          <a:solidFill>
-                            <a:srgbClr val="1F2329"/>
-                          </a:solidFill>
-                          <a:latin typeface="微软雅黑" pitchFamily="34" charset="0"/>
-                          <a:ea typeface="微软雅黑" pitchFamily="34" charset="-122"/>
-                          <a:cs typeface="微软雅黑" pitchFamily="34" charset="-120"/>
-                        </a:rPr>
-                        <a:t>b)</a:t>
-                      </a:r>
-                      <a:endParaRPr lang="en-US" sz="1500" dirty="0">
-                        <a:latin typeface="微软雅黑" charset="0"/>
-                        <a:ea typeface="微软雅黑" charset="0"/>
-                        <a:cs typeface="微软雅黑" charset="0"/>
-                      </a:endParaRPr>
-                    </a:p>
-                  </a:txBody>
-                  <a:tcPr marL="91440" marR="91440" marT="45720" marB="45720" anchor="ctr">
+                  <a:tcPr anchor="ctr">
                     <a:lnL w="9525" cap="flat" cmpd="sng" algn="ctr">
                       <a:solidFill>
                         <a:srgbClr val="D8DBE0"/>
@@ -8791,20 +6364,962 @@
         </p:nvSpPr>
         <p:spPr>
           <a:xfrm>
-            <a:off x="822960" y="4306824"/>
+            <a:off x="896112" y="4306824"/>
+            <a:ext cx="10454335" cy="378714"/>
+          </a:xfrm>
+          <a:prstGeom prst="rect">
+            <a:avLst/>
+          </a:prstGeom>
+          <a:noFill/>
+        </p:spPr>
+        <p:txBody>
+          <a:bodyPr wrap="square" rtlCol="0" anchor="t"/>
+          <a:lstStyle/>
+          <a:p>
+            <a:pPr marL="0" indent="0" algn="l">
+              <a:lnSpc>
+                <a:spcPct val="115000"/>
+              </a:lnSpc>
+              <a:buNone/>
+            </a:pPr>
+            <a:r>
+              <a:rPr lang="en-US" sz="1700" b="1" dirty="0">
+                <a:solidFill>
+                  <a:srgbClr val="1F4E9C"/>
+                </a:solidFill>
+                <a:latin typeface="微软雅黑" panose="020B0503020204020204" pitchFamily="34" charset="-122"/>
+                <a:ea typeface="微软雅黑" panose="020B0503020204020204" pitchFamily="34" charset="-122"/>
+                <a:cs typeface="微软雅黑" panose="020B0503020204020204" pitchFamily="34" charset="-120"/>
+              </a:rPr>
+              <a:t>•  </a:t>
+            </a:r>
+            <a:r>
+              <a:rPr lang="en-US" sz="1700" dirty="0">
+                <a:solidFill>
+                  <a:srgbClr val="000000"/>
+                </a:solidFill>
+              </a:rPr>
+              <a:t>读代码先看参数表再看函数体：光杆类型改不动，带*或&amp;才改得动</a:t>
+            </a:r>
+            <a:endParaRPr lang="en-US" sz="1700" dirty="0"/>
+          </a:p>
+        </p:txBody>
+      </p:sp>
+      <p:sp>
+        <p:nvSpPr>
+          <p:cNvPr id="7" name="Text 4"/>
+          <p:cNvSpPr/>
+          <p:nvPr/>
+        </p:nvSpPr>
+        <p:spPr>
+          <a:xfrm>
+            <a:off x="896112" y="4758690"/>
+            <a:ext cx="10454335" cy="378714"/>
+          </a:xfrm>
+          <a:prstGeom prst="rect">
+            <a:avLst/>
+          </a:prstGeom>
+          <a:noFill/>
+        </p:spPr>
+        <p:txBody>
+          <a:bodyPr wrap="square" rtlCol="0" anchor="t"/>
+          <a:lstStyle/>
+          <a:p>
+            <a:pPr marL="0" indent="0" algn="l">
+              <a:lnSpc>
+                <a:spcPct val="115000"/>
+              </a:lnSpc>
+              <a:buNone/>
+            </a:pPr>
+            <a:r>
+              <a:rPr lang="en-US" sz="1700" b="1" dirty="0">
+                <a:solidFill>
+                  <a:srgbClr val="1F4E9C"/>
+                </a:solidFill>
+                <a:latin typeface="微软雅黑" panose="020B0503020204020204" pitchFamily="34" charset="-122"/>
+                <a:ea typeface="微软雅黑" panose="020B0503020204020204" pitchFamily="34" charset="-122"/>
+                <a:cs typeface="微软雅黑" panose="020B0503020204020204" pitchFamily="34" charset="-120"/>
+              </a:rPr>
+              <a:t>•  </a:t>
+            </a:r>
+            <a:r>
+              <a:rPr lang="en-US" sz="1700" dirty="0">
+                <a:solidFill>
+                  <a:srgbClr val="000000"/>
+                </a:solidFill>
+              </a:rPr>
+              <a:t>只认参数表不认函数名：名字叫changeX，参数是int x，照样改不动</a:t>
+            </a:r>
+            <a:endParaRPr lang="en-US" sz="1700" dirty="0"/>
+          </a:p>
+        </p:txBody>
+      </p:sp>
+      <p:sp>
+        <p:nvSpPr>
+          <p:cNvPr id="5" name="Text 5"/>
+          <p:cNvSpPr/>
+          <p:nvPr/>
+        </p:nvSpPr>
+        <p:spPr>
+          <a:xfrm>
+            <a:off x="896112" y="5210556"/>
+            <a:ext cx="10454335" cy="378714"/>
+          </a:xfrm>
+          <a:prstGeom prst="rect">
+            <a:avLst/>
+          </a:prstGeom>
+          <a:noFill/>
+        </p:spPr>
+        <p:txBody>
+          <a:bodyPr wrap="square" rtlCol="0" anchor="t"/>
+          <a:lstStyle/>
+          <a:p>
+            <a:pPr marL="0" indent="0" algn="l">
+              <a:lnSpc>
+                <a:spcPct val="115000"/>
+              </a:lnSpc>
+              <a:buNone/>
+            </a:pPr>
+            <a:r>
+              <a:rPr lang="en-US" sz="1700" b="1" dirty="0">
+                <a:solidFill>
+                  <a:srgbClr val="1F4E9C"/>
+                </a:solidFill>
+                <a:latin typeface="微软雅黑" panose="020B0503020204020204" pitchFamily="34" charset="-122"/>
+                <a:ea typeface="微软雅黑" panose="020B0503020204020204" pitchFamily="34" charset="-122"/>
+                <a:cs typeface="微软雅黑" panose="020B0503020204020204" pitchFamily="34" charset="-120"/>
+              </a:rPr>
+              <a:t>•  </a:t>
+            </a:r>
+            <a:r>
+              <a:rPr lang="en-US" sz="1700" dirty="0">
+                <a:solidFill>
+                  <a:srgbClr val="000000"/>
+                </a:solidFill>
+              </a:rPr>
+              <a:t>只读不改用值传递；要改外面用引用，兼容纯C环境用指针</a:t>
+            </a:r>
+            <a:endParaRPr lang="en-US" sz="1700" dirty="0"/>
+          </a:p>
+        </p:txBody>
+      </p:sp>
+      <p:sp>
+        <p:nvSpPr>
+          <p:cNvPr id="9" name="Text 6"/>
+          <p:cNvSpPr/>
+          <p:nvPr/>
+        </p:nvSpPr>
+        <p:spPr>
+          <a:xfrm>
+            <a:off x="896112" y="5662422"/>
+            <a:ext cx="10454335" cy="378714"/>
+          </a:xfrm>
+          <a:prstGeom prst="rect">
+            <a:avLst/>
+          </a:prstGeom>
+          <a:noFill/>
+        </p:spPr>
+        <p:txBody>
+          <a:bodyPr wrap="square" rtlCol="0" anchor="t"/>
+          <a:lstStyle/>
+          <a:p>
+            <a:pPr marL="0" indent="0" algn="l">
+              <a:lnSpc>
+                <a:spcPct val="115000"/>
+              </a:lnSpc>
+              <a:buNone/>
+            </a:pPr>
+            <a:r>
+              <a:rPr lang="en-US" sz="1700" b="1" dirty="0">
+                <a:solidFill>
+                  <a:srgbClr val="1F4E9C"/>
+                </a:solidFill>
+                <a:latin typeface="微软雅黑" panose="020B0503020204020204" pitchFamily="34" charset="-122"/>
+                <a:ea typeface="微软雅黑" panose="020B0503020204020204" pitchFamily="34" charset="-122"/>
+                <a:cs typeface="微软雅黑" panose="020B0503020204020204" pitchFamily="34" charset="-120"/>
+              </a:rPr>
+              <a:t>•  </a:t>
+            </a:r>
+            <a:r>
+              <a:rPr lang="en-US" sz="1700" dirty="0">
+                <a:solidFill>
+                  <a:srgbClr val="000000"/>
+                </a:solidFill>
+              </a:rPr>
+              <a:t>传大块数据别用值传递；数组做参数只能指针传（int a[]就是int *a）</a:t>
+            </a:r>
+            <a:endParaRPr lang="en-US" sz="1700" dirty="0"/>
+          </a:p>
+        </p:txBody>
+      </p:sp>
+    </p:spTree>
+  </p:cSld>
+  <p:clrMapOvr>
+    <a:masterClrMapping/>
+  </p:clrMapOvr>
+</p:sld>
+</file>
+
+<file path=ppt/slides/slide8.xml><?xml version="1.0" encoding="utf-8"?>
+<p:sld xmlns:a="http://schemas.openxmlformats.org/drawingml/2006/main" xmlns:r="http://schemas.openxmlformats.org/officeDocument/2006/relationships" xmlns:p="http://schemas.openxmlformats.org/presentationml/2006/main">
+  <p:cSld>
+    <p:bg>
+      <p:bgPr>
+        <a:blipFill dpi="0" rotWithShape="1">
+          <a:blip r:embed="rId1">
+            <a:lum/>
+          </a:blip>
+          <a:srcRect/>
+          <a:stretch>
+            <a:fillRect/>
+          </a:stretch>
+        </a:blipFill>
+        <a:effectLst/>
+      </p:bgPr>
+    </p:bg>
+    <p:spTree>
+      <p:nvGrpSpPr>
+        <p:cNvPr id="1" name=""/>
+        <p:cNvGrpSpPr/>
+        <p:nvPr/>
+      </p:nvGrpSpPr>
+      <p:grpSpPr>
+        <a:xfrm>
+          <a:off x="0" y="0"/>
+          <a:ext cx="0" cy="0"/>
+          <a:chOff x="0" y="0"/>
+          <a:chExt cx="0" cy="0"/>
+        </a:xfrm>
+      </p:grpSpPr>
+      <p:sp>
+        <p:nvSpPr>
+          <p:cNvPr id="2" name="Text 0"/>
+          <p:cNvSpPr/>
+          <p:nvPr/>
+        </p:nvSpPr>
+        <p:spPr>
+          <a:xfrm>
+            <a:off x="10362895" y="6016752"/>
+            <a:ext cx="1463040" cy="320040"/>
+          </a:xfrm>
+          <a:prstGeom prst="rect">
+            <a:avLst/>
+          </a:prstGeom>
+          <a:noFill/>
+        </p:spPr>
+        <p:txBody>
+          <a:bodyPr wrap="square" rtlCol="0" anchor="ctr"/>
+          <a:lstStyle/>
+          <a:p>
+            <a:pPr marL="0" indent="0" algn="r">
+              <a:buNone/>
+            </a:pPr>
+            <a:r>
+              <a:rPr lang="en-US" sz="1000" dirty="0">
+                <a:solidFill>
+                  <a:srgbClr val="8A9099"/>
+                </a:solidFill>
+                <a:latin typeface="微软雅黑" panose="020B0503020204020204" pitchFamily="34" charset="-122"/>
+                <a:ea typeface="微软雅黑" panose="020B0503020204020204" pitchFamily="34" charset="-122"/>
+                <a:cs typeface="微软雅黑" panose="020B0503020204020204" pitchFamily="34" charset="-120"/>
+              </a:rPr>
+              <a:t>8 / 12</a:t>
+            </a:r>
+            <a:endParaRPr lang="en-US" sz="1000" dirty="0"/>
+          </a:p>
+        </p:txBody>
+      </p:sp>
+      <p:sp>
+        <p:nvSpPr>
+          <p:cNvPr id="3" name="Text 1"/>
+          <p:cNvSpPr/>
+          <p:nvPr/>
+        </p:nvSpPr>
+        <p:spPr>
+          <a:xfrm>
+            <a:off x="822960" y="960120"/>
+            <a:ext cx="10545775" cy="365760"/>
+          </a:xfrm>
+          <a:prstGeom prst="rect">
+            <a:avLst/>
+          </a:prstGeom>
+          <a:noFill/>
+        </p:spPr>
+        <p:txBody>
+          <a:bodyPr wrap="square" rtlCol="0" anchor="ctr"/>
+          <a:lstStyle/>
+          <a:p>
+            <a:pPr marL="0" indent="0" algn="l">
+              <a:buNone/>
+            </a:pPr>
+            <a:r>
+              <a:rPr lang="en-US" sz="1400" b="1" dirty="0">
+                <a:solidFill>
+                  <a:srgbClr val="1F4E9C"/>
+                </a:solidFill>
+                <a:latin typeface="微软雅黑" panose="020B0503020204020204" pitchFamily="34" charset="-122"/>
+                <a:ea typeface="微软雅黑" panose="020B0503020204020204" pitchFamily="34" charset="-122"/>
+                <a:cs typeface="微软雅黑" panose="020B0503020204020204" pitchFamily="34" charset="-120"/>
+              </a:rPr>
+              <a:t>伪代码语境</a:t>
+            </a:r>
+            <a:endParaRPr lang="en-US" sz="1400" dirty="0"/>
+          </a:p>
+        </p:txBody>
+      </p:sp>
+      <p:sp>
+        <p:nvSpPr>
+          <p:cNvPr id="4" name="Text 2"/>
+          <p:cNvSpPr/>
+          <p:nvPr/>
+        </p:nvSpPr>
+        <p:spPr>
+          <a:xfrm>
+            <a:off x="822960" y="1344168"/>
+            <a:ext cx="10545775" cy="731520"/>
+          </a:xfrm>
+          <a:prstGeom prst="rect">
+            <a:avLst/>
+          </a:prstGeom>
+          <a:noFill/>
+        </p:spPr>
+        <p:txBody>
+          <a:bodyPr wrap="square" rtlCol="0" anchor="ctr"/>
+          <a:lstStyle/>
+          <a:p>
+            <a:pPr marL="0" indent="0" algn="l">
+              <a:buNone/>
+            </a:pPr>
+            <a:r>
+              <a:rPr lang="en-US" sz="2800" b="1" dirty="0">
+                <a:solidFill>
+                  <a:srgbClr val="1F2329"/>
+                </a:solidFill>
+                <a:latin typeface="微软雅黑" panose="020B0503020204020204" pitchFamily="34" charset="-122"/>
+                <a:ea typeface="微软雅黑" panose="020B0503020204020204" pitchFamily="34" charset="-122"/>
+                <a:cs typeface="微软雅黑" panose="020B0503020204020204" pitchFamily="34" charset="-120"/>
+              </a:rPr>
+              <a:t>为什么伪代码的参数上常写&amp;</a:t>
+            </a:r>
+            <a:endParaRPr lang="en-US" sz="2800" dirty="0"/>
+          </a:p>
+        </p:txBody>
+      </p:sp>
+      <p:sp>
+        <p:nvSpPr>
+          <p:cNvPr id="5" name="Text 3"/>
+          <p:cNvSpPr/>
+          <p:nvPr/>
+        </p:nvSpPr>
+        <p:spPr>
+          <a:xfrm>
+            <a:off x="896112" y="2395728"/>
+            <a:ext cx="10454335" cy="397764"/>
+          </a:xfrm>
+          <a:prstGeom prst="rect">
+            <a:avLst/>
+          </a:prstGeom>
+          <a:noFill/>
+        </p:spPr>
+        <p:txBody>
+          <a:bodyPr wrap="square" rtlCol="0" anchor="t"/>
+          <a:lstStyle/>
+          <a:p>
+            <a:pPr marL="0" indent="0" algn="l">
+              <a:lnSpc>
+                <a:spcPct val="115000"/>
+              </a:lnSpc>
+              <a:buNone/>
+            </a:pPr>
+            <a:r>
+              <a:rPr lang="en-US" sz="1800" b="1" dirty="0">
+                <a:solidFill>
+                  <a:srgbClr val="1F4E9C"/>
+                </a:solidFill>
+                <a:latin typeface="微软雅黑" panose="020B0503020204020204" pitchFamily="34" charset="-122"/>
+                <a:ea typeface="微软雅黑" panose="020B0503020204020204" pitchFamily="34" charset="-122"/>
+                <a:cs typeface="微软雅黑" panose="020B0503020204020204" pitchFamily="34" charset="-120"/>
+              </a:rPr>
+              <a:t>•  </a:t>
+            </a:r>
+            <a:r>
+              <a:rPr lang="en-US" sz="1800" dirty="0">
+                <a:solidFill>
+                  <a:srgbClr val="000000"/>
+                </a:solidFill>
+              </a:rPr>
+              <a:t>初始化、插入这类函数要直接改传进来的结构，值传递改副本等于白干</a:t>
+            </a:r>
+            <a:endParaRPr lang="en-US" sz="1800" dirty="0"/>
+          </a:p>
+        </p:txBody>
+      </p:sp>
+      <p:sp>
+        <p:nvSpPr>
+          <p:cNvPr id="6" name="Text 4"/>
+          <p:cNvSpPr/>
+          <p:nvPr/>
+        </p:nvSpPr>
+        <p:spPr>
+          <a:xfrm>
+            <a:off x="896112" y="2866644"/>
+            <a:ext cx="10454335" cy="397764"/>
+          </a:xfrm>
+          <a:prstGeom prst="rect">
+            <a:avLst/>
+          </a:prstGeom>
+          <a:noFill/>
+        </p:spPr>
+        <p:txBody>
+          <a:bodyPr wrap="square" rtlCol="0" anchor="t"/>
+          <a:lstStyle/>
+          <a:p>
+            <a:pPr marL="0" indent="0" algn="l">
+              <a:lnSpc>
+                <a:spcPct val="115000"/>
+              </a:lnSpc>
+              <a:buNone/>
+            </a:pPr>
+            <a:r>
+              <a:rPr lang="en-US" sz="1800" b="1" dirty="0">
+                <a:solidFill>
+                  <a:srgbClr val="1F4E9C"/>
+                </a:solidFill>
+                <a:latin typeface="微软雅黑" panose="020B0503020204020204" pitchFamily="34" charset="-122"/>
+                <a:ea typeface="微软雅黑" panose="020B0503020204020204" pitchFamily="34" charset="-122"/>
+                <a:cs typeface="微软雅黑" panose="020B0503020204020204" pitchFamily="34" charset="-120"/>
+              </a:rPr>
+              <a:t>•  </a:t>
+            </a:r>
+            <a:r>
+              <a:rPr lang="en-US" sz="1800" dirty="0">
+                <a:solidFill>
+                  <a:srgbClr val="000000"/>
+                </a:solidFill>
+              </a:rPr>
+              <a:t>参数写&amp;，等于在函数头上写明：这个参数会改到调用者的数据</a:t>
+            </a:r>
+            <a:endParaRPr lang="en-US" sz="1800" dirty="0"/>
+          </a:p>
+        </p:txBody>
+      </p:sp>
+      <p:sp>
+        <p:nvSpPr>
+          <p:cNvPr id="7" name="Text 5"/>
+          <p:cNvSpPr/>
+          <p:nvPr/>
+        </p:nvSpPr>
+        <p:spPr>
+          <a:xfrm>
+            <a:off x="896112" y="3337560"/>
+            <a:ext cx="10454335" cy="397764"/>
+          </a:xfrm>
+          <a:prstGeom prst="rect">
+            <a:avLst/>
+          </a:prstGeom>
+          <a:noFill/>
+        </p:spPr>
+        <p:txBody>
+          <a:bodyPr wrap="square" rtlCol="0" anchor="t"/>
+          <a:lstStyle/>
+          <a:p>
+            <a:pPr marL="0" indent="0" algn="l">
+              <a:lnSpc>
+                <a:spcPct val="115000"/>
+              </a:lnSpc>
+              <a:buNone/>
+            </a:pPr>
+            <a:r>
+              <a:rPr lang="en-US" sz="1800" b="1" dirty="0">
+                <a:solidFill>
+                  <a:srgbClr val="1F4E9C"/>
+                </a:solidFill>
+                <a:latin typeface="微软雅黑" panose="020B0503020204020204" pitchFamily="34" charset="-122"/>
+                <a:ea typeface="微软雅黑" panose="020B0503020204020204" pitchFamily="34" charset="-122"/>
+                <a:cs typeface="微软雅黑" panose="020B0503020204020204" pitchFamily="34" charset="-120"/>
+              </a:rPr>
+              <a:t>•  </a:t>
+            </a:r>
+            <a:r>
+              <a:rPr lang="en-US" sz="1800" dirty="0">
+                <a:solidFill>
+                  <a:srgbClr val="000000"/>
+                </a:solidFill>
+              </a:rPr>
+              <a:t>读伪代码先看参数表：带&amp;的会动数据，不带&amp;的多半只读</a:t>
+            </a:r>
+            <a:endParaRPr lang="en-US" sz="1800" dirty="0"/>
+          </a:p>
+        </p:txBody>
+      </p:sp>
+      <p:sp>
+        <p:nvSpPr>
+          <p:cNvPr id="8" name="Text 6"/>
+          <p:cNvSpPr/>
+          <p:nvPr/>
+        </p:nvSpPr>
+        <p:spPr>
+          <a:xfrm>
+            <a:off x="896112" y="3808476"/>
+            <a:ext cx="10454335" cy="397764"/>
+          </a:xfrm>
+          <a:prstGeom prst="rect">
+            <a:avLst/>
+          </a:prstGeom>
+          <a:noFill/>
+        </p:spPr>
+        <p:txBody>
+          <a:bodyPr wrap="square" rtlCol="0" anchor="t"/>
+          <a:lstStyle/>
+          <a:p>
+            <a:pPr marL="0" indent="0" algn="l">
+              <a:lnSpc>
+                <a:spcPct val="115000"/>
+              </a:lnSpc>
+              <a:buNone/>
+            </a:pPr>
+            <a:r>
+              <a:rPr lang="en-US" sz="1800" b="1" dirty="0">
+                <a:solidFill>
+                  <a:srgbClr val="1F4E9C"/>
+                </a:solidFill>
+                <a:latin typeface="微软雅黑" panose="020B0503020204020204" pitchFamily="34" charset="-122"/>
+                <a:ea typeface="微软雅黑" panose="020B0503020204020204" pitchFamily="34" charset="-122"/>
+                <a:cs typeface="微软雅黑" panose="020B0503020204020204" pitchFamily="34" charset="-120"/>
+              </a:rPr>
+              <a:t>•  </a:t>
+            </a:r>
+            <a:r>
+              <a:rPr lang="en-US" sz="1800" dirty="0">
+                <a:solidFill>
+                  <a:srgbClr val="000000"/>
+                </a:solidFill>
+              </a:rPr>
+              <a:t>自己写函数先问一句：需要改传进来的东西吗，需要就加&amp;</a:t>
+            </a:r>
+            <a:endParaRPr lang="en-US" sz="1800" dirty="0"/>
+          </a:p>
+        </p:txBody>
+      </p:sp>
+      <p:sp>
+        <p:nvSpPr>
+          <p:cNvPr id="9" name="Text 7"/>
+          <p:cNvSpPr/>
+          <p:nvPr/>
+        </p:nvSpPr>
+        <p:spPr>
+          <a:xfrm>
+            <a:off x="896112" y="4279392"/>
+            <a:ext cx="10454335" cy="397764"/>
+          </a:xfrm>
+          <a:prstGeom prst="rect">
+            <a:avLst/>
+          </a:prstGeom>
+          <a:noFill/>
+        </p:spPr>
+        <p:txBody>
+          <a:bodyPr wrap="square" rtlCol="0" anchor="t"/>
+          <a:lstStyle/>
+          <a:p>
+            <a:pPr marL="0" indent="0" algn="l">
+              <a:lnSpc>
+                <a:spcPct val="115000"/>
+              </a:lnSpc>
+              <a:buNone/>
+            </a:pPr>
+            <a:r>
+              <a:rPr lang="en-US" sz="1800" b="1" dirty="0">
+                <a:solidFill>
+                  <a:srgbClr val="1F4E9C"/>
+                </a:solidFill>
+                <a:latin typeface="微软雅黑" panose="020B0503020204020204" pitchFamily="34" charset="-122"/>
+                <a:ea typeface="微软雅黑" panose="020B0503020204020204" pitchFamily="34" charset="-122"/>
+                <a:cs typeface="微软雅黑" panose="020B0503020204020204" pitchFamily="34" charset="-120"/>
+              </a:rPr>
+              <a:t>•  </a:t>
+            </a:r>
+            <a:r>
+              <a:rPr lang="en-US" sz="1800" dirty="0">
+                <a:solidFill>
+                  <a:srgbClr val="000000"/>
+                </a:solidFill>
+              </a:rPr>
+              <a:t>数据要交到函数外只有两条路：堆上malloc后交地址，或用引用参数写进去</a:t>
+            </a:r>
+            <a:endParaRPr lang="en-US" sz="1800" dirty="0"/>
+          </a:p>
+        </p:txBody>
+      </p:sp>
+      <p:sp>
+        <p:nvSpPr>
+          <p:cNvPr id="10" name="Text 8"/>
+          <p:cNvSpPr/>
+          <p:nvPr/>
+        </p:nvSpPr>
+        <p:spPr>
+          <a:xfrm>
+            <a:off x="896112" y="4750308"/>
+            <a:ext cx="10454335" cy="397764"/>
+          </a:xfrm>
+          <a:prstGeom prst="rect">
+            <a:avLst/>
+          </a:prstGeom>
+          <a:noFill/>
+        </p:spPr>
+        <p:txBody>
+          <a:bodyPr wrap="square" rtlCol="0" anchor="t"/>
+          <a:lstStyle/>
+          <a:p>
+            <a:pPr marL="0" indent="0" algn="l">
+              <a:lnSpc>
+                <a:spcPct val="115000"/>
+              </a:lnSpc>
+              <a:buNone/>
+            </a:pPr>
+            <a:r>
+              <a:rPr lang="en-US" sz="1800" b="1" dirty="0">
+                <a:solidFill>
+                  <a:srgbClr val="1F4E9C"/>
+                </a:solidFill>
+                <a:latin typeface="微软雅黑" panose="020B0503020204020204" pitchFamily="34" charset="-122"/>
+                <a:ea typeface="微软雅黑" panose="020B0503020204020204" pitchFamily="34" charset="-122"/>
+                <a:cs typeface="微软雅黑" panose="020B0503020204020204" pitchFamily="34" charset="-120"/>
+              </a:rPr>
+              <a:t>•  </a:t>
+            </a:r>
+            <a:r>
+              <a:rPr lang="en-US" sz="1800" dirty="0">
+                <a:solidFill>
+                  <a:srgbClr val="000000"/>
+                </a:solidFill>
+              </a:rPr>
+              <a:t>函数不能返回局部变量的地址：格子出函数就收回，交出去的是悬空指针</a:t>
+            </a:r>
+            <a:endParaRPr lang="en-US" sz="1800" dirty="0"/>
+          </a:p>
+        </p:txBody>
+      </p:sp>
+    </p:spTree>
+  </p:cSld>
+  <p:clrMapOvr>
+    <a:masterClrMapping/>
+  </p:clrMapOvr>
+</p:sld>
+</file>
+
+<file path=ppt/slides/slide9.xml><?xml version="1.0" encoding="utf-8"?>
+<p:sld xmlns:a="http://schemas.openxmlformats.org/drawingml/2006/main" xmlns:r="http://schemas.openxmlformats.org/officeDocument/2006/relationships" xmlns:p="http://schemas.openxmlformats.org/presentationml/2006/main">
+  <p:cSld>
+    <p:bg>
+      <p:bgPr>
+        <a:blipFill dpi="0" rotWithShape="1">
+          <a:blip r:embed="rId1">
+            <a:lum/>
+          </a:blip>
+          <a:srcRect/>
+          <a:stretch>
+            <a:fillRect/>
+          </a:stretch>
+        </a:blipFill>
+        <a:effectLst/>
+      </p:bgPr>
+    </p:bg>
+    <p:spTree>
+      <p:nvGrpSpPr>
+        <p:cNvPr id="1" name=""/>
+        <p:cNvGrpSpPr/>
+        <p:nvPr/>
+      </p:nvGrpSpPr>
+      <p:grpSpPr>
+        <a:xfrm>
+          <a:off x="0" y="0"/>
+          <a:ext cx="0" cy="0"/>
+          <a:chOff x="0" y="0"/>
+          <a:chExt cx="0" cy="0"/>
+        </a:xfrm>
+      </p:grpSpPr>
+      <p:sp>
+        <p:nvSpPr>
+          <p:cNvPr id="2" name="Text 0"/>
+          <p:cNvSpPr/>
+          <p:nvPr/>
+        </p:nvSpPr>
+        <p:spPr>
+          <a:xfrm>
+            <a:off x="10362895" y="6016752"/>
+            <a:ext cx="1463040" cy="320040"/>
+          </a:xfrm>
+          <a:prstGeom prst="rect">
+            <a:avLst/>
+          </a:prstGeom>
+          <a:noFill/>
+        </p:spPr>
+        <p:txBody>
+          <a:bodyPr wrap="square" rtlCol="0" anchor="ctr"/>
+          <a:lstStyle/>
+          <a:p>
+            <a:pPr marL="0" indent="0" algn="r">
+              <a:buNone/>
+            </a:pPr>
+            <a:r>
+              <a:rPr lang="en-US" sz="1000" dirty="0">
+                <a:solidFill>
+                  <a:srgbClr val="8A9099"/>
+                </a:solidFill>
+                <a:latin typeface="微软雅黑" panose="020B0503020204020204" pitchFamily="34" charset="-122"/>
+                <a:ea typeface="微软雅黑" panose="020B0503020204020204" pitchFamily="34" charset="-122"/>
+                <a:cs typeface="微软雅黑" panose="020B0503020204020204" pitchFamily="34" charset="-120"/>
+              </a:rPr>
+              <a:t>9 / 12</a:t>
+            </a:r>
+            <a:endParaRPr lang="en-US" sz="1000" dirty="0"/>
+          </a:p>
+        </p:txBody>
+      </p:sp>
+      <p:sp>
+        <p:nvSpPr>
+          <p:cNvPr id="3" name="Text 1"/>
+          <p:cNvSpPr/>
+          <p:nvPr/>
+        </p:nvSpPr>
+        <p:spPr>
+          <a:xfrm>
+            <a:off x="822960" y="960120"/>
+            <a:ext cx="10545775" cy="365760"/>
+          </a:xfrm>
+          <a:prstGeom prst="rect">
+            <a:avLst/>
+          </a:prstGeom>
+          <a:noFill/>
+        </p:spPr>
+        <p:txBody>
+          <a:bodyPr wrap="square" rtlCol="0" anchor="ctr"/>
+          <a:lstStyle/>
+          <a:p>
+            <a:pPr marL="0" indent="0" algn="l">
+              <a:buNone/>
+            </a:pPr>
+            <a:r>
+              <a:rPr lang="en-US" sz="1400" b="1" dirty="0">
+                <a:solidFill>
+                  <a:srgbClr val="1F4E9C"/>
+                </a:solidFill>
+                <a:latin typeface="微软雅黑" panose="020B0503020204020204" pitchFamily="34" charset="-122"/>
+                <a:ea typeface="微软雅黑" panose="020B0503020204020204" pitchFamily="34" charset="-122"/>
+                <a:cs typeface="微软雅黑" panose="020B0503020204020204" pitchFamily="34" charset="-120"/>
+              </a:rPr>
+              <a:t>本节小结</a:t>
+            </a:r>
+            <a:endParaRPr lang="en-US" sz="1400" dirty="0"/>
+          </a:p>
+        </p:txBody>
+      </p:sp>
+      <p:sp>
+        <p:nvSpPr>
+          <p:cNvPr id="4" name="Text 2"/>
+          <p:cNvSpPr/>
+          <p:nvPr/>
+        </p:nvSpPr>
+        <p:spPr>
+          <a:xfrm>
+            <a:off x="822960" y="1344168"/>
+            <a:ext cx="10545775" cy="731520"/>
+          </a:xfrm>
+          <a:prstGeom prst="rect">
+            <a:avLst/>
+          </a:prstGeom>
+          <a:noFill/>
+        </p:spPr>
+        <p:txBody>
+          <a:bodyPr wrap="square" rtlCol="0" anchor="ctr"/>
+          <a:lstStyle/>
+          <a:p>
+            <a:pPr marL="0" indent="0" algn="l">
+              <a:buNone/>
+            </a:pPr>
+            <a:r>
+              <a:rPr lang="en-US" sz="2800" b="1" dirty="0">
+                <a:solidFill>
+                  <a:srgbClr val="1F2329"/>
+                </a:solidFill>
+                <a:latin typeface="微软雅黑" panose="020B0503020204020204" pitchFamily="34" charset="-122"/>
+                <a:ea typeface="微软雅黑" panose="020B0503020204020204" pitchFamily="34" charset="-122"/>
+                <a:cs typeface="微软雅黑" panose="020B0503020204020204" pitchFamily="34" charset="-120"/>
+              </a:rPr>
+              <a:t>今天就三件事</a:t>
+            </a:r>
+            <a:endParaRPr lang="en-US" sz="2800" dirty="0"/>
+          </a:p>
+        </p:txBody>
+      </p:sp>
+      <p:sp>
+        <p:nvSpPr>
+          <p:cNvPr id="5" name="Text 3"/>
+          <p:cNvSpPr/>
+          <p:nvPr/>
+        </p:nvSpPr>
+        <p:spPr>
+          <a:xfrm>
+            <a:off x="896112" y="2395728"/>
+            <a:ext cx="10454335" cy="397764"/>
+          </a:xfrm>
+          <a:prstGeom prst="rect">
+            <a:avLst/>
+          </a:prstGeom>
+          <a:noFill/>
+        </p:spPr>
+        <p:txBody>
+          <a:bodyPr wrap="square" rtlCol="0" anchor="t"/>
+          <a:lstStyle/>
+          <a:p>
+            <a:pPr marL="0" indent="0" algn="l">
+              <a:lnSpc>
+                <a:spcPct val="115000"/>
+              </a:lnSpc>
+              <a:buNone/>
+            </a:pPr>
+            <a:r>
+              <a:rPr lang="en-US" sz="1800" b="1" dirty="0">
+                <a:solidFill>
+                  <a:srgbClr val="1F4E9C"/>
+                </a:solidFill>
+                <a:latin typeface="微软雅黑" panose="020B0503020204020204" pitchFamily="34" charset="-122"/>
+                <a:ea typeface="微软雅黑" panose="020B0503020204020204" pitchFamily="34" charset="-122"/>
+                <a:cs typeface="微软雅黑" panose="020B0503020204020204" pitchFamily="34" charset="-120"/>
+              </a:rPr>
+              <a:t>•  </a:t>
+            </a:r>
+            <a:r>
+              <a:rPr lang="en-US" sz="1800" dirty="0">
+                <a:solidFill>
+                  <a:srgbClr val="000000"/>
+                </a:solidFill>
+              </a:rPr>
+              <a:t>值传递交的是副本，形参是栈上新格子，所以改不动外面的变量</a:t>
+            </a:r>
+            <a:endParaRPr lang="en-US" sz="1800" dirty="0"/>
+          </a:p>
+        </p:txBody>
+      </p:sp>
+      <p:sp>
+        <p:nvSpPr>
+          <p:cNvPr id="6" name="Text 4"/>
+          <p:cNvSpPr/>
+          <p:nvPr/>
+        </p:nvSpPr>
+        <p:spPr>
+          <a:xfrm>
+            <a:off x="896112" y="2866644"/>
+            <a:ext cx="10454335" cy="397764"/>
+          </a:xfrm>
+          <a:prstGeom prst="rect">
+            <a:avLst/>
+          </a:prstGeom>
+          <a:noFill/>
+        </p:spPr>
+        <p:txBody>
+          <a:bodyPr wrap="square" rtlCol="0" anchor="t"/>
+          <a:lstStyle/>
+          <a:p>
+            <a:pPr marL="0" indent="0" algn="l">
+              <a:lnSpc>
+                <a:spcPct val="115000"/>
+              </a:lnSpc>
+              <a:buNone/>
+            </a:pPr>
+            <a:r>
+              <a:rPr lang="en-US" sz="1800" b="1" dirty="0">
+                <a:solidFill>
+                  <a:srgbClr val="1F4E9C"/>
+                </a:solidFill>
+                <a:latin typeface="微软雅黑" panose="020B0503020204020204" pitchFamily="34" charset="-122"/>
+                <a:ea typeface="微软雅黑" panose="020B0503020204020204" pitchFamily="34" charset="-122"/>
+                <a:cs typeface="微软雅黑" panose="020B0503020204020204" pitchFamily="34" charset="-120"/>
+              </a:rPr>
+              <a:t>•  </a:t>
+            </a:r>
+            <a:r>
+              <a:rPr lang="en-US" sz="1800" dirty="0">
+                <a:solidFill>
+                  <a:srgbClr val="000000"/>
+                </a:solidFill>
+              </a:rPr>
+              <a:t>要改得动就交地址：指针传参顺着*改，引用传参用别名改</a:t>
+            </a:r>
+            <a:endParaRPr lang="en-US" sz="1800" dirty="0"/>
+          </a:p>
+        </p:txBody>
+      </p:sp>
+      <p:sp>
+        <p:nvSpPr>
+          <p:cNvPr id="7" name="Text 5"/>
+          <p:cNvSpPr/>
+          <p:nvPr/>
+        </p:nvSpPr>
+        <p:spPr>
+          <a:xfrm>
+            <a:off x="896112" y="3337560"/>
+            <a:ext cx="10454335" cy="397764"/>
+          </a:xfrm>
+          <a:prstGeom prst="rect">
+            <a:avLst/>
+          </a:prstGeom>
+          <a:noFill/>
+        </p:spPr>
+        <p:txBody>
+          <a:bodyPr wrap="square" rtlCol="0" anchor="t"/>
+          <a:lstStyle/>
+          <a:p>
+            <a:pPr marL="0" indent="0" algn="l">
+              <a:lnSpc>
+                <a:spcPct val="115000"/>
+              </a:lnSpc>
+              <a:buNone/>
+            </a:pPr>
+            <a:r>
+              <a:rPr lang="en-US" sz="1800" b="1" dirty="0">
+                <a:solidFill>
+                  <a:srgbClr val="1F4E9C"/>
+                </a:solidFill>
+                <a:latin typeface="微软雅黑" panose="020B0503020204020204" pitchFamily="34" charset="-122"/>
+                <a:ea typeface="微软雅黑" panose="020B0503020204020204" pitchFamily="34" charset="-122"/>
+                <a:cs typeface="微软雅黑" panose="020B0503020204020204" pitchFamily="34" charset="-120"/>
+              </a:rPr>
+              <a:t>•  </a:t>
+            </a:r>
+            <a:r>
+              <a:rPr lang="en-US" sz="1800" dirty="0">
+                <a:solidFill>
+                  <a:srgbClr val="000000"/>
+                </a:solidFill>
+              </a:rPr>
+              <a:t>引用两条规矩：定义时初始化，绑定后不改绑</a:t>
+            </a:r>
+            <a:endParaRPr lang="en-US" sz="1800" dirty="0"/>
+          </a:p>
+        </p:txBody>
+      </p:sp>
+      <p:sp>
+        <p:nvSpPr>
+          <p:cNvPr id="8" name="Text 6"/>
+          <p:cNvSpPr/>
+          <p:nvPr/>
+        </p:nvSpPr>
+        <p:spPr>
+          <a:xfrm>
+            <a:off x="822960" y="3899916"/>
             <a:ext cx="10545775" cy="358902"/>
           </a:xfrm>
           <a:prstGeom prst="rect">
             <a:avLst/>
           </a:prstGeom>
           <a:noFill/>
-          <a:ln/>
         </p:spPr>
         <p:txBody>
           <a:bodyPr wrap="square" rtlCol="0" anchor="t"/>
           <a:lstStyle/>
           <a:p>
-            <a:pPr algn="l" indent="0" marL="0">
+            <a:pPr marL="0" indent="0" algn="l">
               <a:buNone/>
             </a:pPr>
             <a:r>
@@ -8812,11 +7327,11 @@
                 <a:solidFill>
                   <a:srgbClr val="8A9099"/>
                 </a:solidFill>
-                <a:latin typeface="微软雅黑" pitchFamily="34" charset="0"/>
-                <a:ea typeface="微软雅黑" pitchFamily="34" charset="-122"/>
-                <a:cs typeface="微软雅黑" pitchFamily="34" charset="-120"/>
-              </a:rPr>
-              <a:t>要读不要改，值传递就够；要改，指针或引用二选一</a:t>
+                <a:latin typeface="微软雅黑" panose="020B0503020204020204" pitchFamily="34" charset="-122"/>
+                <a:ea typeface="微软雅黑" panose="020B0503020204020204" pitchFamily="34" charset="-122"/>
+                <a:cs typeface="微软雅黑" panose="020B0503020204020204" pitchFamily="34" charset="-120"/>
+              </a:rPr>
+              <a:t>下一节：递归与综合实战，从零手写顺序表和单链表</a:t>
             </a:r>
             <a:endParaRPr lang="en-US" sz="1500" dirty="0"/>
           </a:p>
@@ -8873,7 +7388,7 @@
     </a:clrScheme>
     <a:fontScheme name="Office">
       <a:majorFont>
-        <a:latin typeface="Calibri Light" panose="020F0302020204030204"/>
+        <a:latin typeface="Calibri Light"/>
         <a:ea typeface=""/>
         <a:cs typeface=""/>
         <a:font script="Jpan" typeface="游ゴシック Light"/>
@@ -8906,26 +7421,9 @@
         <a:font script="Viet" typeface="Times New Roman"/>
         <a:font script="Uigh" typeface="Microsoft Uighur"/>
         <a:font script="Geor" typeface="Sylfaen"/>
-        <a:font script="Armn" typeface="Arial"/>
-        <a:font script="Bugi" typeface="Leelawadee UI"/>
-        <a:font script="Bopo" typeface="Microsoft JhengHei"/>
-        <a:font script="Java" typeface="Javanese Text"/>
-        <a:font script="Lisu" typeface="Segoe UI"/>
-        <a:font script="Mymr" typeface="Myanmar Text"/>
-        <a:font script="Nkoo" typeface="Ebrima"/>
-        <a:font script="Olck" typeface="Nirmala UI"/>
-        <a:font script="Osma" typeface="Ebrima"/>
-        <a:font script="Phag" typeface="Phagspa"/>
-        <a:font script="Syrn" typeface="Estrangelo Edessa"/>
-        <a:font script="Syrj" typeface="Estrangelo Edessa"/>
-        <a:font script="Syre" typeface="Estrangelo Edessa"/>
-        <a:font script="Sora" typeface="Nirmala UI"/>
-        <a:font script="Tale" typeface="Microsoft Tai Le"/>
-        <a:font script="Talu" typeface="Microsoft New Tai Lue"/>
-        <a:font script="Tfng" typeface="Ebrima"/>
       </a:majorFont>
       <a:minorFont>
-        <a:latin typeface="Calibri" panose="020F0502020204030204"/>
+        <a:latin typeface="Calibri"/>
         <a:ea typeface=""/>
         <a:cs typeface=""/>
         <a:font script="Jpan" typeface="游ゴシック"/>
@@ -8958,23 +7456,6 @@
         <a:font script="Viet" typeface="Arial"/>
         <a:font script="Uigh" typeface="Microsoft Uighur"/>
         <a:font script="Geor" typeface="Sylfaen"/>
-        <a:font script="Armn" typeface="Arial"/>
-        <a:font script="Bugi" typeface="Leelawadee UI"/>
-        <a:font script="Bopo" typeface="Microsoft JhengHei"/>
-        <a:font script="Java" typeface="Javanese Text"/>
-        <a:font script="Lisu" typeface="Segoe UI"/>
-        <a:font script="Mymr" typeface="Myanmar Text"/>
-        <a:font script="Nkoo" typeface="Ebrima"/>
-        <a:font script="Olck" typeface="Nirmala UI"/>
-        <a:font script="Osma" typeface="Ebrima"/>
-        <a:font script="Phag" typeface="Phagspa"/>
-        <a:font script="Syrn" typeface="Estrangelo Edessa"/>
-        <a:font script="Syrj" typeface="Estrangelo Edessa"/>
-        <a:font script="Syre" typeface="Estrangelo Edessa"/>
-        <a:font script="Sora" typeface="Nirmala UI"/>
-        <a:font script="Tale" typeface="Microsoft Tai Le"/>
-        <a:font script="Talu" typeface="Microsoft New Tai Lue"/>
-        <a:font script="Tfng" typeface="Ebrima"/>
       </a:minorFont>
     </a:fontScheme>
     <a:fmtScheme name="Office">
@@ -9115,8 +7596,265 @@
       </a:bgFillStyleLst>
     </a:fmtScheme>
   </a:themeElements>
-  <a:objectDefaults/>
-  <a:extraClrSchemeLst/>
+  <a:extLst>
+    <a:ext uri="{05A4C25C-085E-4340-85A3-A5531E510DB2}">
+      <thm15:themeFamily xmlns:thm15="http://schemas.microsoft.com/office/thememl/2012/main" name="Office Theme" id="{62F939B6-93AF-4DB8-9C6B-D6C7DFDC589F}" vid="{4A3C46E8-61CC-4603-A589-7422A47A8E4A}"/>
+    </a:ext>
+  </a:extLst>
+</a:theme>
+</file>
+
+<file path=ppt/theme/theme2.xml><?xml version="1.0" encoding="utf-8"?>
+<a:theme xmlns:a="http://schemas.openxmlformats.org/drawingml/2006/main" name="Office Theme">
+  <a:themeElements>
+    <a:clrScheme name="Office">
+      <a:dk1>
+        <a:sysClr val="windowText" lastClr="000000"/>
+      </a:dk1>
+      <a:lt1>
+        <a:sysClr val="window" lastClr="FFFFFF"/>
+      </a:lt1>
+      <a:dk2>
+        <a:srgbClr val="44546A"/>
+      </a:dk2>
+      <a:lt2>
+        <a:srgbClr val="E7E6E6"/>
+      </a:lt2>
+      <a:accent1>
+        <a:srgbClr val="4472C4"/>
+      </a:accent1>
+      <a:accent2>
+        <a:srgbClr val="ED7D31"/>
+      </a:accent2>
+      <a:accent3>
+        <a:srgbClr val="A5A5A5"/>
+      </a:accent3>
+      <a:accent4>
+        <a:srgbClr val="FFC000"/>
+      </a:accent4>
+      <a:accent5>
+        <a:srgbClr val="5B9BD5"/>
+      </a:accent5>
+      <a:accent6>
+        <a:srgbClr val="70AD47"/>
+      </a:accent6>
+      <a:hlink>
+        <a:srgbClr val="0563C1"/>
+      </a:hlink>
+      <a:folHlink>
+        <a:srgbClr val="954F72"/>
+      </a:folHlink>
+    </a:clrScheme>
+    <a:fontScheme name="Office">
+      <a:majorFont>
+        <a:latin typeface="Calibri Light"/>
+        <a:ea typeface=""/>
+        <a:cs typeface=""/>
+        <a:font script="Jpan" typeface="游ゴシック Light"/>
+        <a:font script="Hang" typeface="맑은 고딕"/>
+        <a:font script="Hans" typeface="等线 Light"/>
+        <a:font script="Hant" typeface="新細明體"/>
+        <a:font script="Arab" typeface="Times New Roman"/>
+        <a:font script="Hebr" typeface="Times New Roman"/>
+        <a:font script="Thai" typeface="Angsana New"/>
+        <a:font script="Ethi" typeface="Nyala"/>
+        <a:font script="Beng" typeface="Vrinda"/>
+        <a:font script="Gujr" typeface="Shruti"/>
+        <a:font script="Khmr" typeface="MoolBoran"/>
+        <a:font script="Knda" typeface="Tunga"/>
+        <a:font script="Guru" typeface="Raavi"/>
+        <a:font script="Cans" typeface="Euphemia"/>
+        <a:font script="Cher" typeface="Plantagenet Cherokee"/>
+        <a:font script="Yiii" typeface="Microsoft Yi Baiti"/>
+        <a:font script="Tibt" typeface="Microsoft Himalaya"/>
+        <a:font script="Thaa" typeface="MV Boli"/>
+        <a:font script="Deva" typeface="Mangal"/>
+        <a:font script="Telu" typeface="Gautami"/>
+        <a:font script="Taml" typeface="Latha"/>
+        <a:font script="Syrc" typeface="Estrangelo Edessa"/>
+        <a:font script="Orya" typeface="Kalinga"/>
+        <a:font script="Mlym" typeface="Kartika"/>
+        <a:font script="Laoo" typeface="DokChampa"/>
+        <a:font script="Sinh" typeface="Iskoola Pota"/>
+        <a:font script="Mong" typeface="Mongolian Baiti"/>
+        <a:font script="Viet" typeface="Times New Roman"/>
+        <a:font script="Uigh" typeface="Microsoft Uighur"/>
+        <a:font script="Geor" typeface="Sylfaen"/>
+      </a:majorFont>
+      <a:minorFont>
+        <a:latin typeface="Calibri"/>
+        <a:ea typeface=""/>
+        <a:cs typeface=""/>
+        <a:font script="Jpan" typeface="游ゴシック"/>
+        <a:font script="Hang" typeface="맑은 고딕"/>
+        <a:font script="Hans" typeface="等线"/>
+        <a:font script="Hant" typeface="新細明體"/>
+        <a:font script="Arab" typeface="Arial"/>
+        <a:font script="Hebr" typeface="Arial"/>
+        <a:font script="Thai" typeface="Cordia New"/>
+        <a:font script="Ethi" typeface="Nyala"/>
+        <a:font script="Beng" typeface="Vrinda"/>
+        <a:font script="Gujr" typeface="Shruti"/>
+        <a:font script="Khmr" typeface="DaunPenh"/>
+        <a:font script="Knda" typeface="Tunga"/>
+        <a:font script="Guru" typeface="Raavi"/>
+        <a:font script="Cans" typeface="Euphemia"/>
+        <a:font script="Cher" typeface="Plantagenet Cherokee"/>
+        <a:font script="Yiii" typeface="Microsoft Yi Baiti"/>
+        <a:font script="Tibt" typeface="Microsoft Himalaya"/>
+        <a:font script="Thaa" typeface="MV Boli"/>
+        <a:font script="Deva" typeface="Mangal"/>
+        <a:font script="Telu" typeface="Gautami"/>
+        <a:font script="Taml" typeface="Latha"/>
+        <a:font script="Syrc" typeface="Estrangelo Edessa"/>
+        <a:font script="Orya" typeface="Kalinga"/>
+        <a:font script="Mlym" typeface="Kartika"/>
+        <a:font script="Laoo" typeface="DokChampa"/>
+        <a:font script="Sinh" typeface="Iskoola Pota"/>
+        <a:font script="Mong" typeface="Mongolian Baiti"/>
+        <a:font script="Viet" typeface="Arial"/>
+        <a:font script="Uigh" typeface="Microsoft Uighur"/>
+        <a:font script="Geor" typeface="Sylfaen"/>
+      </a:minorFont>
+    </a:fontScheme>
+    <a:fmtScheme name="Office">
+      <a:fillStyleLst>
+        <a:solidFill>
+          <a:schemeClr val="phClr"/>
+        </a:solidFill>
+        <a:gradFill rotWithShape="1">
+          <a:gsLst>
+            <a:gs pos="0">
+              <a:schemeClr val="phClr">
+                <a:lumMod val="110000"/>
+                <a:satMod val="105000"/>
+                <a:tint val="67000"/>
+              </a:schemeClr>
+            </a:gs>
+            <a:gs pos="50000">
+              <a:schemeClr val="phClr">
+                <a:lumMod val="105000"/>
+                <a:satMod val="103000"/>
+                <a:tint val="73000"/>
+              </a:schemeClr>
+            </a:gs>
+            <a:gs pos="100000">
+              <a:schemeClr val="phClr">
+                <a:lumMod val="105000"/>
+                <a:satMod val="109000"/>
+                <a:tint val="81000"/>
+              </a:schemeClr>
+            </a:gs>
+          </a:gsLst>
+          <a:lin ang="5400000" scaled="0"/>
+        </a:gradFill>
+        <a:gradFill rotWithShape="1">
+          <a:gsLst>
+            <a:gs pos="0">
+              <a:schemeClr val="phClr">
+                <a:satMod val="103000"/>
+                <a:lumMod val="102000"/>
+                <a:tint val="94000"/>
+              </a:schemeClr>
+            </a:gs>
+            <a:gs pos="50000">
+              <a:schemeClr val="phClr">
+                <a:satMod val="110000"/>
+                <a:lumMod val="100000"/>
+                <a:shade val="100000"/>
+              </a:schemeClr>
+            </a:gs>
+            <a:gs pos="100000">
+              <a:schemeClr val="phClr">
+                <a:lumMod val="99000"/>
+                <a:satMod val="120000"/>
+                <a:shade val="78000"/>
+              </a:schemeClr>
+            </a:gs>
+          </a:gsLst>
+          <a:lin ang="5400000" scaled="0"/>
+        </a:gradFill>
+      </a:fillStyleLst>
+      <a:lnStyleLst>
+        <a:ln w="6350" cap="flat" cmpd="sng" algn="ctr">
+          <a:solidFill>
+            <a:schemeClr val="phClr"/>
+          </a:solidFill>
+          <a:prstDash val="solid"/>
+          <a:miter lim="800000"/>
+        </a:ln>
+        <a:ln w="12700" cap="flat" cmpd="sng" algn="ctr">
+          <a:solidFill>
+            <a:schemeClr val="phClr"/>
+          </a:solidFill>
+          <a:prstDash val="solid"/>
+          <a:miter lim="800000"/>
+        </a:ln>
+        <a:ln w="19050" cap="flat" cmpd="sng" algn="ctr">
+          <a:solidFill>
+            <a:schemeClr val="phClr"/>
+          </a:solidFill>
+          <a:prstDash val="solid"/>
+          <a:miter lim="800000"/>
+        </a:ln>
+      </a:lnStyleLst>
+      <a:effectStyleLst>
+        <a:effectStyle>
+          <a:effectLst/>
+        </a:effectStyle>
+        <a:effectStyle>
+          <a:effectLst/>
+        </a:effectStyle>
+        <a:effectStyle>
+          <a:effectLst>
+            <a:outerShdw blurRad="57150" dist="19050" dir="5400000" algn="ctr" rotWithShape="0">
+              <a:srgbClr val="000000">
+                <a:alpha val="63000"/>
+              </a:srgbClr>
+            </a:outerShdw>
+          </a:effectLst>
+        </a:effectStyle>
+      </a:effectStyleLst>
+      <a:bgFillStyleLst>
+        <a:solidFill>
+          <a:schemeClr val="phClr"/>
+        </a:solidFill>
+        <a:solidFill>
+          <a:schemeClr val="phClr">
+            <a:tint val="95000"/>
+            <a:satMod val="170000"/>
+          </a:schemeClr>
+        </a:solidFill>
+        <a:gradFill rotWithShape="1">
+          <a:gsLst>
+            <a:gs pos="0">
+              <a:schemeClr val="phClr">
+                <a:tint val="93000"/>
+                <a:satMod val="150000"/>
+                <a:shade val="98000"/>
+                <a:lumMod val="102000"/>
+              </a:schemeClr>
+            </a:gs>
+            <a:gs pos="50000">
+              <a:schemeClr val="phClr">
+                <a:tint val="98000"/>
+                <a:satMod val="130000"/>
+                <a:shade val="90000"/>
+                <a:lumMod val="103000"/>
+              </a:schemeClr>
+            </a:gs>
+            <a:gs pos="100000">
+              <a:schemeClr val="phClr">
+                <a:shade val="63000"/>
+                <a:satMod val="120000"/>
+              </a:schemeClr>
+            </a:gs>
+          </a:gsLst>
+          <a:lin ang="5400000" scaled="0"/>
+        </a:gradFill>
+      </a:bgFillStyleLst>
+    </a:fmtScheme>
+  </a:themeElements>
   <a:extLst>
     <a:ext uri="{05A4C25C-085E-4340-85A3-A5531E510DB2}">
       <thm15:themeFamily xmlns:thm15="http://schemas.microsoft.com/office/thememl/2012/main" name="Office Theme" id="{62F939B6-93AF-4DB8-9C6B-D6C7DFDC589F}" vid="{4A3C46E8-61CC-4603-A589-7422A47A8E4A}"/>
